--- a/seminar/Fusing global attention and self-attention for better performance and.pptx
+++ b/seminar/Fusing global attention and self-attention for better performance and.pptx
@@ -211,7 +211,7 @@
           <a:p>
             <a:fld id="{80A41D00-71D3-415C-A3D7-FEE25CF307DF}" type="datetimeFigureOut">
               <a:rPr lang="zh-TW" altLang="en-US" smtClean="0"/>
-              <a:t>2026/9/12</a:t>
+              <a:t>2026/9/13</a:t>
             </a:fld>
             <a:endParaRPr lang="zh-TW" altLang="en-US"/>
           </a:p>
@@ -628,7 +628,7 @@
           <a:p>
             <a:fld id="{EE3E04FD-0122-4C23-A7F7-90F50FA97CFB}" type="datetime1">
               <a:rPr lang="zh-TW" altLang="en-US" smtClean="0"/>
-              <a:t>2026/9/12</a:t>
+              <a:t>2026/9/13</a:t>
             </a:fld>
             <a:endParaRPr lang="zh-TW" altLang="en-US"/>
           </a:p>
@@ -684,6 +684,58 @@
               <a:rPr lang="zh-TW" altLang="en-US" smtClean="0"/>
               <a:t>‹#›</a:t>
             </a:fld>
+            <a:endParaRPr lang="zh-TW" altLang="en-US"/>
+          </a:p>
+        </p:txBody>
+      </p:sp>
+      <p:sp>
+        <p:nvSpPr>
+          <p:cNvPr id="7" name="矩形 6">
+            <a:extLst>
+              <a:ext uri="{FF2B5EF4-FFF2-40B4-BE49-F238E27FC236}">
+                <a16:creationId xmlns:a16="http://schemas.microsoft.com/office/drawing/2014/main" id="{E3F035D8-9237-5786-6F02-4B1234406D00}"/>
+              </a:ext>
+            </a:extLst>
+          </p:cNvPr>
+          <p:cNvSpPr/>
+          <p:nvPr userDrawn="1"/>
+        </p:nvSpPr>
+        <p:spPr>
+          <a:xfrm>
+            <a:off x="0" y="1"/>
+            <a:ext cx="12192000" cy="6858000"/>
+          </a:xfrm>
+          <a:prstGeom prst="rect">
+            <a:avLst/>
+          </a:prstGeom>
+          <a:solidFill>
+            <a:srgbClr val="DCD8C6"/>
+          </a:solidFill>
+          <a:ln>
+            <a:noFill/>
+          </a:ln>
+        </p:spPr>
+        <p:style>
+          <a:lnRef idx="2">
+            <a:schemeClr val="accent1">
+              <a:shade val="15000"/>
+            </a:schemeClr>
+          </a:lnRef>
+          <a:fillRef idx="1">
+            <a:schemeClr val="accent1"/>
+          </a:fillRef>
+          <a:effectRef idx="0">
+            <a:schemeClr val="accent1"/>
+          </a:effectRef>
+          <a:fontRef idx="minor">
+            <a:schemeClr val="lt1"/>
+          </a:fontRef>
+        </p:style>
+        <p:txBody>
+          <a:bodyPr rtlCol="0" anchor="ctr"/>
+          <a:lstStyle/>
+          <a:p>
+            <a:pPr algn="ctr"/>
             <a:endParaRPr lang="zh-TW" altLang="en-US"/>
           </a:p>
         </p:txBody>
@@ -828,7 +880,7 @@
           <a:p>
             <a:fld id="{8DD69F33-1609-4AA2-8E60-EEDF43633812}" type="datetime1">
               <a:rPr lang="zh-TW" altLang="en-US" smtClean="0"/>
-              <a:t>2026/9/12</a:t>
+              <a:t>2026/9/13</a:t>
             </a:fld>
             <a:endParaRPr lang="zh-TW" altLang="en-US"/>
           </a:p>
@@ -1038,7 +1090,7 @@
           <a:p>
             <a:fld id="{73295497-16C4-4AF7-8525-51C7B214CA55}" type="datetime1">
               <a:rPr lang="zh-TW" altLang="en-US" smtClean="0"/>
-              <a:t>2026/9/12</a:t>
+              <a:t>2026/9/13</a:t>
             </a:fld>
             <a:endParaRPr lang="zh-TW" altLang="en-US"/>
           </a:p>
@@ -1180,38 +1232,38 @@
           <a:p>
             <a:pPr lvl="0"/>
             <a:r>
-              <a:rPr lang="en-US" altLang="zh-TW"/>
+              <a:rPr lang="en-US" altLang="zh-TW" dirty="0"/>
               <a:t>Click to edit Master text styles</a:t>
             </a:r>
           </a:p>
           <a:p>
             <a:pPr lvl="1"/>
             <a:r>
-              <a:rPr lang="en-US" altLang="zh-TW"/>
+              <a:rPr lang="en-US" altLang="zh-TW" dirty="0"/>
               <a:t>Second level</a:t>
             </a:r>
           </a:p>
           <a:p>
             <a:pPr lvl="2"/>
             <a:r>
-              <a:rPr lang="en-US" altLang="zh-TW"/>
+              <a:rPr lang="en-US" altLang="zh-TW" dirty="0"/>
               <a:t>Third level</a:t>
             </a:r>
           </a:p>
           <a:p>
             <a:pPr lvl="3"/>
             <a:r>
-              <a:rPr lang="en-US" altLang="zh-TW"/>
+              <a:rPr lang="en-US" altLang="zh-TW" dirty="0"/>
               <a:t>Fourth level</a:t>
             </a:r>
           </a:p>
           <a:p>
             <a:pPr lvl="4"/>
             <a:r>
-              <a:rPr lang="en-US" altLang="zh-TW"/>
+              <a:rPr lang="en-US" altLang="zh-TW" dirty="0"/>
               <a:t>Fifth level</a:t>
             </a:r>
-            <a:endParaRPr lang="zh-TW" altLang="en-US"/>
+            <a:endParaRPr lang="zh-TW" altLang="en-US" dirty="0"/>
           </a:p>
         </p:txBody>
       </p:sp>
@@ -1238,7 +1290,7 @@
           <a:p>
             <a:fld id="{6AD93685-C1D2-48C9-9284-D623AD71F952}" type="datetime1">
               <a:rPr lang="zh-TW" altLang="en-US" smtClean="0"/>
-              <a:t>2026/9/12</a:t>
+              <a:t>2026/9/13</a:t>
             </a:fld>
             <a:endParaRPr lang="zh-TW" altLang="en-US"/>
           </a:p>
@@ -1295,6 +1347,124 @@
               <a:t>‹#›</a:t>
             </a:fld>
             <a:endParaRPr lang="zh-TW" altLang="en-US"/>
+          </a:p>
+        </p:txBody>
+      </p:sp>
+      <p:cxnSp>
+        <p:nvCxnSpPr>
+          <p:cNvPr id="10" name="直線接點 9">
+            <a:extLst>
+              <a:ext uri="{FF2B5EF4-FFF2-40B4-BE49-F238E27FC236}">
+                <a16:creationId xmlns:a16="http://schemas.microsoft.com/office/drawing/2014/main" id="{3B36FA9A-7D9B-0363-5F4A-E5A2AC6EBB4B}"/>
+              </a:ext>
+            </a:extLst>
+          </p:cNvPr>
+          <p:cNvCxnSpPr>
+            <a:cxnSpLocks/>
+          </p:cNvCxnSpPr>
+          <p:nvPr userDrawn="1"/>
+        </p:nvCxnSpPr>
+        <p:spPr>
+          <a:xfrm>
+            <a:off x="351691" y="6400800"/>
+            <a:ext cx="3382109" cy="0"/>
+          </a:xfrm>
+          <a:prstGeom prst="line">
+            <a:avLst/>
+          </a:prstGeom>
+          <a:ln w="38100">
+            <a:solidFill>
+              <a:schemeClr val="bg2">
+                <a:lumMod val="50000"/>
+              </a:schemeClr>
+            </a:solidFill>
+          </a:ln>
+        </p:spPr>
+        <p:style>
+          <a:lnRef idx="2">
+            <a:schemeClr val="accent1"/>
+          </a:lnRef>
+          <a:fillRef idx="0">
+            <a:schemeClr val="accent1"/>
+          </a:fillRef>
+          <a:effectRef idx="1">
+            <a:schemeClr val="accent1"/>
+          </a:effectRef>
+          <a:fontRef idx="minor">
+            <a:schemeClr val="tx1"/>
+          </a:fontRef>
+        </p:style>
+      </p:cxnSp>
+      <p:sp>
+        <p:nvSpPr>
+          <p:cNvPr id="13" name="文字方塊 12">
+            <a:extLst>
+              <a:ext uri="{FF2B5EF4-FFF2-40B4-BE49-F238E27FC236}">
+                <a16:creationId xmlns:a16="http://schemas.microsoft.com/office/drawing/2014/main" id="{0F4FC24F-7730-9B71-C29B-0282074E3604}"/>
+              </a:ext>
+            </a:extLst>
+          </p:cNvPr>
+          <p:cNvSpPr txBox="1"/>
+          <p:nvPr userDrawn="1"/>
+        </p:nvSpPr>
+        <p:spPr>
+          <a:xfrm>
+            <a:off x="477713" y="6458148"/>
+            <a:ext cx="3130063" cy="307777"/>
+          </a:xfrm>
+          <a:prstGeom prst="rect">
+            <a:avLst/>
+          </a:prstGeom>
+          <a:noFill/>
+        </p:spPr>
+        <p:txBody>
+          <a:bodyPr wrap="square" rtlCol="0">
+            <a:spAutoFit/>
+          </a:bodyPr>
+          <a:lstStyle/>
+          <a:p>
+            <a:pPr marL="0" marR="0" lvl="0" indent="0" algn="ctr" defTabSz="914400" rtl="0" eaLnBrk="1" fontAlgn="auto" latinLnBrk="0" hangingPunct="1">
+              <a:lnSpc>
+                <a:spcPct val="100000"/>
+              </a:lnSpc>
+              <a:spcBef>
+                <a:spcPts val="0"/>
+              </a:spcBef>
+              <a:spcAft>
+                <a:spcPts val="0"/>
+              </a:spcAft>
+              <a:buClrTx/>
+              <a:buSzTx/>
+              <a:buFontTx/>
+              <a:buNone/>
+              <a:tabLst/>
+              <a:defRPr/>
+            </a:pPr>
+            <a:r>
+              <a:rPr lang="en-US" altLang="zh-TW" sz="1400" b="1" i="1" dirty="0">
+                <a:solidFill>
+                  <a:schemeClr val="bg2">
+                    <a:lumMod val="50000"/>
+                  </a:schemeClr>
+                </a:solidFill>
+                <a:latin typeface="+mn-lt"/>
+              </a:rPr>
+              <a:t>115-1</a:t>
+            </a:r>
+            <a:r>
+              <a:rPr lang="zh-TW" altLang="zh-TW" sz="1400" b="1" i="1" kern="1200" dirty="0">
+                <a:solidFill>
+                  <a:schemeClr val="bg2">
+                    <a:lumMod val="50000"/>
+                  </a:schemeClr>
+                </a:solidFill>
+                <a:effectLst/>
+                <a:latin typeface="+mn-lt"/>
+                <a:ea typeface="+mn-ea"/>
+                <a:cs typeface="+mn-cs"/>
+              </a:rPr>
+              <a:t>生物統計與資料科學實證討論</a:t>
+            </a:r>
           </a:p>
         </p:txBody>
       </p:sp>
@@ -1514,7 +1684,7 @@
           <a:p>
             <a:fld id="{1FF21E1F-1389-41B2-9326-3555E762196C}" type="datetime1">
               <a:rPr lang="zh-TW" altLang="en-US" smtClean="0"/>
-              <a:t>2026/9/12</a:t>
+              <a:t>2026/9/13</a:t>
             </a:fld>
             <a:endParaRPr lang="zh-TW" altLang="en-US"/>
           </a:p>
@@ -1782,7 +1952,7 @@
           <a:p>
             <a:fld id="{0F280AFD-1CC5-4158-B562-616B460CE827}" type="datetime1">
               <a:rPr lang="zh-TW" altLang="en-US" smtClean="0"/>
-              <a:t>2026/9/12</a:t>
+              <a:t>2026/9/13</a:t>
             </a:fld>
             <a:endParaRPr lang="zh-TW" altLang="en-US"/>
           </a:p>
@@ -2197,7 +2367,7 @@
           <a:p>
             <a:fld id="{3B1161B6-5D58-4DCC-BC37-4C984D46F867}" type="datetime1">
               <a:rPr lang="zh-TW" altLang="en-US" smtClean="0"/>
-              <a:t>2026/9/12</a:t>
+              <a:t>2026/9/13</a:t>
             </a:fld>
             <a:endParaRPr lang="zh-TW" altLang="en-US"/>
           </a:p>
@@ -2339,7 +2509,7 @@
           <a:p>
             <a:fld id="{A8029CEB-4CFB-4511-9F4B-7E9E39F7DEB1}" type="datetime1">
               <a:rPr lang="zh-TW" altLang="en-US" smtClean="0"/>
-              <a:t>2026/9/12</a:t>
+              <a:t>2026/9/13</a:t>
             </a:fld>
             <a:endParaRPr lang="zh-TW" altLang="en-US"/>
           </a:p>
@@ -2452,7 +2622,7 @@
           <a:p>
             <a:fld id="{7320994F-6149-48E5-9E9E-81C33751446F}" type="datetime1">
               <a:rPr lang="zh-TW" altLang="en-US" smtClean="0"/>
-              <a:t>2026/9/12</a:t>
+              <a:t>2026/9/13</a:t>
             </a:fld>
             <a:endParaRPr lang="zh-TW" altLang="en-US"/>
           </a:p>
@@ -2765,7 +2935,7 @@
           <a:p>
             <a:fld id="{466FEA22-09E0-4978-9370-A04C2FBE3857}" type="datetime1">
               <a:rPr lang="zh-TW" altLang="en-US" smtClean="0"/>
-              <a:t>2026/9/12</a:t>
+              <a:t>2026/9/13</a:t>
             </a:fld>
             <a:endParaRPr lang="zh-TW" altLang="en-US"/>
           </a:p>
@@ -3054,7 +3224,7 @@
           <a:p>
             <a:fld id="{7CB9A6F0-A763-4F87-94DC-630F55A79544}" type="datetime1">
               <a:rPr lang="zh-TW" altLang="en-US" smtClean="0"/>
-              <a:t>2026/9/12</a:t>
+              <a:t>2026/9/13</a:t>
             </a:fld>
             <a:endParaRPr lang="zh-TW" altLang="en-US"/>
           </a:p>
@@ -3297,7 +3467,7 @@
           <a:p>
             <a:fld id="{51BA3C4B-293B-4117-8757-544BD5161A75}" type="datetime1">
               <a:rPr lang="zh-TW" altLang="en-US" smtClean="0"/>
-              <a:t>2026/9/12</a:t>
+              <a:t>2026/9/13</a:t>
             </a:fld>
             <a:endParaRPr lang="zh-TW" altLang="en-US"/>
           </a:p>
@@ -8013,7 +8183,7 @@
         </p:nvSpPr>
         <p:spPr>
           <a:xfrm>
-            <a:off x="1319645" y="1847850"/>
+            <a:off x="1801091" y="1690688"/>
             <a:ext cx="9552709" cy="4351338"/>
           </a:xfrm>
         </p:spPr>
@@ -14670,7 +14840,7 @@
         </p:nvSpPr>
         <p:spPr>
           <a:xfrm>
-            <a:off x="2328278" y="3331058"/>
+            <a:off x="2966516" y="3262432"/>
             <a:ext cx="650512" cy="523220"/>
           </a:xfrm>
           <a:prstGeom prst="rect">
@@ -14715,7 +14885,7 @@
         </p:nvSpPr>
         <p:spPr>
           <a:xfrm>
-            <a:off x="2924852" y="3331058"/>
+            <a:off x="3563090" y="3262432"/>
             <a:ext cx="650512" cy="523220"/>
           </a:xfrm>
           <a:prstGeom prst="rect">
@@ -14760,7 +14930,7 @@
         </p:nvSpPr>
         <p:spPr>
           <a:xfrm>
-            <a:off x="3575364" y="3331058"/>
+            <a:off x="4213602" y="3262432"/>
             <a:ext cx="650512" cy="523220"/>
           </a:xfrm>
           <a:prstGeom prst="rect">
@@ -14805,7 +14975,7 @@
         </p:nvSpPr>
         <p:spPr>
           <a:xfrm>
-            <a:off x="4225876" y="3331058"/>
+            <a:off x="4864114" y="3262432"/>
             <a:ext cx="650512" cy="523220"/>
           </a:xfrm>
           <a:prstGeom prst="rect">
@@ -14850,7 +15020,7 @@
         </p:nvSpPr>
         <p:spPr>
           <a:xfrm>
-            <a:off x="4876388" y="3331058"/>
+            <a:off x="5514626" y="3262432"/>
             <a:ext cx="650512" cy="523220"/>
           </a:xfrm>
           <a:prstGeom prst="rect">
@@ -14895,7 +15065,7 @@
         </p:nvSpPr>
         <p:spPr>
           <a:xfrm>
-            <a:off x="2328278" y="3761851"/>
+            <a:off x="2966516" y="3693225"/>
             <a:ext cx="650512" cy="523220"/>
           </a:xfrm>
           <a:prstGeom prst="rect">
@@ -14940,7 +15110,7 @@
         </p:nvSpPr>
         <p:spPr>
           <a:xfrm>
-            <a:off x="2924852" y="3761851"/>
+            <a:off x="3563090" y="3693225"/>
             <a:ext cx="650512" cy="523220"/>
           </a:xfrm>
           <a:prstGeom prst="rect">
@@ -14985,7 +15155,7 @@
         </p:nvSpPr>
         <p:spPr>
           <a:xfrm>
-            <a:off x="3575364" y="3761851"/>
+            <a:off x="4213602" y="3693225"/>
             <a:ext cx="650512" cy="523220"/>
           </a:xfrm>
           <a:prstGeom prst="rect">
@@ -15030,7 +15200,7 @@
         </p:nvSpPr>
         <p:spPr>
           <a:xfrm>
-            <a:off x="4225876" y="3761851"/>
+            <a:off x="4864114" y="3693225"/>
             <a:ext cx="650512" cy="523220"/>
           </a:xfrm>
           <a:prstGeom prst="rect">
@@ -15075,7 +15245,7 @@
         </p:nvSpPr>
         <p:spPr>
           <a:xfrm>
-            <a:off x="4876388" y="3761851"/>
+            <a:off x="5514626" y="3693225"/>
             <a:ext cx="650512" cy="523220"/>
           </a:xfrm>
           <a:prstGeom prst="rect">
@@ -15120,7 +15290,7 @@
         </p:nvSpPr>
         <p:spPr>
           <a:xfrm>
-            <a:off x="2328278" y="4191882"/>
+            <a:off x="2966516" y="4123256"/>
             <a:ext cx="650512" cy="523220"/>
           </a:xfrm>
           <a:prstGeom prst="rect">
@@ -15165,7 +15335,7 @@
         </p:nvSpPr>
         <p:spPr>
           <a:xfrm>
-            <a:off x="2924852" y="4191882"/>
+            <a:off x="3563090" y="4123256"/>
             <a:ext cx="650512" cy="523220"/>
           </a:xfrm>
           <a:prstGeom prst="rect">
@@ -15210,7 +15380,7 @@
         </p:nvSpPr>
         <p:spPr>
           <a:xfrm>
-            <a:off x="3575364" y="4191882"/>
+            <a:off x="4213602" y="4123256"/>
             <a:ext cx="650512" cy="523220"/>
           </a:xfrm>
           <a:prstGeom prst="rect">
@@ -15255,7 +15425,7 @@
         </p:nvSpPr>
         <p:spPr>
           <a:xfrm>
-            <a:off x="4225876" y="4191882"/>
+            <a:off x="4864114" y="4123256"/>
             <a:ext cx="650512" cy="523220"/>
           </a:xfrm>
           <a:prstGeom prst="rect">
@@ -15300,7 +15470,7 @@
         </p:nvSpPr>
         <p:spPr>
           <a:xfrm>
-            <a:off x="4876388" y="4191882"/>
+            <a:off x="5514626" y="4123256"/>
             <a:ext cx="650512" cy="523220"/>
           </a:xfrm>
           <a:prstGeom prst="rect">
@@ -15345,7 +15515,7 @@
         </p:nvSpPr>
         <p:spPr>
           <a:xfrm>
-            <a:off x="2328278" y="4622294"/>
+            <a:off x="2966516" y="4553668"/>
             <a:ext cx="650512" cy="523220"/>
           </a:xfrm>
           <a:prstGeom prst="rect">
@@ -15390,7 +15560,7 @@
         </p:nvSpPr>
         <p:spPr>
           <a:xfrm>
-            <a:off x="2924852" y="4622294"/>
+            <a:off x="3563090" y="4553668"/>
             <a:ext cx="650512" cy="523220"/>
           </a:xfrm>
           <a:prstGeom prst="rect">
@@ -15435,7 +15605,7 @@
         </p:nvSpPr>
         <p:spPr>
           <a:xfrm>
-            <a:off x="3575364" y="4622294"/>
+            <a:off x="4213602" y="4553668"/>
             <a:ext cx="650512" cy="523220"/>
           </a:xfrm>
           <a:prstGeom prst="rect">
@@ -15480,7 +15650,7 @@
         </p:nvSpPr>
         <p:spPr>
           <a:xfrm>
-            <a:off x="4225876" y="4622294"/>
+            <a:off x="4864114" y="4553668"/>
             <a:ext cx="650512" cy="523220"/>
           </a:xfrm>
           <a:prstGeom prst="rect">
@@ -15525,7 +15695,7 @@
         </p:nvSpPr>
         <p:spPr>
           <a:xfrm>
-            <a:off x="4876388" y="4622294"/>
+            <a:off x="5514626" y="4553668"/>
             <a:ext cx="650512" cy="523220"/>
           </a:xfrm>
           <a:prstGeom prst="rect">
@@ -15570,7 +15740,7 @@
         </p:nvSpPr>
         <p:spPr>
           <a:xfrm>
-            <a:off x="2328278" y="5052706"/>
+            <a:off x="2966516" y="4984080"/>
             <a:ext cx="650512" cy="523220"/>
           </a:xfrm>
           <a:prstGeom prst="rect">
@@ -15615,7 +15785,7 @@
         </p:nvSpPr>
         <p:spPr>
           <a:xfrm>
-            <a:off x="2924852" y="5052706"/>
+            <a:off x="3563090" y="4984080"/>
             <a:ext cx="650512" cy="523220"/>
           </a:xfrm>
           <a:prstGeom prst="rect">
@@ -15660,7 +15830,7 @@
         </p:nvSpPr>
         <p:spPr>
           <a:xfrm>
-            <a:off x="3575364" y="5052706"/>
+            <a:off x="4213602" y="4984080"/>
             <a:ext cx="650512" cy="523220"/>
           </a:xfrm>
           <a:prstGeom prst="rect">
@@ -15705,7 +15875,7 @@
         </p:nvSpPr>
         <p:spPr>
           <a:xfrm>
-            <a:off x="4225876" y="5052706"/>
+            <a:off x="4864114" y="4984080"/>
             <a:ext cx="650512" cy="523220"/>
           </a:xfrm>
           <a:prstGeom prst="rect">
@@ -15750,7 +15920,7 @@
         </p:nvSpPr>
         <p:spPr>
           <a:xfrm>
-            <a:off x="4876388" y="5052706"/>
+            <a:off x="5514626" y="4984080"/>
             <a:ext cx="650512" cy="523220"/>
           </a:xfrm>
           <a:prstGeom prst="rect">
@@ -15795,7 +15965,7 @@
         </p:nvSpPr>
         <p:spPr>
           <a:xfrm>
-            <a:off x="2017897" y="3372741"/>
+            <a:off x="2656135" y="3304115"/>
             <a:ext cx="3849735" cy="2216171"/>
           </a:xfrm>
           <a:prstGeom prst="bracketPair">
@@ -15847,8 +16017,8 @@
         </p:blipFill>
         <p:spPr>
           <a:xfrm>
-            <a:off x="1969276" y="5706652"/>
-            <a:ext cx="4095961" cy="895396"/>
+            <a:off x="3101876" y="5607062"/>
+            <a:ext cx="3153684" cy="689410"/>
           </a:xfrm>
           <a:prstGeom prst="rect">
             <a:avLst/>
@@ -15869,7 +16039,7 @@
         </p:nvSpPr>
         <p:spPr>
           <a:xfrm>
-            <a:off x="6361285" y="3276504"/>
+            <a:off x="6999523" y="3207878"/>
             <a:ext cx="650512" cy="461665"/>
           </a:xfrm>
           <a:prstGeom prst="rect">
@@ -15910,7 +16080,7 @@
         </p:nvSpPr>
         <p:spPr>
           <a:xfrm>
-            <a:off x="6185225" y="3525194"/>
+            <a:off x="6823463" y="3456568"/>
             <a:ext cx="977951" cy="2008566"/>
           </a:xfrm>
           <a:prstGeom prst="bracePair">
@@ -15954,7 +16124,7 @@
         </p:nvSpPr>
         <p:spPr>
           <a:xfrm>
-            <a:off x="6348944" y="3738169"/>
+            <a:off x="6987182" y="3669543"/>
             <a:ext cx="650512" cy="461665"/>
           </a:xfrm>
           <a:prstGeom prst="rect">
@@ -15995,7 +16165,7 @@
         </p:nvSpPr>
         <p:spPr>
           <a:xfrm>
-            <a:off x="6348944" y="4232531"/>
+            <a:off x="6987182" y="4163905"/>
             <a:ext cx="650512" cy="461665"/>
           </a:xfrm>
           <a:prstGeom prst="rect">
@@ -16036,7 +16206,7 @@
         </p:nvSpPr>
         <p:spPr>
           <a:xfrm>
-            <a:off x="6348944" y="4723277"/>
+            <a:off x="6987182" y="4654651"/>
             <a:ext cx="650512" cy="461665"/>
           </a:xfrm>
           <a:prstGeom prst="rect">
@@ -16077,7 +16247,7 @@
         </p:nvSpPr>
         <p:spPr>
           <a:xfrm>
-            <a:off x="6348944" y="5214023"/>
+            <a:off x="6987182" y="5145397"/>
             <a:ext cx="650512" cy="461665"/>
           </a:xfrm>
           <a:prstGeom prst="rect">
@@ -16118,7 +16288,7 @@
         </p:nvSpPr>
         <p:spPr>
           <a:xfrm>
-            <a:off x="7480769" y="4429417"/>
+            <a:off x="8119007" y="4360791"/>
             <a:ext cx="650512" cy="228880"/>
           </a:xfrm>
           <a:prstGeom prst="rightArrow">
@@ -16170,7 +16340,7 @@
         </p:nvSpPr>
         <p:spPr>
           <a:xfrm>
-            <a:off x="8385927" y="3132519"/>
+            <a:off x="9024165" y="3063893"/>
             <a:ext cx="1899417" cy="2759726"/>
           </a:xfrm>
           <a:prstGeom prst="bracketPair">
@@ -16222,7 +16392,7 @@
         </p:blipFill>
         <p:spPr>
           <a:xfrm>
-            <a:off x="8819778" y="3176853"/>
+            <a:off x="9458016" y="3108227"/>
             <a:ext cx="1092010" cy="845073"/>
           </a:xfrm>
           <a:prstGeom prst="rect">
@@ -16244,7 +16414,7 @@
         </p:nvSpPr>
         <p:spPr>
           <a:xfrm>
-            <a:off x="9010379" y="4123112"/>
+            <a:off x="9648617" y="4054486"/>
             <a:ext cx="650512" cy="1200329"/>
           </a:xfrm>
           <a:prstGeom prst="rect">

--- a/seminar/Fusing global attention and self-attention for better performance and.pptx
+++ b/seminar/Fusing global attention and self-attention for better performance and.pptx
@@ -5,7 +5,7 @@
     <p:sldMasterId id="2147483648" r:id="rId1"/>
   </p:sldMasterIdLst>
   <p:notesMasterIdLst>
-    <p:notesMasterId r:id="rId21"/>
+    <p:notesMasterId r:id="rId24"/>
   </p:notesMasterIdLst>
   <p:sldIdLst>
     <p:sldId id="256" r:id="rId2"/>
@@ -26,7 +26,10 @@
     <p:sldId id="272" r:id="rId17"/>
     <p:sldId id="273" r:id="rId18"/>
     <p:sldId id="274" r:id="rId19"/>
-    <p:sldId id="275" r:id="rId20"/>
+    <p:sldId id="276" r:id="rId20"/>
+    <p:sldId id="275" r:id="rId21"/>
+    <p:sldId id="277" r:id="rId22"/>
+    <p:sldId id="278" r:id="rId23"/>
   </p:sldIdLst>
   <p:sldSz cx="12192000" cy="6858000"/>
   <p:notesSz cx="6858000" cy="9144000"/>
@@ -215,7 +218,7 @@
           <a:p>
             <a:fld id="{80A41D00-71D3-415C-A3D7-FEE25CF307DF}" type="datetimeFigureOut">
               <a:rPr lang="zh-TW" altLang="en-US" smtClean="0"/>
-              <a:t>2026/9/14</a:t>
+              <a:t>2026/9/15</a:t>
             </a:fld>
             <a:endParaRPr lang="zh-TW" altLang="en-US"/>
           </a:p>
@@ -632,7 +635,7 @@
           <a:p>
             <a:fld id="{EE3E04FD-0122-4C23-A7F7-90F50FA97CFB}" type="datetime1">
               <a:rPr lang="zh-TW" altLang="en-US" smtClean="0"/>
-              <a:t>2026/9/14</a:t>
+              <a:t>2026/9/15</a:t>
             </a:fld>
             <a:endParaRPr lang="zh-TW" altLang="en-US"/>
           </a:p>
@@ -1338,7 +1341,7 @@
           <a:p>
             <a:fld id="{8DD69F33-1609-4AA2-8E60-EEDF43633812}" type="datetime1">
               <a:rPr lang="zh-TW" altLang="en-US" smtClean="0"/>
-              <a:t>2026/9/14</a:t>
+              <a:t>2026/9/15</a:t>
             </a:fld>
             <a:endParaRPr lang="zh-TW" altLang="en-US"/>
           </a:p>
@@ -1548,7 +1551,7 @@
           <a:p>
             <a:fld id="{73295497-16C4-4AF7-8525-51C7B214CA55}" type="datetime1">
               <a:rPr lang="zh-TW" altLang="en-US" smtClean="0"/>
-              <a:t>2026/9/14</a:t>
+              <a:t>2026/9/15</a:t>
             </a:fld>
             <a:endParaRPr lang="zh-TW" altLang="en-US"/>
           </a:p>
@@ -1748,7 +1751,7 @@
           <a:p>
             <a:fld id="{6AD93685-C1D2-48C9-9284-D623AD71F952}" type="datetime1">
               <a:rPr lang="zh-TW" altLang="en-US" smtClean="0"/>
-              <a:t>2026/9/14</a:t>
+              <a:t>2026/9/15</a:t>
             </a:fld>
             <a:endParaRPr lang="zh-TW" altLang="en-US"/>
           </a:p>
@@ -2478,7 +2481,7 @@
           <a:p>
             <a:fld id="{1FF21E1F-1389-41B2-9326-3555E762196C}" type="datetime1">
               <a:rPr lang="zh-TW" altLang="en-US" smtClean="0"/>
-              <a:t>2026/9/14</a:t>
+              <a:t>2026/9/15</a:t>
             </a:fld>
             <a:endParaRPr lang="zh-TW" altLang="en-US"/>
           </a:p>
@@ -2746,7 +2749,7 @@
           <a:p>
             <a:fld id="{0F280AFD-1CC5-4158-B562-616B460CE827}" type="datetime1">
               <a:rPr lang="zh-TW" altLang="en-US" smtClean="0"/>
-              <a:t>2026/9/14</a:t>
+              <a:t>2026/9/15</a:t>
             </a:fld>
             <a:endParaRPr lang="zh-TW" altLang="en-US"/>
           </a:p>
@@ -3161,7 +3164,7 @@
           <a:p>
             <a:fld id="{3B1161B6-5D58-4DCC-BC37-4C984D46F867}" type="datetime1">
               <a:rPr lang="zh-TW" altLang="en-US" smtClean="0"/>
-              <a:t>2026/9/14</a:t>
+              <a:t>2026/9/15</a:t>
             </a:fld>
             <a:endParaRPr lang="zh-TW" altLang="en-US"/>
           </a:p>
@@ -3303,7 +3306,7 @@
           <a:p>
             <a:fld id="{A8029CEB-4CFB-4511-9F4B-7E9E39F7DEB1}" type="datetime1">
               <a:rPr lang="zh-TW" altLang="en-US" smtClean="0"/>
-              <a:t>2026/9/14</a:t>
+              <a:t>2026/9/15</a:t>
             </a:fld>
             <a:endParaRPr lang="zh-TW" altLang="en-US"/>
           </a:p>
@@ -3416,7 +3419,7 @@
           <a:p>
             <a:fld id="{7320994F-6149-48E5-9E9E-81C33751446F}" type="datetime1">
               <a:rPr lang="zh-TW" altLang="en-US" smtClean="0"/>
-              <a:t>2026/9/14</a:t>
+              <a:t>2026/9/15</a:t>
             </a:fld>
             <a:endParaRPr lang="zh-TW" altLang="en-US"/>
           </a:p>
@@ -3729,7 +3732,7 @@
           <a:p>
             <a:fld id="{466FEA22-09E0-4978-9370-A04C2FBE3857}" type="datetime1">
               <a:rPr lang="zh-TW" altLang="en-US" smtClean="0"/>
-              <a:t>2026/9/14</a:t>
+              <a:t>2026/9/15</a:t>
             </a:fld>
             <a:endParaRPr lang="zh-TW" altLang="en-US"/>
           </a:p>
@@ -4018,7 +4021,7 @@
           <a:p>
             <a:fld id="{7CB9A6F0-A763-4F87-94DC-630F55A79544}" type="datetime1">
               <a:rPr lang="zh-TW" altLang="en-US" smtClean="0"/>
-              <a:t>2026/9/14</a:t>
+              <a:t>2026/9/15</a:t>
             </a:fld>
             <a:endParaRPr lang="zh-TW" altLang="en-US"/>
           </a:p>
@@ -4261,7 +4264,7 @@
           <a:p>
             <a:fld id="{51BA3C4B-293B-4117-8757-544BD5161A75}" type="datetime1">
               <a:rPr lang="zh-TW" altLang="en-US" smtClean="0"/>
-              <a:t>2026/9/14</a:t>
+              <a:t>2026/9/15</a:t>
             </a:fld>
             <a:endParaRPr lang="zh-TW" altLang="en-US"/>
           </a:p>
@@ -11550,8 +11553,8 @@
         </p:nvSpPr>
         <p:spPr>
           <a:xfrm>
-            <a:off x="3365050" y="1927839"/>
-            <a:ext cx="557784" cy="475488"/>
+            <a:off x="3507562" y="2008089"/>
+            <a:ext cx="262096" cy="328810"/>
           </a:xfrm>
           <a:prstGeom prst="mathMultiply">
             <a:avLst/>
@@ -11693,10 +11696,559 @@
       </p:sp>
       <p:sp>
         <p:nvSpPr>
-          <p:cNvPr id="61" name="等於 60">
-            <a:extLst>
-              <a:ext uri="{FF2B5EF4-FFF2-40B4-BE49-F238E27FC236}">
-                <a16:creationId xmlns:a16="http://schemas.microsoft.com/office/drawing/2014/main" id="{40745D5E-09E9-2DA2-514C-F02622BA4857}"/>
+          <p:cNvPr id="63" name="文字方塊 62">
+            <a:extLst>
+              <a:ext uri="{FF2B5EF4-FFF2-40B4-BE49-F238E27FC236}">
+                <a16:creationId xmlns:a16="http://schemas.microsoft.com/office/drawing/2014/main" id="{B497A65C-6276-4F07-8CFB-10F8D98FF17C}"/>
+              </a:ext>
+            </a:extLst>
+          </p:cNvPr>
+          <p:cNvSpPr txBox="1"/>
+          <p:nvPr/>
+        </p:nvSpPr>
+        <p:spPr>
+          <a:xfrm>
+            <a:off x="4913473" y="1880107"/>
+            <a:ext cx="748322" cy="523220"/>
+          </a:xfrm>
+          <a:prstGeom prst="rect">
+            <a:avLst/>
+          </a:prstGeom>
+          <a:noFill/>
+        </p:spPr>
+        <p:txBody>
+          <a:bodyPr wrap="square" rtlCol="0">
+            <a:spAutoFit/>
+          </a:bodyPr>
+          <a:lstStyle/>
+          <a:p>
+            <a:pPr algn="ctr"/>
+            <a:r>
+              <a:rPr lang="en-US" altLang="zh-TW" sz="2800" dirty="0">
+                <a:solidFill>
+                  <a:srgbClr val="FF0000"/>
+                </a:solidFill>
+              </a:rPr>
+              <a:t>w</a:t>
+            </a:r>
+            <a:r>
+              <a:rPr lang="en-US" altLang="zh-TW" sz="1600" dirty="0">
+                <a:solidFill>
+                  <a:srgbClr val="FF0000"/>
+                </a:solidFill>
+              </a:rPr>
+              <a:t>12</a:t>
+            </a:r>
+            <a:r>
+              <a:rPr lang="en-US" altLang="zh-TW" dirty="0">
+                <a:solidFill>
+                  <a:srgbClr val="FF0000"/>
+                </a:solidFill>
+              </a:rPr>
+              <a:t> </a:t>
+            </a:r>
+            <a:endParaRPr lang="zh-TW" altLang="en-US" sz="2400" dirty="0">
+              <a:solidFill>
+                <a:srgbClr val="FF0000"/>
+              </a:solidFill>
+            </a:endParaRPr>
+          </a:p>
+        </p:txBody>
+      </p:sp>
+      <p:sp>
+        <p:nvSpPr>
+          <p:cNvPr id="65" name="文字方塊 64">
+            <a:extLst>
+              <a:ext uri="{FF2B5EF4-FFF2-40B4-BE49-F238E27FC236}">
+                <a16:creationId xmlns:a16="http://schemas.microsoft.com/office/drawing/2014/main" id="{0BADDAC9-0D1A-B8CC-F3D7-BB0ED8FBCD98}"/>
+              </a:ext>
+            </a:extLst>
+          </p:cNvPr>
+          <p:cNvSpPr txBox="1"/>
+          <p:nvPr/>
+        </p:nvSpPr>
+        <p:spPr>
+          <a:xfrm>
+            <a:off x="5525056" y="1886100"/>
+            <a:ext cx="748322" cy="523220"/>
+          </a:xfrm>
+          <a:prstGeom prst="rect">
+            <a:avLst/>
+          </a:prstGeom>
+          <a:noFill/>
+        </p:spPr>
+        <p:txBody>
+          <a:bodyPr wrap="square" rtlCol="0">
+            <a:spAutoFit/>
+          </a:bodyPr>
+          <a:lstStyle/>
+          <a:p>
+            <a:pPr algn="ctr"/>
+            <a:r>
+              <a:rPr lang="en-US" altLang="zh-TW" sz="2800" dirty="0">
+                <a:solidFill>
+                  <a:srgbClr val="FF0000"/>
+                </a:solidFill>
+              </a:rPr>
+              <a:t>w</a:t>
+            </a:r>
+            <a:r>
+              <a:rPr lang="en-US" altLang="zh-TW" sz="1600" dirty="0">
+                <a:solidFill>
+                  <a:srgbClr val="FF0000"/>
+                </a:solidFill>
+              </a:rPr>
+              <a:t>13</a:t>
+            </a:r>
+            <a:r>
+              <a:rPr lang="en-US" altLang="zh-TW" dirty="0">
+                <a:solidFill>
+                  <a:srgbClr val="FF0000"/>
+                </a:solidFill>
+              </a:rPr>
+              <a:t> </a:t>
+            </a:r>
+            <a:endParaRPr lang="zh-TW" altLang="en-US" sz="2400" dirty="0">
+              <a:solidFill>
+                <a:srgbClr val="FF0000"/>
+              </a:solidFill>
+            </a:endParaRPr>
+          </a:p>
+        </p:txBody>
+      </p:sp>
+      <p:sp>
+        <p:nvSpPr>
+          <p:cNvPr id="67" name="文字方塊 66">
+            <a:extLst>
+              <a:ext uri="{FF2B5EF4-FFF2-40B4-BE49-F238E27FC236}">
+                <a16:creationId xmlns:a16="http://schemas.microsoft.com/office/drawing/2014/main" id="{5FAE182F-8EDE-1D96-C5BE-F11420A9AC2D}"/>
+              </a:ext>
+            </a:extLst>
+          </p:cNvPr>
+          <p:cNvSpPr txBox="1"/>
+          <p:nvPr/>
+        </p:nvSpPr>
+        <p:spPr>
+          <a:xfrm>
+            <a:off x="6157340" y="1887172"/>
+            <a:ext cx="748322" cy="523220"/>
+          </a:xfrm>
+          <a:prstGeom prst="rect">
+            <a:avLst/>
+          </a:prstGeom>
+          <a:noFill/>
+        </p:spPr>
+        <p:txBody>
+          <a:bodyPr wrap="square" rtlCol="0">
+            <a:spAutoFit/>
+          </a:bodyPr>
+          <a:lstStyle/>
+          <a:p>
+            <a:pPr algn="ctr"/>
+            <a:r>
+              <a:rPr lang="en-US" altLang="zh-TW" sz="2800" dirty="0">
+                <a:solidFill>
+                  <a:srgbClr val="FF0000"/>
+                </a:solidFill>
+              </a:rPr>
+              <a:t>w</a:t>
+            </a:r>
+            <a:r>
+              <a:rPr lang="en-US" altLang="zh-TW" sz="1600" dirty="0">
+                <a:solidFill>
+                  <a:srgbClr val="FF0000"/>
+                </a:solidFill>
+              </a:rPr>
+              <a:t>14</a:t>
+            </a:r>
+            <a:r>
+              <a:rPr lang="en-US" altLang="zh-TW" dirty="0">
+                <a:solidFill>
+                  <a:srgbClr val="FF0000"/>
+                </a:solidFill>
+              </a:rPr>
+              <a:t> </a:t>
+            </a:r>
+            <a:endParaRPr lang="zh-TW" altLang="en-US" sz="2400" dirty="0">
+              <a:solidFill>
+                <a:srgbClr val="FF0000"/>
+              </a:solidFill>
+            </a:endParaRPr>
+          </a:p>
+        </p:txBody>
+      </p:sp>
+      <p:sp>
+        <p:nvSpPr>
+          <p:cNvPr id="69" name="文字方塊 68">
+            <a:extLst>
+              <a:ext uri="{FF2B5EF4-FFF2-40B4-BE49-F238E27FC236}">
+                <a16:creationId xmlns:a16="http://schemas.microsoft.com/office/drawing/2014/main" id="{86909D3D-2CE6-F18C-CFCC-5AFC6019B3E1}"/>
+              </a:ext>
+            </a:extLst>
+          </p:cNvPr>
+          <p:cNvSpPr txBox="1"/>
+          <p:nvPr/>
+        </p:nvSpPr>
+        <p:spPr>
+          <a:xfrm>
+            <a:off x="6753914" y="1880107"/>
+            <a:ext cx="748322" cy="523220"/>
+          </a:xfrm>
+          <a:prstGeom prst="rect">
+            <a:avLst/>
+          </a:prstGeom>
+          <a:noFill/>
+        </p:spPr>
+        <p:txBody>
+          <a:bodyPr wrap="square" rtlCol="0">
+            <a:spAutoFit/>
+          </a:bodyPr>
+          <a:lstStyle/>
+          <a:p>
+            <a:pPr algn="ctr"/>
+            <a:r>
+              <a:rPr lang="en-US" altLang="zh-TW" sz="2800" dirty="0">
+                <a:solidFill>
+                  <a:srgbClr val="FF0000"/>
+                </a:solidFill>
+              </a:rPr>
+              <a:t>w</a:t>
+            </a:r>
+            <a:r>
+              <a:rPr lang="en-US" altLang="zh-TW" sz="1600" dirty="0">
+                <a:solidFill>
+                  <a:srgbClr val="FF0000"/>
+                </a:solidFill>
+              </a:rPr>
+              <a:t>15</a:t>
+            </a:r>
+            <a:r>
+              <a:rPr lang="en-US" altLang="zh-TW" dirty="0">
+                <a:solidFill>
+                  <a:srgbClr val="FF0000"/>
+                </a:solidFill>
+              </a:rPr>
+              <a:t> </a:t>
+            </a:r>
+            <a:endParaRPr lang="zh-TW" altLang="en-US" sz="2400" dirty="0">
+              <a:solidFill>
+                <a:srgbClr val="FF0000"/>
+              </a:solidFill>
+            </a:endParaRPr>
+          </a:p>
+        </p:txBody>
+      </p:sp>
+      <p:sp>
+        <p:nvSpPr>
+          <p:cNvPr id="71" name="文字方塊 70">
+            <a:extLst>
+              <a:ext uri="{FF2B5EF4-FFF2-40B4-BE49-F238E27FC236}">
+                <a16:creationId xmlns:a16="http://schemas.microsoft.com/office/drawing/2014/main" id="{C37C9CAF-1DC6-7B1B-CB36-1704BE4CAA7A}"/>
+              </a:ext>
+            </a:extLst>
+          </p:cNvPr>
+          <p:cNvSpPr txBox="1"/>
+          <p:nvPr/>
+        </p:nvSpPr>
+        <p:spPr>
+          <a:xfrm>
+            <a:off x="8697814" y="2683862"/>
+            <a:ext cx="650512" cy="523220"/>
+          </a:xfrm>
+          <a:prstGeom prst="rect">
+            <a:avLst/>
+          </a:prstGeom>
+          <a:noFill/>
+        </p:spPr>
+        <p:txBody>
+          <a:bodyPr wrap="square" rtlCol="0">
+            <a:spAutoFit/>
+          </a:bodyPr>
+          <a:lstStyle/>
+          <a:p>
+            <a:pPr algn="ctr"/>
+            <a:r>
+              <a:rPr lang="en-US" altLang="zh-TW" sz="2800" dirty="0">
+                <a:solidFill>
+                  <a:srgbClr val="00B050"/>
+                </a:solidFill>
+              </a:rPr>
+              <a:t>e</a:t>
+            </a:r>
+            <a:r>
+              <a:rPr lang="en-US" altLang="zh-TW" sz="1600" dirty="0">
+                <a:solidFill>
+                  <a:srgbClr val="00B050"/>
+                </a:solidFill>
+              </a:rPr>
+              <a:t>11</a:t>
+            </a:r>
+            <a:r>
+              <a:rPr lang="en-US" altLang="zh-TW" dirty="0">
+                <a:solidFill>
+                  <a:srgbClr val="00B050"/>
+                </a:solidFill>
+              </a:rPr>
+              <a:t> </a:t>
+            </a:r>
+            <a:endParaRPr lang="zh-TW" altLang="en-US" sz="2400" dirty="0">
+              <a:solidFill>
+                <a:srgbClr val="00B050"/>
+              </a:solidFill>
+            </a:endParaRPr>
+          </a:p>
+        </p:txBody>
+      </p:sp>
+      <p:sp>
+        <p:nvSpPr>
+          <p:cNvPr id="74" name="文字方塊 73">
+            <a:extLst>
+              <a:ext uri="{FF2B5EF4-FFF2-40B4-BE49-F238E27FC236}">
+                <a16:creationId xmlns:a16="http://schemas.microsoft.com/office/drawing/2014/main" id="{A29A5255-5625-3424-708C-B21E4249BF9C}"/>
+              </a:ext>
+            </a:extLst>
+          </p:cNvPr>
+          <p:cNvSpPr txBox="1"/>
+          <p:nvPr/>
+        </p:nvSpPr>
+        <p:spPr>
+          <a:xfrm>
+            <a:off x="9294388" y="2683862"/>
+            <a:ext cx="650512" cy="523220"/>
+          </a:xfrm>
+          <a:prstGeom prst="rect">
+            <a:avLst/>
+          </a:prstGeom>
+          <a:noFill/>
+        </p:spPr>
+        <p:txBody>
+          <a:bodyPr wrap="square" rtlCol="0">
+            <a:spAutoFit/>
+          </a:bodyPr>
+          <a:lstStyle/>
+          <a:p>
+            <a:pPr algn="ctr"/>
+            <a:r>
+              <a:rPr lang="en-US" altLang="zh-TW" sz="2800" dirty="0">
+                <a:solidFill>
+                  <a:srgbClr val="00B050"/>
+                </a:solidFill>
+              </a:rPr>
+              <a:t>e</a:t>
+            </a:r>
+            <a:r>
+              <a:rPr lang="en-US" altLang="zh-TW" sz="1600" dirty="0">
+                <a:solidFill>
+                  <a:srgbClr val="00B050"/>
+                </a:solidFill>
+              </a:rPr>
+              <a:t>12</a:t>
+            </a:r>
+            <a:r>
+              <a:rPr lang="en-US" altLang="zh-TW" dirty="0">
+                <a:solidFill>
+                  <a:srgbClr val="00B050"/>
+                </a:solidFill>
+              </a:rPr>
+              <a:t> </a:t>
+            </a:r>
+            <a:endParaRPr lang="zh-TW" altLang="en-US" sz="2400" dirty="0">
+              <a:solidFill>
+                <a:srgbClr val="00B050"/>
+              </a:solidFill>
+            </a:endParaRPr>
+          </a:p>
+        </p:txBody>
+      </p:sp>
+      <p:sp>
+        <p:nvSpPr>
+          <p:cNvPr id="77" name="文字方塊 76">
+            <a:extLst>
+              <a:ext uri="{FF2B5EF4-FFF2-40B4-BE49-F238E27FC236}">
+                <a16:creationId xmlns:a16="http://schemas.microsoft.com/office/drawing/2014/main" id="{982E99B3-DC3C-A9C3-D8BA-87539308BFE7}"/>
+              </a:ext>
+            </a:extLst>
+          </p:cNvPr>
+          <p:cNvSpPr txBox="1"/>
+          <p:nvPr/>
+        </p:nvSpPr>
+        <p:spPr>
+          <a:xfrm>
+            <a:off x="9944900" y="2683862"/>
+            <a:ext cx="650512" cy="523220"/>
+          </a:xfrm>
+          <a:prstGeom prst="rect">
+            <a:avLst/>
+          </a:prstGeom>
+          <a:noFill/>
+        </p:spPr>
+        <p:txBody>
+          <a:bodyPr wrap="square" rtlCol="0">
+            <a:spAutoFit/>
+          </a:bodyPr>
+          <a:lstStyle/>
+          <a:p>
+            <a:pPr algn="ctr"/>
+            <a:r>
+              <a:rPr lang="en-US" altLang="zh-TW" sz="2800" dirty="0">
+                <a:solidFill>
+                  <a:srgbClr val="00B050"/>
+                </a:solidFill>
+              </a:rPr>
+              <a:t>e</a:t>
+            </a:r>
+            <a:r>
+              <a:rPr lang="en-US" altLang="zh-TW" sz="1600" dirty="0">
+                <a:solidFill>
+                  <a:srgbClr val="00B050"/>
+                </a:solidFill>
+              </a:rPr>
+              <a:t>13</a:t>
+            </a:r>
+            <a:r>
+              <a:rPr lang="en-US" altLang="zh-TW" dirty="0">
+                <a:solidFill>
+                  <a:srgbClr val="00B050"/>
+                </a:solidFill>
+              </a:rPr>
+              <a:t> </a:t>
+            </a:r>
+            <a:endParaRPr lang="zh-TW" altLang="en-US" sz="2400" dirty="0">
+              <a:solidFill>
+                <a:srgbClr val="00B050"/>
+              </a:solidFill>
+            </a:endParaRPr>
+          </a:p>
+        </p:txBody>
+      </p:sp>
+      <p:sp>
+        <p:nvSpPr>
+          <p:cNvPr id="82" name="文字方塊 81">
+            <a:extLst>
+              <a:ext uri="{FF2B5EF4-FFF2-40B4-BE49-F238E27FC236}">
+                <a16:creationId xmlns:a16="http://schemas.microsoft.com/office/drawing/2014/main" id="{670BA1B6-FA44-C161-184F-57160D8CADD1}"/>
+              </a:ext>
+            </a:extLst>
+          </p:cNvPr>
+          <p:cNvSpPr txBox="1"/>
+          <p:nvPr/>
+        </p:nvSpPr>
+        <p:spPr>
+          <a:xfrm>
+            <a:off x="10595412" y="2683862"/>
+            <a:ext cx="650512" cy="523220"/>
+          </a:xfrm>
+          <a:prstGeom prst="rect">
+            <a:avLst/>
+          </a:prstGeom>
+          <a:noFill/>
+        </p:spPr>
+        <p:txBody>
+          <a:bodyPr wrap="square" rtlCol="0">
+            <a:spAutoFit/>
+          </a:bodyPr>
+          <a:lstStyle/>
+          <a:p>
+            <a:pPr algn="ctr"/>
+            <a:r>
+              <a:rPr lang="en-US" altLang="zh-TW" sz="2800" dirty="0">
+                <a:solidFill>
+                  <a:srgbClr val="00B050"/>
+                </a:solidFill>
+              </a:rPr>
+              <a:t>e</a:t>
+            </a:r>
+            <a:r>
+              <a:rPr lang="en-US" altLang="zh-TW" sz="1600" dirty="0">
+                <a:solidFill>
+                  <a:srgbClr val="00B050"/>
+                </a:solidFill>
+              </a:rPr>
+              <a:t>14</a:t>
+            </a:r>
+            <a:r>
+              <a:rPr lang="en-US" altLang="zh-TW" dirty="0">
+                <a:solidFill>
+                  <a:srgbClr val="00B050"/>
+                </a:solidFill>
+              </a:rPr>
+              <a:t> </a:t>
+            </a:r>
+            <a:endParaRPr lang="zh-TW" altLang="en-US" sz="2400" dirty="0">
+              <a:solidFill>
+                <a:srgbClr val="00B050"/>
+              </a:solidFill>
+            </a:endParaRPr>
+          </a:p>
+        </p:txBody>
+      </p:sp>
+      <p:sp>
+        <p:nvSpPr>
+          <p:cNvPr id="86" name="文字方塊 85">
+            <a:extLst>
+              <a:ext uri="{FF2B5EF4-FFF2-40B4-BE49-F238E27FC236}">
+                <a16:creationId xmlns:a16="http://schemas.microsoft.com/office/drawing/2014/main" id="{9F88A81F-BAD1-3CC7-2EAB-9A9B1EC158C4}"/>
+              </a:ext>
+            </a:extLst>
+          </p:cNvPr>
+          <p:cNvSpPr txBox="1"/>
+          <p:nvPr/>
+        </p:nvSpPr>
+        <p:spPr>
+          <a:xfrm>
+            <a:off x="11245924" y="2683862"/>
+            <a:ext cx="650512" cy="523220"/>
+          </a:xfrm>
+          <a:prstGeom prst="rect">
+            <a:avLst/>
+          </a:prstGeom>
+          <a:noFill/>
+        </p:spPr>
+        <p:txBody>
+          <a:bodyPr wrap="square" rtlCol="0">
+            <a:spAutoFit/>
+          </a:bodyPr>
+          <a:lstStyle/>
+          <a:p>
+            <a:pPr algn="ctr"/>
+            <a:r>
+              <a:rPr lang="en-US" altLang="zh-TW" sz="2800" dirty="0">
+                <a:solidFill>
+                  <a:srgbClr val="00B050"/>
+                </a:solidFill>
+              </a:rPr>
+              <a:t>e</a:t>
+            </a:r>
+            <a:r>
+              <a:rPr lang="en-US" altLang="zh-TW" sz="1600" dirty="0">
+                <a:solidFill>
+                  <a:srgbClr val="00B050"/>
+                </a:solidFill>
+              </a:rPr>
+              <a:t>15</a:t>
+            </a:r>
+            <a:r>
+              <a:rPr lang="en-US" altLang="zh-TW" dirty="0">
+                <a:solidFill>
+                  <a:srgbClr val="00B050"/>
+                </a:solidFill>
+              </a:rPr>
+              <a:t> </a:t>
+            </a:r>
+            <a:endParaRPr lang="zh-TW" altLang="en-US" sz="2400" dirty="0">
+              <a:solidFill>
+                <a:srgbClr val="00B050"/>
+              </a:solidFill>
+            </a:endParaRPr>
+          </a:p>
+        </p:txBody>
+      </p:sp>
+      <p:sp>
+        <p:nvSpPr>
+          <p:cNvPr id="90" name="左右中括弧 89">
+            <a:extLst>
+              <a:ext uri="{FF2B5EF4-FFF2-40B4-BE49-F238E27FC236}">
+                <a16:creationId xmlns:a16="http://schemas.microsoft.com/office/drawing/2014/main" id="{522130B6-EA0A-BBCE-5B92-8CAA04F49C85}"/>
               </a:ext>
             </a:extLst>
           </p:cNvPr>
@@ -11705,8 +12257,221 @@
         </p:nvSpPr>
         <p:spPr>
           <a:xfrm>
-            <a:off x="7831676" y="1941662"/>
-            <a:ext cx="539127" cy="461665"/>
+            <a:off x="8690987" y="2725546"/>
+            <a:ext cx="3205449" cy="523220"/>
+          </a:xfrm>
+          <a:prstGeom prst="bracketPair">
+            <a:avLst/>
+          </a:prstGeom>
+        </p:spPr>
+        <p:style>
+          <a:lnRef idx="2">
+            <a:schemeClr val="dk1"/>
+          </a:lnRef>
+          <a:fillRef idx="0">
+            <a:schemeClr val="dk1"/>
+          </a:fillRef>
+          <a:effectRef idx="1">
+            <a:schemeClr val="dk1"/>
+          </a:effectRef>
+          <a:fontRef idx="minor">
+            <a:schemeClr val="tx1"/>
+          </a:fontRef>
+        </p:style>
+        <p:txBody>
+          <a:bodyPr rtlCol="0" anchor="ctr"/>
+          <a:lstStyle/>
+          <a:p>
+            <a:pPr algn="ctr"/>
+            <a:endParaRPr lang="zh-TW" altLang="en-US"/>
+          </a:p>
+        </p:txBody>
+      </p:sp>
+      <p:sp>
+        <p:nvSpPr>
+          <p:cNvPr id="94" name="文字方塊 93">
+            <a:extLst>
+              <a:ext uri="{FF2B5EF4-FFF2-40B4-BE49-F238E27FC236}">
+                <a16:creationId xmlns:a16="http://schemas.microsoft.com/office/drawing/2014/main" id="{FA3CD66F-281C-682F-4C31-F7FC3FCC0670}"/>
+              </a:ext>
+            </a:extLst>
+          </p:cNvPr>
+          <p:cNvSpPr txBox="1"/>
+          <p:nvPr/>
+        </p:nvSpPr>
+        <p:spPr>
+          <a:xfrm>
+            <a:off x="177282" y="2739424"/>
+            <a:ext cx="3304032" cy="400110"/>
+          </a:xfrm>
+          <a:prstGeom prst="rect">
+            <a:avLst/>
+          </a:prstGeom>
+          <a:noFill/>
+        </p:spPr>
+        <p:txBody>
+          <a:bodyPr wrap="square" rtlCol="0">
+            <a:spAutoFit/>
+          </a:bodyPr>
+          <a:lstStyle/>
+          <a:p>
+            <a:pPr algn="ctr"/>
+            <a:r>
+              <a:rPr lang="en-US" altLang="zh-TW" sz="2000" dirty="0"/>
+              <a:t>Standardize(</a:t>
+            </a:r>
+            <a:r>
+              <a:rPr lang="en-US" altLang="zh-TW" sz="2000" dirty="0">
+                <a:solidFill>
+                  <a:srgbClr val="00B050"/>
+                </a:solidFill>
+              </a:rPr>
+              <a:t>X</a:t>
+            </a:r>
+            <a:r>
+              <a:rPr lang="en-US" altLang="zh-TW" sz="1400" dirty="0">
+                <a:solidFill>
+                  <a:srgbClr val="00B050"/>
+                </a:solidFill>
+              </a:rPr>
+              <a:t>4</a:t>
+            </a:r>
+            <a:r>
+              <a:rPr lang="en-US" altLang="zh-TW" sz="2000" dirty="0">
+                <a:solidFill>
+                  <a:srgbClr val="00B050"/>
+                </a:solidFill>
+              </a:rPr>
+              <a:t> : weight</a:t>
+            </a:r>
+            <a:r>
+              <a:rPr lang="en-US" altLang="zh-TW" sz="2000" dirty="0"/>
+              <a:t>)</a:t>
+            </a:r>
+          </a:p>
+        </p:txBody>
+      </p:sp>
+      <p:sp>
+        <p:nvSpPr>
+          <p:cNvPr id="102" name="文字方塊 101">
+            <a:extLst>
+              <a:ext uri="{FF2B5EF4-FFF2-40B4-BE49-F238E27FC236}">
+                <a16:creationId xmlns:a16="http://schemas.microsoft.com/office/drawing/2014/main" id="{0C64F147-543D-A951-D9A0-B044619CE64E}"/>
+              </a:ext>
+            </a:extLst>
+          </p:cNvPr>
+          <p:cNvSpPr txBox="1"/>
+          <p:nvPr/>
+        </p:nvSpPr>
+        <p:spPr>
+          <a:xfrm>
+            <a:off x="4338188" y="2683862"/>
+            <a:ext cx="748322" cy="523220"/>
+          </a:xfrm>
+          <a:prstGeom prst="rect">
+            <a:avLst/>
+          </a:prstGeom>
+          <a:noFill/>
+        </p:spPr>
+        <p:txBody>
+          <a:bodyPr wrap="square" rtlCol="0">
+            <a:spAutoFit/>
+          </a:bodyPr>
+          <a:lstStyle/>
+          <a:p>
+            <a:pPr algn="ctr"/>
+            <a:r>
+              <a:rPr lang="en-US" altLang="zh-TW" sz="2800" dirty="0">
+                <a:solidFill>
+                  <a:srgbClr val="00B050"/>
+                </a:solidFill>
+              </a:rPr>
+              <a:t>w</a:t>
+            </a:r>
+            <a:r>
+              <a:rPr lang="en-US" altLang="zh-TW" sz="1600" dirty="0">
+                <a:solidFill>
+                  <a:srgbClr val="00B050"/>
+                </a:solidFill>
+              </a:rPr>
+              <a:t>11</a:t>
+            </a:r>
+            <a:r>
+              <a:rPr lang="en-US" altLang="zh-TW" dirty="0">
+                <a:solidFill>
+                  <a:srgbClr val="00B050"/>
+                </a:solidFill>
+              </a:rPr>
+              <a:t> </a:t>
+            </a:r>
+            <a:endParaRPr lang="zh-TW" altLang="en-US" sz="2400" dirty="0">
+              <a:solidFill>
+                <a:srgbClr val="00B050"/>
+              </a:solidFill>
+            </a:endParaRPr>
+          </a:p>
+        </p:txBody>
+      </p:sp>
+      <p:sp>
+        <p:nvSpPr>
+          <p:cNvPr id="104" name="左右中括弧 103">
+            <a:extLst>
+              <a:ext uri="{FF2B5EF4-FFF2-40B4-BE49-F238E27FC236}">
+                <a16:creationId xmlns:a16="http://schemas.microsoft.com/office/drawing/2014/main" id="{4C749D27-E912-E245-1595-981BD45377E3}"/>
+              </a:ext>
+            </a:extLst>
+          </p:cNvPr>
+          <p:cNvSpPr/>
+          <p:nvPr/>
+        </p:nvSpPr>
+        <p:spPr>
+          <a:xfrm>
+            <a:off x="4330025" y="2725546"/>
+            <a:ext cx="3205449" cy="523220"/>
+          </a:xfrm>
+          <a:prstGeom prst="bracketPair">
+            <a:avLst/>
+          </a:prstGeom>
+        </p:spPr>
+        <p:style>
+          <a:lnRef idx="2">
+            <a:schemeClr val="dk1"/>
+          </a:lnRef>
+          <a:fillRef idx="0">
+            <a:schemeClr val="dk1"/>
+          </a:fillRef>
+          <a:effectRef idx="1">
+            <a:schemeClr val="dk1"/>
+          </a:effectRef>
+          <a:fontRef idx="minor">
+            <a:schemeClr val="tx1"/>
+          </a:fontRef>
+        </p:style>
+        <p:txBody>
+          <a:bodyPr rtlCol="0" anchor="ctr"/>
+          <a:lstStyle/>
+          <a:p>
+            <a:pPr algn="ctr"/>
+            <a:endParaRPr lang="zh-TW" altLang="en-US"/>
+          </a:p>
+        </p:txBody>
+      </p:sp>
+      <p:sp>
+        <p:nvSpPr>
+          <p:cNvPr id="108" name="等於 107">
+            <a:extLst>
+              <a:ext uri="{FF2B5EF4-FFF2-40B4-BE49-F238E27FC236}">
+                <a16:creationId xmlns:a16="http://schemas.microsoft.com/office/drawing/2014/main" id="{9E9927A3-C38C-FD34-680D-F86C547BC62D}"/>
+              </a:ext>
+            </a:extLst>
+          </p:cNvPr>
+          <p:cNvSpPr/>
+          <p:nvPr/>
+        </p:nvSpPr>
+        <p:spPr>
+          <a:xfrm>
+            <a:off x="7931383" y="2832529"/>
+            <a:ext cx="358751" cy="282285"/>
           </a:xfrm>
           <a:prstGeom prst="mathEqual">
             <a:avLst/>
@@ -11743,10 +12508,10 @@
       </p:sp>
       <p:sp>
         <p:nvSpPr>
-          <p:cNvPr id="63" name="文字方塊 62">
-            <a:extLst>
-              <a:ext uri="{FF2B5EF4-FFF2-40B4-BE49-F238E27FC236}">
-                <a16:creationId xmlns:a16="http://schemas.microsoft.com/office/drawing/2014/main" id="{B497A65C-6276-4F07-8CFB-10F8D98FF17C}"/>
+          <p:cNvPr id="112" name="文字方塊 111">
+            <a:extLst>
+              <a:ext uri="{FF2B5EF4-FFF2-40B4-BE49-F238E27FC236}">
+                <a16:creationId xmlns:a16="http://schemas.microsoft.com/office/drawing/2014/main" id="{018900F4-1C16-D51E-5206-A8C48B02F69D}"/>
               </a:ext>
             </a:extLst>
           </p:cNvPr>
@@ -11755,252 +12520,8 @@
         </p:nvSpPr>
         <p:spPr>
           <a:xfrm>
-            <a:off x="4913473" y="1880107"/>
+            <a:off x="4913473" y="2677869"/>
             <a:ext cx="748322" cy="523220"/>
-          </a:xfrm>
-          <a:prstGeom prst="rect">
-            <a:avLst/>
-          </a:prstGeom>
-          <a:noFill/>
-        </p:spPr>
-        <p:txBody>
-          <a:bodyPr wrap="square" rtlCol="0">
-            <a:spAutoFit/>
-          </a:bodyPr>
-          <a:lstStyle/>
-          <a:p>
-            <a:pPr algn="ctr"/>
-            <a:r>
-              <a:rPr lang="en-US" altLang="zh-TW" sz="2800" dirty="0">
-                <a:solidFill>
-                  <a:srgbClr val="FF0000"/>
-                </a:solidFill>
-              </a:rPr>
-              <a:t>w</a:t>
-            </a:r>
-            <a:r>
-              <a:rPr lang="en-US" altLang="zh-TW" sz="1600" dirty="0">
-                <a:solidFill>
-                  <a:srgbClr val="FF0000"/>
-                </a:solidFill>
-              </a:rPr>
-              <a:t>12</a:t>
-            </a:r>
-            <a:r>
-              <a:rPr lang="en-US" altLang="zh-TW" dirty="0">
-                <a:solidFill>
-                  <a:srgbClr val="FF0000"/>
-                </a:solidFill>
-              </a:rPr>
-              <a:t> </a:t>
-            </a:r>
-            <a:endParaRPr lang="zh-TW" altLang="en-US" sz="2400" dirty="0">
-              <a:solidFill>
-                <a:srgbClr val="FF0000"/>
-              </a:solidFill>
-            </a:endParaRPr>
-          </a:p>
-        </p:txBody>
-      </p:sp>
-      <p:sp>
-        <p:nvSpPr>
-          <p:cNvPr id="65" name="文字方塊 64">
-            <a:extLst>
-              <a:ext uri="{FF2B5EF4-FFF2-40B4-BE49-F238E27FC236}">
-                <a16:creationId xmlns:a16="http://schemas.microsoft.com/office/drawing/2014/main" id="{0BADDAC9-0D1A-B8CC-F3D7-BB0ED8FBCD98}"/>
-              </a:ext>
-            </a:extLst>
-          </p:cNvPr>
-          <p:cNvSpPr txBox="1"/>
-          <p:nvPr/>
-        </p:nvSpPr>
-        <p:spPr>
-          <a:xfrm>
-            <a:off x="5525056" y="1886100"/>
-            <a:ext cx="748322" cy="523220"/>
-          </a:xfrm>
-          <a:prstGeom prst="rect">
-            <a:avLst/>
-          </a:prstGeom>
-          <a:noFill/>
-        </p:spPr>
-        <p:txBody>
-          <a:bodyPr wrap="square" rtlCol="0">
-            <a:spAutoFit/>
-          </a:bodyPr>
-          <a:lstStyle/>
-          <a:p>
-            <a:pPr algn="ctr"/>
-            <a:r>
-              <a:rPr lang="en-US" altLang="zh-TW" sz="2800" dirty="0">
-                <a:solidFill>
-                  <a:srgbClr val="FF0000"/>
-                </a:solidFill>
-              </a:rPr>
-              <a:t>w</a:t>
-            </a:r>
-            <a:r>
-              <a:rPr lang="en-US" altLang="zh-TW" sz="1600" dirty="0">
-                <a:solidFill>
-                  <a:srgbClr val="FF0000"/>
-                </a:solidFill>
-              </a:rPr>
-              <a:t>13</a:t>
-            </a:r>
-            <a:r>
-              <a:rPr lang="en-US" altLang="zh-TW" dirty="0">
-                <a:solidFill>
-                  <a:srgbClr val="FF0000"/>
-                </a:solidFill>
-              </a:rPr>
-              <a:t> </a:t>
-            </a:r>
-            <a:endParaRPr lang="zh-TW" altLang="en-US" sz="2400" dirty="0">
-              <a:solidFill>
-                <a:srgbClr val="FF0000"/>
-              </a:solidFill>
-            </a:endParaRPr>
-          </a:p>
-        </p:txBody>
-      </p:sp>
-      <p:sp>
-        <p:nvSpPr>
-          <p:cNvPr id="67" name="文字方塊 66">
-            <a:extLst>
-              <a:ext uri="{FF2B5EF4-FFF2-40B4-BE49-F238E27FC236}">
-                <a16:creationId xmlns:a16="http://schemas.microsoft.com/office/drawing/2014/main" id="{5FAE182F-8EDE-1D96-C5BE-F11420A9AC2D}"/>
-              </a:ext>
-            </a:extLst>
-          </p:cNvPr>
-          <p:cNvSpPr txBox="1"/>
-          <p:nvPr/>
-        </p:nvSpPr>
-        <p:spPr>
-          <a:xfrm>
-            <a:off x="6157340" y="1887172"/>
-            <a:ext cx="748322" cy="523220"/>
-          </a:xfrm>
-          <a:prstGeom prst="rect">
-            <a:avLst/>
-          </a:prstGeom>
-          <a:noFill/>
-        </p:spPr>
-        <p:txBody>
-          <a:bodyPr wrap="square" rtlCol="0">
-            <a:spAutoFit/>
-          </a:bodyPr>
-          <a:lstStyle/>
-          <a:p>
-            <a:pPr algn="ctr"/>
-            <a:r>
-              <a:rPr lang="en-US" altLang="zh-TW" sz="2800" dirty="0">
-                <a:solidFill>
-                  <a:srgbClr val="FF0000"/>
-                </a:solidFill>
-              </a:rPr>
-              <a:t>w</a:t>
-            </a:r>
-            <a:r>
-              <a:rPr lang="en-US" altLang="zh-TW" sz="1600" dirty="0">
-                <a:solidFill>
-                  <a:srgbClr val="FF0000"/>
-                </a:solidFill>
-              </a:rPr>
-              <a:t>14</a:t>
-            </a:r>
-            <a:r>
-              <a:rPr lang="en-US" altLang="zh-TW" dirty="0">
-                <a:solidFill>
-                  <a:srgbClr val="FF0000"/>
-                </a:solidFill>
-              </a:rPr>
-              <a:t> </a:t>
-            </a:r>
-            <a:endParaRPr lang="zh-TW" altLang="en-US" sz="2400" dirty="0">
-              <a:solidFill>
-                <a:srgbClr val="FF0000"/>
-              </a:solidFill>
-            </a:endParaRPr>
-          </a:p>
-        </p:txBody>
-      </p:sp>
-      <p:sp>
-        <p:nvSpPr>
-          <p:cNvPr id="69" name="文字方塊 68">
-            <a:extLst>
-              <a:ext uri="{FF2B5EF4-FFF2-40B4-BE49-F238E27FC236}">
-                <a16:creationId xmlns:a16="http://schemas.microsoft.com/office/drawing/2014/main" id="{86909D3D-2CE6-F18C-CFCC-5AFC6019B3E1}"/>
-              </a:ext>
-            </a:extLst>
-          </p:cNvPr>
-          <p:cNvSpPr txBox="1"/>
-          <p:nvPr/>
-        </p:nvSpPr>
-        <p:spPr>
-          <a:xfrm>
-            <a:off x="6753914" y="1880107"/>
-            <a:ext cx="748322" cy="523220"/>
-          </a:xfrm>
-          <a:prstGeom prst="rect">
-            <a:avLst/>
-          </a:prstGeom>
-          <a:noFill/>
-        </p:spPr>
-        <p:txBody>
-          <a:bodyPr wrap="square" rtlCol="0">
-            <a:spAutoFit/>
-          </a:bodyPr>
-          <a:lstStyle/>
-          <a:p>
-            <a:pPr algn="ctr"/>
-            <a:r>
-              <a:rPr lang="en-US" altLang="zh-TW" sz="2800" dirty="0">
-                <a:solidFill>
-                  <a:srgbClr val="FF0000"/>
-                </a:solidFill>
-              </a:rPr>
-              <a:t>w</a:t>
-            </a:r>
-            <a:r>
-              <a:rPr lang="en-US" altLang="zh-TW" sz="1600" dirty="0">
-                <a:solidFill>
-                  <a:srgbClr val="FF0000"/>
-                </a:solidFill>
-              </a:rPr>
-              <a:t>15</a:t>
-            </a:r>
-            <a:r>
-              <a:rPr lang="en-US" altLang="zh-TW" dirty="0">
-                <a:solidFill>
-                  <a:srgbClr val="FF0000"/>
-                </a:solidFill>
-              </a:rPr>
-              <a:t> </a:t>
-            </a:r>
-            <a:endParaRPr lang="zh-TW" altLang="en-US" sz="2400" dirty="0">
-              <a:solidFill>
-                <a:srgbClr val="FF0000"/>
-              </a:solidFill>
-            </a:endParaRPr>
-          </a:p>
-        </p:txBody>
-      </p:sp>
-      <p:sp>
-        <p:nvSpPr>
-          <p:cNvPr id="71" name="文字方塊 70">
-            <a:extLst>
-              <a:ext uri="{FF2B5EF4-FFF2-40B4-BE49-F238E27FC236}">
-                <a16:creationId xmlns:a16="http://schemas.microsoft.com/office/drawing/2014/main" id="{C37C9CAF-1DC6-7B1B-CB36-1704BE4CAA7A}"/>
-              </a:ext>
-            </a:extLst>
-          </p:cNvPr>
-          <p:cNvSpPr txBox="1"/>
-          <p:nvPr/>
-        </p:nvSpPr>
-        <p:spPr>
-          <a:xfrm>
-            <a:off x="8697814" y="2683862"/>
-            <a:ext cx="650512" cy="523220"/>
           </a:xfrm>
           <a:prstGeom prst="rect">
             <a:avLst/>
@@ -12020,7 +12541,7 @@
                   <a:srgbClr val="00B050"/>
                 </a:solidFill>
               </a:rPr>
-              <a:t>e</a:t>
+              <a:t>w</a:t>
             </a:r>
             <a:r>
               <a:rPr lang="en-US" altLang="zh-TW" sz="1600" dirty="0">
@@ -12028,7 +12549,7 @@
                   <a:srgbClr val="00B050"/>
                 </a:solidFill>
               </a:rPr>
-              <a:t>11</a:t>
+              <a:t>12</a:t>
             </a:r>
             <a:r>
               <a:rPr lang="en-US" altLang="zh-TW" dirty="0">
@@ -12048,10 +12569,10 @@
       </p:sp>
       <p:sp>
         <p:nvSpPr>
-          <p:cNvPr id="74" name="文字方塊 73">
-            <a:extLst>
-              <a:ext uri="{FF2B5EF4-FFF2-40B4-BE49-F238E27FC236}">
-                <a16:creationId xmlns:a16="http://schemas.microsoft.com/office/drawing/2014/main" id="{A29A5255-5625-3424-708C-B21E4249BF9C}"/>
+          <p:cNvPr id="116" name="文字方塊 115">
+            <a:extLst>
+              <a:ext uri="{FF2B5EF4-FFF2-40B4-BE49-F238E27FC236}">
+                <a16:creationId xmlns:a16="http://schemas.microsoft.com/office/drawing/2014/main" id="{F76ADDC7-C73B-7E42-D929-131FAF5ACE1E}"/>
               </a:ext>
             </a:extLst>
           </p:cNvPr>
@@ -12060,8 +12581,8 @@
         </p:nvSpPr>
         <p:spPr>
           <a:xfrm>
-            <a:off x="9294388" y="2683862"/>
-            <a:ext cx="650512" cy="523220"/>
+            <a:off x="5525056" y="2683862"/>
+            <a:ext cx="748322" cy="523220"/>
           </a:xfrm>
           <a:prstGeom prst="rect">
             <a:avLst/>
@@ -12081,7 +12602,7 @@
                   <a:srgbClr val="00B050"/>
                 </a:solidFill>
               </a:rPr>
-              <a:t>e</a:t>
+              <a:t>w</a:t>
             </a:r>
             <a:r>
               <a:rPr lang="en-US" altLang="zh-TW" sz="1600" dirty="0">
@@ -12089,7 +12610,7 @@
                   <a:srgbClr val="00B050"/>
                 </a:solidFill>
               </a:rPr>
-              <a:t>12</a:t>
+              <a:t>13</a:t>
             </a:r>
             <a:r>
               <a:rPr lang="en-US" altLang="zh-TW" dirty="0">
@@ -12109,10 +12630,10 @@
       </p:sp>
       <p:sp>
         <p:nvSpPr>
-          <p:cNvPr id="77" name="文字方塊 76">
-            <a:extLst>
-              <a:ext uri="{FF2B5EF4-FFF2-40B4-BE49-F238E27FC236}">
-                <a16:creationId xmlns:a16="http://schemas.microsoft.com/office/drawing/2014/main" id="{982E99B3-DC3C-A9C3-D8BA-87539308BFE7}"/>
+          <p:cNvPr id="120" name="文字方塊 119">
+            <a:extLst>
+              <a:ext uri="{FF2B5EF4-FFF2-40B4-BE49-F238E27FC236}">
+                <a16:creationId xmlns:a16="http://schemas.microsoft.com/office/drawing/2014/main" id="{B2F18C39-030E-44A3-B5B2-4002FF99B980}"/>
               </a:ext>
             </a:extLst>
           </p:cNvPr>
@@ -12121,8 +12642,8 @@
         </p:nvSpPr>
         <p:spPr>
           <a:xfrm>
-            <a:off x="9944900" y="2683862"/>
-            <a:ext cx="650512" cy="523220"/>
+            <a:off x="6157340" y="2684934"/>
+            <a:ext cx="748322" cy="523220"/>
           </a:xfrm>
           <a:prstGeom prst="rect">
             <a:avLst/>
@@ -12142,7 +12663,7 @@
                   <a:srgbClr val="00B050"/>
                 </a:solidFill>
               </a:rPr>
-              <a:t>e</a:t>
+              <a:t>w</a:t>
             </a:r>
             <a:r>
               <a:rPr lang="en-US" altLang="zh-TW" sz="1600" dirty="0">
@@ -12150,7 +12671,7 @@
                   <a:srgbClr val="00B050"/>
                 </a:solidFill>
               </a:rPr>
-              <a:t>13</a:t>
+              <a:t>14</a:t>
             </a:r>
             <a:r>
               <a:rPr lang="en-US" altLang="zh-TW" dirty="0">
@@ -12170,10 +12691,10 @@
       </p:sp>
       <p:sp>
         <p:nvSpPr>
-          <p:cNvPr id="82" name="文字方塊 81">
-            <a:extLst>
-              <a:ext uri="{FF2B5EF4-FFF2-40B4-BE49-F238E27FC236}">
-                <a16:creationId xmlns:a16="http://schemas.microsoft.com/office/drawing/2014/main" id="{670BA1B6-FA44-C161-184F-57160D8CADD1}"/>
+          <p:cNvPr id="124" name="文字方塊 123">
+            <a:extLst>
+              <a:ext uri="{FF2B5EF4-FFF2-40B4-BE49-F238E27FC236}">
+                <a16:creationId xmlns:a16="http://schemas.microsoft.com/office/drawing/2014/main" id="{EAF00DC3-900E-8556-1F50-35EDDF4F2FD9}"/>
               </a:ext>
             </a:extLst>
           </p:cNvPr>
@@ -12182,8 +12703,8 @@
         </p:nvSpPr>
         <p:spPr>
           <a:xfrm>
-            <a:off x="10595412" y="2683862"/>
-            <a:ext cx="650512" cy="523220"/>
+            <a:off x="6753914" y="2677869"/>
+            <a:ext cx="748322" cy="523220"/>
           </a:xfrm>
           <a:prstGeom prst="rect">
             <a:avLst/>
@@ -12203,7 +12724,7 @@
                   <a:srgbClr val="00B050"/>
                 </a:solidFill>
               </a:rPr>
-              <a:t>e</a:t>
+              <a:t>w</a:t>
             </a:r>
             <a:r>
               <a:rPr lang="en-US" altLang="zh-TW" sz="1600" dirty="0">
@@ -12211,7 +12732,7 @@
                   <a:srgbClr val="00B050"/>
                 </a:solidFill>
               </a:rPr>
-              <a:t>14</a:t>
+              <a:t>15</a:t>
             </a:r>
             <a:r>
               <a:rPr lang="en-US" altLang="zh-TW" dirty="0">
@@ -12229,12 +12750,120 @@
           </a:p>
         </p:txBody>
       </p:sp>
-      <p:sp>
-        <p:nvSpPr>
-          <p:cNvPr id="86" name="文字方塊 85">
-            <a:extLst>
-              <a:ext uri="{FF2B5EF4-FFF2-40B4-BE49-F238E27FC236}">
-                <a16:creationId xmlns:a16="http://schemas.microsoft.com/office/drawing/2014/main" id="{9F88A81F-BAD1-3CC7-2EAB-9A9B1EC158C4}"/>
+      <p:pic>
+        <p:nvPicPr>
+          <p:cNvPr id="128" name="圖片 127">
+            <a:extLst>
+              <a:ext uri="{FF2B5EF4-FFF2-40B4-BE49-F238E27FC236}">
+                <a16:creationId xmlns:a16="http://schemas.microsoft.com/office/drawing/2014/main" id="{187E3B1D-A7A5-55AC-41EE-7216AB2277BA}"/>
+              </a:ext>
+            </a:extLst>
+          </p:cNvPr>
+          <p:cNvPicPr>
+            <a:picLocks noChangeAspect="1"/>
+          </p:cNvPicPr>
+          <p:nvPr/>
+        </p:nvPicPr>
+        <p:blipFill>
+          <a:blip r:embed="rId2">
+            <a:extLst>
+              <a:ext uri="{28A0092B-C50C-407E-A947-70E740481C1C}">
+                <a14:useLocalDpi xmlns:a14="http://schemas.microsoft.com/office/drawing/2010/main" val="0"/>
+              </a:ext>
+            </a:extLst>
+          </a:blip>
+          <a:stretch>
+            <a:fillRect/>
+          </a:stretch>
+        </p:blipFill>
+        <p:spPr>
+          <a:xfrm>
+            <a:off x="11081987" y="3269465"/>
+            <a:ext cx="937508" cy="521912"/>
+          </a:xfrm>
+          <a:prstGeom prst="rect">
+            <a:avLst/>
+          </a:prstGeom>
+        </p:spPr>
+      </p:pic>
+      <p:pic>
+        <p:nvPicPr>
+          <p:cNvPr id="130" name="圖片 129">
+            <a:extLst>
+              <a:ext uri="{FF2B5EF4-FFF2-40B4-BE49-F238E27FC236}">
+                <a16:creationId xmlns:a16="http://schemas.microsoft.com/office/drawing/2014/main" id="{087DBC79-AB7F-05EE-E450-C645DF8CB6AE}"/>
+              </a:ext>
+            </a:extLst>
+          </p:cNvPr>
+          <p:cNvPicPr>
+            <a:picLocks noChangeAspect="1"/>
+          </p:cNvPicPr>
+          <p:nvPr/>
+        </p:nvPicPr>
+        <p:blipFill>
+          <a:blip r:embed="rId3">
+            <a:extLst>
+              <a:ext uri="{28A0092B-C50C-407E-A947-70E740481C1C}">
+                <a14:useLocalDpi xmlns:a14="http://schemas.microsoft.com/office/drawing/2010/main" val="0"/>
+              </a:ext>
+            </a:extLst>
+          </a:blip>
+          <a:stretch>
+            <a:fillRect/>
+          </a:stretch>
+        </p:blipFill>
+        <p:spPr>
+          <a:xfrm>
+            <a:off x="6657979" y="3251177"/>
+            <a:ext cx="1057275" cy="647700"/>
+          </a:xfrm>
+          <a:prstGeom prst="rect">
+            <a:avLst/>
+          </a:prstGeom>
+        </p:spPr>
+      </p:pic>
+      <p:pic>
+        <p:nvPicPr>
+          <p:cNvPr id="134" name="圖片 133">
+            <a:extLst>
+              <a:ext uri="{FF2B5EF4-FFF2-40B4-BE49-F238E27FC236}">
+                <a16:creationId xmlns:a16="http://schemas.microsoft.com/office/drawing/2014/main" id="{8DF146D4-3C78-50AF-7503-2BC008373BF3}"/>
+              </a:ext>
+            </a:extLst>
+          </p:cNvPr>
+          <p:cNvPicPr>
+            <a:picLocks noChangeAspect="1"/>
+          </p:cNvPicPr>
+          <p:nvPr/>
+        </p:nvPicPr>
+        <p:blipFill>
+          <a:blip r:embed="rId4">
+            <a:extLst>
+              <a:ext uri="{28A0092B-C50C-407E-A947-70E740481C1C}">
+                <a14:useLocalDpi xmlns:a14="http://schemas.microsoft.com/office/drawing/2010/main" val="0"/>
+              </a:ext>
+            </a:extLst>
+          </a:blip>
+          <a:stretch>
+            <a:fillRect/>
+          </a:stretch>
+        </p:blipFill>
+        <p:spPr>
+          <a:xfrm>
+            <a:off x="532957" y="4355083"/>
+            <a:ext cx="2326731" cy="328984"/>
+          </a:xfrm>
+          <a:prstGeom prst="rect">
+            <a:avLst/>
+          </a:prstGeom>
+        </p:spPr>
+      </p:pic>
+      <p:sp>
+        <p:nvSpPr>
+          <p:cNvPr id="154" name="文字方塊 153">
+            <a:extLst>
+              <a:ext uri="{FF2B5EF4-FFF2-40B4-BE49-F238E27FC236}">
+                <a16:creationId xmlns:a16="http://schemas.microsoft.com/office/drawing/2014/main" id="{ECC3F45A-93F0-00ED-ABE3-BCAD54AC0F7F}"/>
               </a:ext>
             </a:extLst>
           </p:cNvPr>
@@ -12243,8 +12872,8 @@
         </p:nvSpPr>
         <p:spPr>
           <a:xfrm>
-            <a:off x="11245924" y="2683862"/>
-            <a:ext cx="650512" cy="523220"/>
+            <a:off x="5752236" y="3690506"/>
+            <a:ext cx="650512" cy="461665"/>
           </a:xfrm>
           <a:prstGeom prst="rect">
             <a:avLst/>
@@ -12259,43 +12888,23 @@
           <a:p>
             <a:pPr algn="ctr"/>
             <a:r>
-              <a:rPr lang="en-US" altLang="zh-TW" sz="2800" dirty="0">
-                <a:solidFill>
-                  <a:srgbClr val="00B050"/>
-                </a:solidFill>
-              </a:rPr>
-              <a:t>e</a:t>
-            </a:r>
-            <a:r>
-              <a:rPr lang="en-US" altLang="zh-TW" sz="1600" dirty="0">
-                <a:solidFill>
-                  <a:srgbClr val="00B050"/>
-                </a:solidFill>
-              </a:rPr>
-              <a:t>15</a:t>
-            </a:r>
-            <a:r>
-              <a:rPr lang="en-US" altLang="zh-TW" dirty="0">
-                <a:solidFill>
-                  <a:srgbClr val="00B050"/>
-                </a:solidFill>
-              </a:rPr>
-              <a:t> </a:t>
-            </a:r>
-            <a:endParaRPr lang="zh-TW" altLang="en-US" sz="2400" dirty="0">
-              <a:solidFill>
-                <a:srgbClr val="00B050"/>
-              </a:solidFill>
-            </a:endParaRPr>
-          </a:p>
-        </p:txBody>
-      </p:sp>
-      <p:sp>
-        <p:nvSpPr>
-          <p:cNvPr id="90" name="左右中括弧 89">
-            <a:extLst>
-              <a:ext uri="{FF2B5EF4-FFF2-40B4-BE49-F238E27FC236}">
-                <a16:creationId xmlns:a16="http://schemas.microsoft.com/office/drawing/2014/main" id="{522130B6-EA0A-BBCE-5B92-8CAA04F49C85}"/>
+              <a:rPr lang="en-US" altLang="zh-TW" sz="2400" dirty="0"/>
+              <a:t>A</a:t>
+            </a:r>
+            <a:r>
+              <a:rPr lang="en-US" altLang="zh-TW" sz="1400" dirty="0"/>
+              <a:t>1</a:t>
+            </a:r>
+            <a:endParaRPr lang="zh-TW" altLang="en-US" sz="3200" dirty="0"/>
+          </a:p>
+        </p:txBody>
+      </p:sp>
+      <p:sp>
+        <p:nvSpPr>
+          <p:cNvPr id="156" name="左右大括弧 155">
+            <a:extLst>
+              <a:ext uri="{FF2B5EF4-FFF2-40B4-BE49-F238E27FC236}">
+                <a16:creationId xmlns:a16="http://schemas.microsoft.com/office/drawing/2014/main" id="{B2C5CAC1-1207-72D0-D422-9DB83847DC51}"/>
               </a:ext>
             </a:extLst>
           </p:cNvPr>
@@ -12304,10 +12913,10 @@
         </p:nvSpPr>
         <p:spPr>
           <a:xfrm>
-            <a:off x="8690987" y="2725546"/>
-            <a:ext cx="3205449" cy="523220"/>
-          </a:xfrm>
-          <a:prstGeom prst="bracketPair">
+            <a:off x="5576176" y="3939196"/>
+            <a:ext cx="977951" cy="2008566"/>
+          </a:xfrm>
+          <a:prstGeom prst="bracePair">
             <a:avLst/>
           </a:prstGeom>
         </p:spPr>
@@ -12336,10 +12945,10 @@
       </p:sp>
       <p:sp>
         <p:nvSpPr>
-          <p:cNvPr id="94" name="文字方塊 93">
-            <a:extLst>
-              <a:ext uri="{FF2B5EF4-FFF2-40B4-BE49-F238E27FC236}">
-                <a16:creationId xmlns:a16="http://schemas.microsoft.com/office/drawing/2014/main" id="{FA3CD66F-281C-682F-4C31-F7FC3FCC0670}"/>
+          <p:cNvPr id="158" name="文字方塊 157">
+            <a:extLst>
+              <a:ext uri="{FF2B5EF4-FFF2-40B4-BE49-F238E27FC236}">
+                <a16:creationId xmlns:a16="http://schemas.microsoft.com/office/drawing/2014/main" id="{D3F28A56-90F5-A348-5049-E998492AD275}"/>
               </a:ext>
             </a:extLst>
           </p:cNvPr>
@@ -12348,8 +12957,8 @@
         </p:nvSpPr>
         <p:spPr>
           <a:xfrm>
-            <a:off x="177282" y="2739424"/>
-            <a:ext cx="3304032" cy="400110"/>
+            <a:off x="5739895" y="4152171"/>
+            <a:ext cx="650512" cy="461665"/>
           </a:xfrm>
           <a:prstGeom prst="rect">
             <a:avLst/>
@@ -12364,46 +12973,395 @@
           <a:p>
             <a:pPr algn="ctr"/>
             <a:r>
-              <a:rPr lang="en-US" altLang="zh-TW" sz="2000" dirty="0"/>
-              <a:t>Standardize(</a:t>
-            </a:r>
-            <a:r>
-              <a:rPr lang="en-US" altLang="zh-TW" sz="2000" dirty="0">
-                <a:solidFill>
-                  <a:srgbClr val="00B050"/>
-                </a:solidFill>
-              </a:rPr>
+              <a:rPr lang="en-US" altLang="zh-TW" sz="2400" dirty="0"/>
+              <a:t>A</a:t>
+            </a:r>
+            <a:r>
+              <a:rPr lang="en-US" altLang="zh-TW" sz="1400" dirty="0"/>
+              <a:t>2</a:t>
+            </a:r>
+            <a:endParaRPr lang="zh-TW" altLang="en-US" sz="3200" dirty="0"/>
+          </a:p>
+        </p:txBody>
+      </p:sp>
+      <p:sp>
+        <p:nvSpPr>
+          <p:cNvPr id="160" name="文字方塊 159">
+            <a:extLst>
+              <a:ext uri="{FF2B5EF4-FFF2-40B4-BE49-F238E27FC236}">
+                <a16:creationId xmlns:a16="http://schemas.microsoft.com/office/drawing/2014/main" id="{12C890E4-D0D1-96E4-5208-005BD340E31F}"/>
+              </a:ext>
+            </a:extLst>
+          </p:cNvPr>
+          <p:cNvSpPr txBox="1"/>
+          <p:nvPr/>
+        </p:nvSpPr>
+        <p:spPr>
+          <a:xfrm>
+            <a:off x="5739895" y="4646533"/>
+            <a:ext cx="650512" cy="461665"/>
+          </a:xfrm>
+          <a:prstGeom prst="rect">
+            <a:avLst/>
+          </a:prstGeom>
+          <a:noFill/>
+        </p:spPr>
+        <p:txBody>
+          <a:bodyPr wrap="square" rtlCol="0">
+            <a:spAutoFit/>
+          </a:bodyPr>
+          <a:lstStyle/>
+          <a:p>
+            <a:pPr algn="ctr"/>
+            <a:r>
+              <a:rPr lang="en-US" altLang="zh-TW" sz="2400" dirty="0"/>
+              <a:t>A</a:t>
+            </a:r>
+            <a:r>
+              <a:rPr lang="en-US" altLang="zh-TW" sz="1400" dirty="0"/>
+              <a:t>3</a:t>
+            </a:r>
+            <a:endParaRPr lang="zh-TW" altLang="en-US" sz="3200" dirty="0"/>
+          </a:p>
+        </p:txBody>
+      </p:sp>
+      <p:sp>
+        <p:nvSpPr>
+          <p:cNvPr id="162" name="文字方塊 161">
+            <a:extLst>
+              <a:ext uri="{FF2B5EF4-FFF2-40B4-BE49-F238E27FC236}">
+                <a16:creationId xmlns:a16="http://schemas.microsoft.com/office/drawing/2014/main" id="{EA2B21AA-7919-C545-756E-A10B7D9F61CF}"/>
+              </a:ext>
+            </a:extLst>
+          </p:cNvPr>
+          <p:cNvSpPr txBox="1"/>
+          <p:nvPr/>
+        </p:nvSpPr>
+        <p:spPr>
+          <a:xfrm>
+            <a:off x="5739895" y="5137279"/>
+            <a:ext cx="650512" cy="461665"/>
+          </a:xfrm>
+          <a:prstGeom prst="rect">
+            <a:avLst/>
+          </a:prstGeom>
+          <a:noFill/>
+        </p:spPr>
+        <p:txBody>
+          <a:bodyPr wrap="square" rtlCol="0">
+            <a:spAutoFit/>
+          </a:bodyPr>
+          <a:lstStyle/>
+          <a:p>
+            <a:pPr algn="ctr"/>
+            <a:r>
+              <a:rPr lang="en-US" altLang="zh-TW" sz="2400" dirty="0"/>
+              <a:t>A</a:t>
+            </a:r>
+            <a:r>
+              <a:rPr lang="en-US" altLang="zh-TW" sz="1400" dirty="0"/>
+              <a:t>4</a:t>
+            </a:r>
+            <a:endParaRPr lang="zh-TW" altLang="en-US" sz="3200" dirty="0"/>
+          </a:p>
+        </p:txBody>
+      </p:sp>
+      <p:sp>
+        <p:nvSpPr>
+          <p:cNvPr id="164" name="文字方塊 163">
+            <a:extLst>
+              <a:ext uri="{FF2B5EF4-FFF2-40B4-BE49-F238E27FC236}">
+                <a16:creationId xmlns:a16="http://schemas.microsoft.com/office/drawing/2014/main" id="{C169B7C5-9248-70BA-B541-E4B8B005221C}"/>
+              </a:ext>
+            </a:extLst>
+          </p:cNvPr>
+          <p:cNvSpPr txBox="1"/>
+          <p:nvPr/>
+        </p:nvSpPr>
+        <p:spPr>
+          <a:xfrm>
+            <a:off x="5739895" y="5628025"/>
+            <a:ext cx="650512" cy="461665"/>
+          </a:xfrm>
+          <a:prstGeom prst="rect">
+            <a:avLst/>
+          </a:prstGeom>
+          <a:noFill/>
+        </p:spPr>
+        <p:txBody>
+          <a:bodyPr wrap="square" rtlCol="0">
+            <a:spAutoFit/>
+          </a:bodyPr>
+          <a:lstStyle/>
+          <a:p>
+            <a:pPr algn="ctr"/>
+            <a:r>
+              <a:rPr lang="en-US" altLang="zh-TW" sz="2400" dirty="0"/>
+              <a:t>A</a:t>
+            </a:r>
+            <a:r>
+              <a:rPr lang="en-US" altLang="zh-TW" sz="1400" dirty="0"/>
+              <a:t>5</a:t>
+            </a:r>
+            <a:endParaRPr lang="zh-TW" altLang="en-US" sz="3200" dirty="0"/>
+          </a:p>
+        </p:txBody>
+      </p:sp>
+      <p:sp>
+        <p:nvSpPr>
+          <p:cNvPr id="178" name="文字方塊 177">
+            <a:extLst>
+              <a:ext uri="{FF2B5EF4-FFF2-40B4-BE49-F238E27FC236}">
+                <a16:creationId xmlns:a16="http://schemas.microsoft.com/office/drawing/2014/main" id="{E36D0E57-5F09-8E34-CF94-39A575A049BE}"/>
+              </a:ext>
+            </a:extLst>
+          </p:cNvPr>
+          <p:cNvSpPr txBox="1"/>
+          <p:nvPr/>
+        </p:nvSpPr>
+        <p:spPr>
+          <a:xfrm>
+            <a:off x="3953665" y="3690506"/>
+            <a:ext cx="650512" cy="461665"/>
+          </a:xfrm>
+          <a:prstGeom prst="rect">
+            <a:avLst/>
+          </a:prstGeom>
+          <a:noFill/>
+        </p:spPr>
+        <p:txBody>
+          <a:bodyPr wrap="square" rtlCol="0">
+            <a:spAutoFit/>
+          </a:bodyPr>
+          <a:lstStyle/>
+          <a:p>
+            <a:pPr algn="ctr"/>
+            <a:r>
+              <a:rPr lang="en-US" altLang="zh-TW" sz="2400" dirty="0"/>
               <a:t>X</a:t>
             </a:r>
             <a:r>
-              <a:rPr lang="en-US" altLang="zh-TW" sz="1400" dirty="0">
-                <a:solidFill>
-                  <a:srgbClr val="00B050"/>
-                </a:solidFill>
-              </a:rPr>
+              <a:rPr lang="en-US" altLang="zh-TW" sz="1400" dirty="0"/>
+              <a:t>1</a:t>
+            </a:r>
+            <a:endParaRPr lang="zh-TW" altLang="en-US" sz="3200" dirty="0"/>
+          </a:p>
+        </p:txBody>
+      </p:sp>
+      <p:sp>
+        <p:nvSpPr>
+          <p:cNvPr id="180" name="左右大括弧 179">
+            <a:extLst>
+              <a:ext uri="{FF2B5EF4-FFF2-40B4-BE49-F238E27FC236}">
+                <a16:creationId xmlns:a16="http://schemas.microsoft.com/office/drawing/2014/main" id="{26F0CA05-04A1-85AE-06C5-A38535877326}"/>
+              </a:ext>
+            </a:extLst>
+          </p:cNvPr>
+          <p:cNvSpPr/>
+          <p:nvPr/>
+        </p:nvSpPr>
+        <p:spPr>
+          <a:xfrm>
+            <a:off x="3777605" y="3939196"/>
+            <a:ext cx="977951" cy="2008566"/>
+          </a:xfrm>
+          <a:prstGeom prst="bracePair">
+            <a:avLst/>
+          </a:prstGeom>
+        </p:spPr>
+        <p:style>
+          <a:lnRef idx="2">
+            <a:schemeClr val="dk1"/>
+          </a:lnRef>
+          <a:fillRef idx="0">
+            <a:schemeClr val="dk1"/>
+          </a:fillRef>
+          <a:effectRef idx="1">
+            <a:schemeClr val="dk1"/>
+          </a:effectRef>
+          <a:fontRef idx="minor">
+            <a:schemeClr val="tx1"/>
+          </a:fontRef>
+        </p:style>
+        <p:txBody>
+          <a:bodyPr rtlCol="0" anchor="ctr"/>
+          <a:lstStyle/>
+          <a:p>
+            <a:pPr algn="ctr"/>
+            <a:endParaRPr lang="zh-TW" altLang="en-US"/>
+          </a:p>
+        </p:txBody>
+      </p:sp>
+      <p:sp>
+        <p:nvSpPr>
+          <p:cNvPr id="182" name="文字方塊 181">
+            <a:extLst>
+              <a:ext uri="{FF2B5EF4-FFF2-40B4-BE49-F238E27FC236}">
+                <a16:creationId xmlns:a16="http://schemas.microsoft.com/office/drawing/2014/main" id="{B63A29C4-BBD9-0F41-BFAC-ED8CAE2B840E}"/>
+              </a:ext>
+            </a:extLst>
+          </p:cNvPr>
+          <p:cNvSpPr txBox="1"/>
+          <p:nvPr/>
+        </p:nvSpPr>
+        <p:spPr>
+          <a:xfrm>
+            <a:off x="3941324" y="4152171"/>
+            <a:ext cx="650512" cy="461665"/>
+          </a:xfrm>
+          <a:prstGeom prst="rect">
+            <a:avLst/>
+          </a:prstGeom>
+          <a:noFill/>
+        </p:spPr>
+        <p:txBody>
+          <a:bodyPr wrap="square" rtlCol="0">
+            <a:spAutoFit/>
+          </a:bodyPr>
+          <a:lstStyle/>
+          <a:p>
+            <a:pPr algn="ctr"/>
+            <a:r>
+              <a:rPr lang="en-US" altLang="zh-TW" sz="2400" dirty="0"/>
+              <a:t>X</a:t>
+            </a:r>
+            <a:r>
+              <a:rPr lang="en-US" altLang="zh-TW" sz="1400" dirty="0"/>
+              <a:t>2</a:t>
+            </a:r>
+            <a:endParaRPr lang="zh-TW" altLang="en-US" sz="3200" dirty="0"/>
+          </a:p>
+        </p:txBody>
+      </p:sp>
+      <p:sp>
+        <p:nvSpPr>
+          <p:cNvPr id="184" name="文字方塊 183">
+            <a:extLst>
+              <a:ext uri="{FF2B5EF4-FFF2-40B4-BE49-F238E27FC236}">
+                <a16:creationId xmlns:a16="http://schemas.microsoft.com/office/drawing/2014/main" id="{2AF27BF6-A3DA-834F-8CF9-7DE3DFF55464}"/>
+              </a:ext>
+            </a:extLst>
+          </p:cNvPr>
+          <p:cNvSpPr txBox="1"/>
+          <p:nvPr/>
+        </p:nvSpPr>
+        <p:spPr>
+          <a:xfrm>
+            <a:off x="3941324" y="4646533"/>
+            <a:ext cx="650512" cy="461665"/>
+          </a:xfrm>
+          <a:prstGeom prst="rect">
+            <a:avLst/>
+          </a:prstGeom>
+          <a:noFill/>
+        </p:spPr>
+        <p:txBody>
+          <a:bodyPr wrap="square" rtlCol="0">
+            <a:spAutoFit/>
+          </a:bodyPr>
+          <a:lstStyle/>
+          <a:p>
+            <a:pPr algn="ctr"/>
+            <a:r>
+              <a:rPr lang="en-US" altLang="zh-TW" sz="2400" dirty="0"/>
+              <a:t>X</a:t>
+            </a:r>
+            <a:r>
+              <a:rPr lang="en-US" altLang="zh-TW" sz="1400" dirty="0"/>
+              <a:t>3</a:t>
+            </a:r>
+            <a:endParaRPr lang="zh-TW" altLang="en-US" sz="3200" dirty="0"/>
+          </a:p>
+        </p:txBody>
+      </p:sp>
+      <p:sp>
+        <p:nvSpPr>
+          <p:cNvPr id="186" name="文字方塊 185">
+            <a:extLst>
+              <a:ext uri="{FF2B5EF4-FFF2-40B4-BE49-F238E27FC236}">
+                <a16:creationId xmlns:a16="http://schemas.microsoft.com/office/drawing/2014/main" id="{59162BB3-0706-917F-C594-3B582AB9135B}"/>
+              </a:ext>
+            </a:extLst>
+          </p:cNvPr>
+          <p:cNvSpPr txBox="1"/>
+          <p:nvPr/>
+        </p:nvSpPr>
+        <p:spPr>
+          <a:xfrm>
+            <a:off x="3941324" y="5137279"/>
+            <a:ext cx="650512" cy="461665"/>
+          </a:xfrm>
+          <a:prstGeom prst="rect">
+            <a:avLst/>
+          </a:prstGeom>
+          <a:noFill/>
+        </p:spPr>
+        <p:txBody>
+          <a:bodyPr wrap="square" rtlCol="0">
+            <a:spAutoFit/>
+          </a:bodyPr>
+          <a:lstStyle/>
+          <a:p>
+            <a:pPr algn="ctr"/>
+            <a:r>
+              <a:rPr lang="en-US" altLang="zh-TW" sz="2400" dirty="0"/>
+              <a:t>X</a:t>
+            </a:r>
+            <a:r>
+              <a:rPr lang="en-US" altLang="zh-TW" sz="1400" dirty="0"/>
               <a:t>4</a:t>
             </a:r>
-            <a:r>
-              <a:rPr lang="en-US" altLang="zh-TW" sz="2000" dirty="0">
-                <a:solidFill>
-                  <a:srgbClr val="00B050"/>
-                </a:solidFill>
-              </a:rPr>
-              <a:t> : weight</a:t>
-            </a:r>
-            <a:r>
-              <a:rPr lang="en-US" altLang="zh-TW" sz="2000" dirty="0"/>
-              <a:t>)</a:t>
-            </a:r>
-          </a:p>
-        </p:txBody>
-      </p:sp>
-      <p:sp>
-        <p:nvSpPr>
-          <p:cNvPr id="98" name="乘號 97">
-            <a:extLst>
-              <a:ext uri="{FF2B5EF4-FFF2-40B4-BE49-F238E27FC236}">
-                <a16:creationId xmlns:a16="http://schemas.microsoft.com/office/drawing/2014/main" id="{CD7E0460-1B37-7990-4F4B-C87E3E2816A6}"/>
+            <a:endParaRPr lang="zh-TW" altLang="en-US" sz="3200" dirty="0"/>
+          </a:p>
+        </p:txBody>
+      </p:sp>
+      <p:sp>
+        <p:nvSpPr>
+          <p:cNvPr id="188" name="文字方塊 187">
+            <a:extLst>
+              <a:ext uri="{FF2B5EF4-FFF2-40B4-BE49-F238E27FC236}">
+                <a16:creationId xmlns:a16="http://schemas.microsoft.com/office/drawing/2014/main" id="{CE13851E-3B9A-54D4-7AB5-9B0CDE526695}"/>
+              </a:ext>
+            </a:extLst>
+          </p:cNvPr>
+          <p:cNvSpPr txBox="1"/>
+          <p:nvPr/>
+        </p:nvSpPr>
+        <p:spPr>
+          <a:xfrm>
+            <a:off x="3941324" y="5628025"/>
+            <a:ext cx="650512" cy="461665"/>
+          </a:xfrm>
+          <a:prstGeom prst="rect">
+            <a:avLst/>
+          </a:prstGeom>
+          <a:noFill/>
+        </p:spPr>
+        <p:txBody>
+          <a:bodyPr wrap="square" rtlCol="0">
+            <a:spAutoFit/>
+          </a:bodyPr>
+          <a:lstStyle/>
+          <a:p>
+            <a:pPr algn="ctr"/>
+            <a:r>
+              <a:rPr lang="en-US" altLang="zh-TW" sz="2400" dirty="0"/>
+              <a:t>X</a:t>
+            </a:r>
+            <a:r>
+              <a:rPr lang="en-US" altLang="zh-TW" sz="1400" dirty="0"/>
+              <a:t>5</a:t>
+            </a:r>
+            <a:endParaRPr lang="zh-TW" altLang="en-US" sz="3200" dirty="0"/>
+          </a:p>
+        </p:txBody>
+      </p:sp>
+      <p:sp>
+        <p:nvSpPr>
+          <p:cNvPr id="190" name="箭號: 向右 189">
+            <a:extLst>
+              <a:ext uri="{FF2B5EF4-FFF2-40B4-BE49-F238E27FC236}">
+                <a16:creationId xmlns:a16="http://schemas.microsoft.com/office/drawing/2014/main" id="{FE68C5A5-E981-2BE4-6873-B2A37AE18707}"/>
               </a:ext>
             </a:extLst>
           </p:cNvPr>
@@ -12412,12 +13370,18 @@
         </p:nvSpPr>
         <p:spPr>
           <a:xfrm>
-            <a:off x="3365050" y="2725601"/>
-            <a:ext cx="557784" cy="475488"/>
-          </a:xfrm>
-          <a:prstGeom prst="mathMultiply">
-            <a:avLst/>
-          </a:prstGeom>
+            <a:off x="4996832" y="4829039"/>
+            <a:ext cx="354395" cy="228880"/>
+          </a:xfrm>
+          <a:prstGeom prst="rightArrow">
+            <a:avLst/>
+          </a:prstGeom>
+          <a:solidFill>
+            <a:schemeClr val="tx1"/>
+          </a:solidFill>
+          <a:ln>
+            <a:noFill/>
+          </a:ln>
         </p:spPr>
         <p:style>
           <a:lnRef idx="2">
@@ -12446,10 +13410,10 @@
       </p:sp>
       <p:sp>
         <p:nvSpPr>
-          <p:cNvPr id="102" name="文字方塊 101">
-            <a:extLst>
-              <a:ext uri="{FF2B5EF4-FFF2-40B4-BE49-F238E27FC236}">
-                <a16:creationId xmlns:a16="http://schemas.microsoft.com/office/drawing/2014/main" id="{0C64F147-543D-A951-D9A0-B044619CE64E}"/>
+          <p:cNvPr id="192" name="文字方塊 191">
+            <a:extLst>
+              <a:ext uri="{FF2B5EF4-FFF2-40B4-BE49-F238E27FC236}">
+                <a16:creationId xmlns:a16="http://schemas.microsoft.com/office/drawing/2014/main" id="{58A5E885-0B4D-F119-3673-A7A67382FC7A}"/>
               </a:ext>
             </a:extLst>
           </p:cNvPr>
@@ -12458,8 +13422,8 @@
         </p:nvSpPr>
         <p:spPr>
           <a:xfrm>
-            <a:off x="4338188" y="2683862"/>
-            <a:ext cx="748322" cy="523220"/>
+            <a:off x="4781756" y="4416599"/>
+            <a:ext cx="768220" cy="369332"/>
           </a:xfrm>
           <a:prstGeom prst="rect">
             <a:avLst/>
@@ -12474,43 +13438,59 @@
           <a:p>
             <a:pPr algn="ctr"/>
             <a:r>
-              <a:rPr lang="en-US" altLang="zh-TW" sz="2800" dirty="0">
-                <a:solidFill>
-                  <a:srgbClr val="00B050"/>
-                </a:solidFill>
-              </a:rPr>
-              <a:t>w</a:t>
-            </a:r>
-            <a:r>
-              <a:rPr lang="en-US" altLang="zh-TW" sz="1600" dirty="0">
-                <a:solidFill>
-                  <a:srgbClr val="00B050"/>
-                </a:solidFill>
-              </a:rPr>
-              <a:t>11</a:t>
-            </a:r>
-            <a:r>
-              <a:rPr lang="en-US" altLang="zh-TW" dirty="0">
-                <a:solidFill>
-                  <a:srgbClr val="00B050"/>
-                </a:solidFill>
-              </a:rPr>
-              <a:t> </a:t>
-            </a:r>
-            <a:endParaRPr lang="zh-TW" altLang="en-US" sz="2400" dirty="0">
-              <a:solidFill>
-                <a:srgbClr val="00B050"/>
-              </a:solidFill>
-            </a:endParaRPr>
-          </a:p>
-        </p:txBody>
-      </p:sp>
-      <p:sp>
-        <p:nvSpPr>
-          <p:cNvPr id="104" name="左右中括弧 103">
-            <a:extLst>
-              <a:ext uri="{FF2B5EF4-FFF2-40B4-BE49-F238E27FC236}">
-                <a16:creationId xmlns:a16="http://schemas.microsoft.com/office/drawing/2014/main" id="{4C749D27-E912-E245-1595-981BD45377E3}"/>
+              <a:rPr lang="en-US" altLang="zh-TW" dirty="0"/>
+              <a:t>Attn</a:t>
+            </a:r>
+          </a:p>
+        </p:txBody>
+      </p:sp>
+      <p:sp>
+        <p:nvSpPr>
+          <p:cNvPr id="194" name="文字方塊 193">
+            <a:extLst>
+              <a:ext uri="{FF2B5EF4-FFF2-40B4-BE49-F238E27FC236}">
+                <a16:creationId xmlns:a16="http://schemas.microsoft.com/office/drawing/2014/main" id="{D3D61C74-136A-83E8-A08B-D0B7D7B52DC7}"/>
+              </a:ext>
+            </a:extLst>
+          </p:cNvPr>
+          <p:cNvSpPr txBox="1"/>
+          <p:nvPr/>
+        </p:nvSpPr>
+        <p:spPr>
+          <a:xfrm>
+            <a:off x="9677942" y="3690506"/>
+            <a:ext cx="650512" cy="461665"/>
+          </a:xfrm>
+          <a:prstGeom prst="rect">
+            <a:avLst/>
+          </a:prstGeom>
+          <a:noFill/>
+        </p:spPr>
+        <p:txBody>
+          <a:bodyPr wrap="square" rtlCol="0">
+            <a:spAutoFit/>
+          </a:bodyPr>
+          <a:lstStyle/>
+          <a:p>
+            <a:pPr algn="ctr"/>
+            <a:r>
+              <a:rPr lang="en-US" altLang="zh-TW" sz="2400" dirty="0"/>
+              <a:t>A</a:t>
+            </a:r>
+            <a:r>
+              <a:rPr lang="en-US" altLang="zh-TW" sz="1400" dirty="0"/>
+              <a:t>2</a:t>
+            </a:r>
+            <a:endParaRPr lang="zh-TW" altLang="en-US" sz="3200" dirty="0"/>
+          </a:p>
+        </p:txBody>
+      </p:sp>
+      <p:sp>
+        <p:nvSpPr>
+          <p:cNvPr id="196" name="左右大括弧 195">
+            <a:extLst>
+              <a:ext uri="{FF2B5EF4-FFF2-40B4-BE49-F238E27FC236}">
+                <a16:creationId xmlns:a16="http://schemas.microsoft.com/office/drawing/2014/main" id="{F0569F82-2BD5-C557-DE81-03E11789261B}"/>
               </a:ext>
             </a:extLst>
           </p:cNvPr>
@@ -12519,10 +13499,10 @@
         </p:nvSpPr>
         <p:spPr>
           <a:xfrm>
-            <a:off x="4330025" y="2725546"/>
-            <a:ext cx="3205449" cy="523220"/>
-          </a:xfrm>
-          <a:prstGeom prst="bracketPair">
+            <a:off x="9501882" y="3939196"/>
+            <a:ext cx="977951" cy="2008566"/>
+          </a:xfrm>
+          <a:prstGeom prst="bracePair">
             <a:avLst/>
           </a:prstGeom>
         </p:spPr>
@@ -12551,10 +13531,215 @@
       </p:sp>
       <p:sp>
         <p:nvSpPr>
-          <p:cNvPr id="108" name="等於 107">
-            <a:extLst>
-              <a:ext uri="{FF2B5EF4-FFF2-40B4-BE49-F238E27FC236}">
-                <a16:creationId xmlns:a16="http://schemas.microsoft.com/office/drawing/2014/main" id="{9E9927A3-C38C-FD34-680D-F86C547BC62D}"/>
+          <p:cNvPr id="198" name="文字方塊 197">
+            <a:extLst>
+              <a:ext uri="{FF2B5EF4-FFF2-40B4-BE49-F238E27FC236}">
+                <a16:creationId xmlns:a16="http://schemas.microsoft.com/office/drawing/2014/main" id="{46F573B4-ED37-1271-3BF5-7617A23C31E3}"/>
+              </a:ext>
+            </a:extLst>
+          </p:cNvPr>
+          <p:cNvSpPr txBox="1"/>
+          <p:nvPr/>
+        </p:nvSpPr>
+        <p:spPr>
+          <a:xfrm>
+            <a:off x="9665601" y="4152171"/>
+            <a:ext cx="650512" cy="461665"/>
+          </a:xfrm>
+          <a:prstGeom prst="rect">
+            <a:avLst/>
+          </a:prstGeom>
+          <a:noFill/>
+        </p:spPr>
+        <p:txBody>
+          <a:bodyPr wrap="square" rtlCol="0">
+            <a:spAutoFit/>
+          </a:bodyPr>
+          <a:lstStyle/>
+          <a:p>
+            <a:pPr algn="ctr"/>
+            <a:r>
+              <a:rPr lang="en-US" altLang="zh-TW" sz="2400" dirty="0"/>
+              <a:t>A</a:t>
+            </a:r>
+            <a:r>
+              <a:rPr lang="en-US" altLang="zh-TW" sz="1400" dirty="0"/>
+              <a:t>1</a:t>
+            </a:r>
+            <a:endParaRPr lang="zh-TW" altLang="en-US" sz="3200" dirty="0"/>
+          </a:p>
+        </p:txBody>
+      </p:sp>
+      <p:sp>
+        <p:nvSpPr>
+          <p:cNvPr id="200" name="文字方塊 199">
+            <a:extLst>
+              <a:ext uri="{FF2B5EF4-FFF2-40B4-BE49-F238E27FC236}">
+                <a16:creationId xmlns:a16="http://schemas.microsoft.com/office/drawing/2014/main" id="{EE4B2486-86F0-9CB5-0A52-9D68C6C0D3F2}"/>
+              </a:ext>
+            </a:extLst>
+          </p:cNvPr>
+          <p:cNvSpPr txBox="1"/>
+          <p:nvPr/>
+        </p:nvSpPr>
+        <p:spPr>
+          <a:xfrm>
+            <a:off x="9665601" y="4646533"/>
+            <a:ext cx="650512" cy="461665"/>
+          </a:xfrm>
+          <a:prstGeom prst="rect">
+            <a:avLst/>
+          </a:prstGeom>
+          <a:noFill/>
+        </p:spPr>
+        <p:txBody>
+          <a:bodyPr wrap="square" rtlCol="0">
+            <a:spAutoFit/>
+          </a:bodyPr>
+          <a:lstStyle/>
+          <a:p>
+            <a:pPr algn="ctr"/>
+            <a:r>
+              <a:rPr lang="en-US" altLang="zh-TW" sz="2400" dirty="0"/>
+              <a:t>A</a:t>
+            </a:r>
+            <a:r>
+              <a:rPr lang="en-US" altLang="zh-TW" sz="1400" dirty="0"/>
+              <a:t>5</a:t>
+            </a:r>
+            <a:endParaRPr lang="zh-TW" altLang="en-US" sz="3200" dirty="0"/>
+          </a:p>
+        </p:txBody>
+      </p:sp>
+      <p:sp>
+        <p:nvSpPr>
+          <p:cNvPr id="202" name="文字方塊 201">
+            <a:extLst>
+              <a:ext uri="{FF2B5EF4-FFF2-40B4-BE49-F238E27FC236}">
+                <a16:creationId xmlns:a16="http://schemas.microsoft.com/office/drawing/2014/main" id="{BDE86C63-756C-559B-15F3-F8C6EFA0AFCC}"/>
+              </a:ext>
+            </a:extLst>
+          </p:cNvPr>
+          <p:cNvSpPr txBox="1"/>
+          <p:nvPr/>
+        </p:nvSpPr>
+        <p:spPr>
+          <a:xfrm>
+            <a:off x="9665601" y="5137279"/>
+            <a:ext cx="650512" cy="461665"/>
+          </a:xfrm>
+          <a:prstGeom prst="rect">
+            <a:avLst/>
+          </a:prstGeom>
+          <a:noFill/>
+        </p:spPr>
+        <p:txBody>
+          <a:bodyPr wrap="square" rtlCol="0">
+            <a:spAutoFit/>
+          </a:bodyPr>
+          <a:lstStyle/>
+          <a:p>
+            <a:pPr algn="ctr"/>
+            <a:r>
+              <a:rPr lang="en-US" altLang="zh-TW" sz="2400" dirty="0"/>
+              <a:t>A</a:t>
+            </a:r>
+            <a:r>
+              <a:rPr lang="en-US" altLang="zh-TW" sz="1400" dirty="0"/>
+              <a:t>4</a:t>
+            </a:r>
+            <a:endParaRPr lang="zh-TW" altLang="en-US" sz="3200" dirty="0"/>
+          </a:p>
+        </p:txBody>
+      </p:sp>
+      <p:sp>
+        <p:nvSpPr>
+          <p:cNvPr id="204" name="文字方塊 203">
+            <a:extLst>
+              <a:ext uri="{FF2B5EF4-FFF2-40B4-BE49-F238E27FC236}">
+                <a16:creationId xmlns:a16="http://schemas.microsoft.com/office/drawing/2014/main" id="{938BF3B4-9360-538F-5730-F5FA71C97A29}"/>
+              </a:ext>
+            </a:extLst>
+          </p:cNvPr>
+          <p:cNvSpPr txBox="1"/>
+          <p:nvPr/>
+        </p:nvSpPr>
+        <p:spPr>
+          <a:xfrm>
+            <a:off x="9665601" y="5628025"/>
+            <a:ext cx="650512" cy="461665"/>
+          </a:xfrm>
+          <a:prstGeom prst="rect">
+            <a:avLst/>
+          </a:prstGeom>
+          <a:noFill/>
+        </p:spPr>
+        <p:txBody>
+          <a:bodyPr wrap="square" rtlCol="0">
+            <a:spAutoFit/>
+          </a:bodyPr>
+          <a:lstStyle/>
+          <a:p>
+            <a:pPr algn="ctr"/>
+            <a:r>
+              <a:rPr lang="en-US" altLang="zh-TW" sz="2400" dirty="0"/>
+              <a:t>A</a:t>
+            </a:r>
+            <a:r>
+              <a:rPr lang="en-US" altLang="zh-TW" sz="1400" dirty="0"/>
+              <a:t>3</a:t>
+            </a:r>
+            <a:endParaRPr lang="zh-TW" altLang="en-US" sz="3200" dirty="0"/>
+          </a:p>
+        </p:txBody>
+      </p:sp>
+      <p:sp>
+        <p:nvSpPr>
+          <p:cNvPr id="206" name="文字方塊 205">
+            <a:extLst>
+              <a:ext uri="{FF2B5EF4-FFF2-40B4-BE49-F238E27FC236}">
+                <a16:creationId xmlns:a16="http://schemas.microsoft.com/office/drawing/2014/main" id="{72C25847-1E84-5D10-982F-92CA09AC122E}"/>
+              </a:ext>
+            </a:extLst>
+          </p:cNvPr>
+          <p:cNvSpPr txBox="1"/>
+          <p:nvPr/>
+        </p:nvSpPr>
+        <p:spPr>
+          <a:xfrm>
+            <a:off x="7879371" y="3690506"/>
+            <a:ext cx="650512" cy="461665"/>
+          </a:xfrm>
+          <a:prstGeom prst="rect">
+            <a:avLst/>
+          </a:prstGeom>
+          <a:noFill/>
+        </p:spPr>
+        <p:txBody>
+          <a:bodyPr wrap="square" rtlCol="0">
+            <a:spAutoFit/>
+          </a:bodyPr>
+          <a:lstStyle/>
+          <a:p>
+            <a:pPr algn="ctr"/>
+            <a:r>
+              <a:rPr lang="en-US" altLang="zh-TW" sz="2400" dirty="0"/>
+              <a:t>X</a:t>
+            </a:r>
+            <a:r>
+              <a:rPr lang="en-US" altLang="zh-TW" sz="1400" dirty="0"/>
+              <a:t>2</a:t>
+            </a:r>
+            <a:endParaRPr lang="zh-TW" altLang="en-US" sz="3200" dirty="0"/>
+          </a:p>
+        </p:txBody>
+      </p:sp>
+      <p:sp>
+        <p:nvSpPr>
+          <p:cNvPr id="208" name="左右大括弧 207">
+            <a:extLst>
+              <a:ext uri="{FF2B5EF4-FFF2-40B4-BE49-F238E27FC236}">
+                <a16:creationId xmlns:a16="http://schemas.microsoft.com/office/drawing/2014/main" id="{276B5D7F-1815-9D66-69FD-A22379EE7049}"/>
               </a:ext>
             </a:extLst>
           </p:cNvPr>
@@ -12563,12 +13748,226 @@
         </p:nvSpPr>
         <p:spPr>
           <a:xfrm>
-            <a:off x="7831676" y="2739424"/>
-            <a:ext cx="539127" cy="461665"/>
-          </a:xfrm>
-          <a:prstGeom prst="mathEqual">
-            <a:avLst/>
-          </a:prstGeom>
+            <a:off x="7703311" y="3939196"/>
+            <a:ext cx="977951" cy="2008566"/>
+          </a:xfrm>
+          <a:prstGeom prst="bracePair">
+            <a:avLst/>
+          </a:prstGeom>
+        </p:spPr>
+        <p:style>
+          <a:lnRef idx="2">
+            <a:schemeClr val="dk1"/>
+          </a:lnRef>
+          <a:fillRef idx="0">
+            <a:schemeClr val="dk1"/>
+          </a:fillRef>
+          <a:effectRef idx="1">
+            <a:schemeClr val="dk1"/>
+          </a:effectRef>
+          <a:fontRef idx="minor">
+            <a:schemeClr val="tx1"/>
+          </a:fontRef>
+        </p:style>
+        <p:txBody>
+          <a:bodyPr rtlCol="0" anchor="ctr"/>
+          <a:lstStyle/>
+          <a:p>
+            <a:pPr algn="ctr"/>
+            <a:endParaRPr lang="zh-TW" altLang="en-US"/>
+          </a:p>
+        </p:txBody>
+      </p:sp>
+      <p:sp>
+        <p:nvSpPr>
+          <p:cNvPr id="210" name="文字方塊 209">
+            <a:extLst>
+              <a:ext uri="{FF2B5EF4-FFF2-40B4-BE49-F238E27FC236}">
+                <a16:creationId xmlns:a16="http://schemas.microsoft.com/office/drawing/2014/main" id="{2320DCDF-3F80-851F-5EC9-64199FA1A0F8}"/>
+              </a:ext>
+            </a:extLst>
+          </p:cNvPr>
+          <p:cNvSpPr txBox="1"/>
+          <p:nvPr/>
+        </p:nvSpPr>
+        <p:spPr>
+          <a:xfrm>
+            <a:off x="7867030" y="4152171"/>
+            <a:ext cx="650512" cy="461665"/>
+          </a:xfrm>
+          <a:prstGeom prst="rect">
+            <a:avLst/>
+          </a:prstGeom>
+          <a:noFill/>
+        </p:spPr>
+        <p:txBody>
+          <a:bodyPr wrap="square" rtlCol="0">
+            <a:spAutoFit/>
+          </a:bodyPr>
+          <a:lstStyle/>
+          <a:p>
+            <a:pPr algn="ctr"/>
+            <a:r>
+              <a:rPr lang="en-US" altLang="zh-TW" sz="2400" dirty="0"/>
+              <a:t>X</a:t>
+            </a:r>
+            <a:r>
+              <a:rPr lang="en-US" altLang="zh-TW" sz="1400" dirty="0"/>
+              <a:t>1</a:t>
+            </a:r>
+            <a:endParaRPr lang="zh-TW" altLang="en-US" sz="3200" dirty="0"/>
+          </a:p>
+        </p:txBody>
+      </p:sp>
+      <p:sp>
+        <p:nvSpPr>
+          <p:cNvPr id="212" name="文字方塊 211">
+            <a:extLst>
+              <a:ext uri="{FF2B5EF4-FFF2-40B4-BE49-F238E27FC236}">
+                <a16:creationId xmlns:a16="http://schemas.microsoft.com/office/drawing/2014/main" id="{CEE5BC4F-4A08-A044-A800-3D8A3625C9E3}"/>
+              </a:ext>
+            </a:extLst>
+          </p:cNvPr>
+          <p:cNvSpPr txBox="1"/>
+          <p:nvPr/>
+        </p:nvSpPr>
+        <p:spPr>
+          <a:xfrm>
+            <a:off x="7867030" y="4646533"/>
+            <a:ext cx="650512" cy="461665"/>
+          </a:xfrm>
+          <a:prstGeom prst="rect">
+            <a:avLst/>
+          </a:prstGeom>
+          <a:noFill/>
+        </p:spPr>
+        <p:txBody>
+          <a:bodyPr wrap="square" rtlCol="0">
+            <a:spAutoFit/>
+          </a:bodyPr>
+          <a:lstStyle/>
+          <a:p>
+            <a:pPr algn="ctr"/>
+            <a:r>
+              <a:rPr lang="en-US" altLang="zh-TW" sz="2400" dirty="0"/>
+              <a:t>X</a:t>
+            </a:r>
+            <a:r>
+              <a:rPr lang="en-US" altLang="zh-TW" sz="1400" dirty="0"/>
+              <a:t>5</a:t>
+            </a:r>
+            <a:endParaRPr lang="zh-TW" altLang="en-US" sz="3200" dirty="0"/>
+          </a:p>
+        </p:txBody>
+      </p:sp>
+      <p:sp>
+        <p:nvSpPr>
+          <p:cNvPr id="214" name="文字方塊 213">
+            <a:extLst>
+              <a:ext uri="{FF2B5EF4-FFF2-40B4-BE49-F238E27FC236}">
+                <a16:creationId xmlns:a16="http://schemas.microsoft.com/office/drawing/2014/main" id="{B5CFE5C2-9F86-F9FE-0391-1B1E306C6566}"/>
+              </a:ext>
+            </a:extLst>
+          </p:cNvPr>
+          <p:cNvSpPr txBox="1"/>
+          <p:nvPr/>
+        </p:nvSpPr>
+        <p:spPr>
+          <a:xfrm>
+            <a:off x="7867030" y="5137279"/>
+            <a:ext cx="650512" cy="461665"/>
+          </a:xfrm>
+          <a:prstGeom prst="rect">
+            <a:avLst/>
+          </a:prstGeom>
+          <a:noFill/>
+        </p:spPr>
+        <p:txBody>
+          <a:bodyPr wrap="square" rtlCol="0">
+            <a:spAutoFit/>
+          </a:bodyPr>
+          <a:lstStyle/>
+          <a:p>
+            <a:pPr algn="ctr"/>
+            <a:r>
+              <a:rPr lang="en-US" altLang="zh-TW" sz="2400" dirty="0"/>
+              <a:t>X</a:t>
+            </a:r>
+            <a:r>
+              <a:rPr lang="en-US" altLang="zh-TW" sz="1400" dirty="0"/>
+              <a:t>4</a:t>
+            </a:r>
+            <a:endParaRPr lang="zh-TW" altLang="en-US" sz="3200" dirty="0"/>
+          </a:p>
+        </p:txBody>
+      </p:sp>
+      <p:sp>
+        <p:nvSpPr>
+          <p:cNvPr id="216" name="文字方塊 215">
+            <a:extLst>
+              <a:ext uri="{FF2B5EF4-FFF2-40B4-BE49-F238E27FC236}">
+                <a16:creationId xmlns:a16="http://schemas.microsoft.com/office/drawing/2014/main" id="{7721B96D-AC55-5080-753C-946441505A61}"/>
+              </a:ext>
+            </a:extLst>
+          </p:cNvPr>
+          <p:cNvSpPr txBox="1"/>
+          <p:nvPr/>
+        </p:nvSpPr>
+        <p:spPr>
+          <a:xfrm>
+            <a:off x="7867030" y="5628025"/>
+            <a:ext cx="650512" cy="461665"/>
+          </a:xfrm>
+          <a:prstGeom prst="rect">
+            <a:avLst/>
+          </a:prstGeom>
+          <a:noFill/>
+        </p:spPr>
+        <p:txBody>
+          <a:bodyPr wrap="square" rtlCol="0">
+            <a:spAutoFit/>
+          </a:bodyPr>
+          <a:lstStyle/>
+          <a:p>
+            <a:pPr algn="ctr"/>
+            <a:r>
+              <a:rPr lang="en-US" altLang="zh-TW" sz="2400" dirty="0"/>
+              <a:t>X</a:t>
+            </a:r>
+            <a:r>
+              <a:rPr lang="en-US" altLang="zh-TW" sz="1400" dirty="0"/>
+              <a:t>3</a:t>
+            </a:r>
+            <a:endParaRPr lang="zh-TW" altLang="en-US" sz="3200" dirty="0"/>
+          </a:p>
+        </p:txBody>
+      </p:sp>
+      <p:sp>
+        <p:nvSpPr>
+          <p:cNvPr id="218" name="箭號: 向右 217">
+            <a:extLst>
+              <a:ext uri="{FF2B5EF4-FFF2-40B4-BE49-F238E27FC236}">
+                <a16:creationId xmlns:a16="http://schemas.microsoft.com/office/drawing/2014/main" id="{3FAE6BF3-B413-778E-4174-A3D24D9DC310}"/>
+              </a:ext>
+            </a:extLst>
+          </p:cNvPr>
+          <p:cNvSpPr/>
+          <p:nvPr/>
+        </p:nvSpPr>
+        <p:spPr>
+          <a:xfrm>
+            <a:off x="8922538" y="4829039"/>
+            <a:ext cx="354395" cy="228880"/>
+          </a:xfrm>
+          <a:prstGeom prst="rightArrow">
+            <a:avLst/>
+          </a:prstGeom>
+          <a:solidFill>
+            <a:schemeClr val="tx1"/>
+          </a:solidFill>
+          <a:ln>
+            <a:noFill/>
+          </a:ln>
         </p:spPr>
         <p:style>
           <a:lnRef idx="2">
@@ -12591,20 +13990,16 @@
           <a:lstStyle/>
           <a:p>
             <a:pPr algn="ctr"/>
-            <a:endParaRPr lang="zh-TW" altLang="en-US">
-              <a:solidFill>
-                <a:schemeClr val="tx1"/>
-              </a:solidFill>
-            </a:endParaRPr>
-          </a:p>
-        </p:txBody>
-      </p:sp>
-      <p:sp>
-        <p:nvSpPr>
-          <p:cNvPr id="112" name="文字方塊 111">
-            <a:extLst>
-              <a:ext uri="{FF2B5EF4-FFF2-40B4-BE49-F238E27FC236}">
-                <a16:creationId xmlns:a16="http://schemas.microsoft.com/office/drawing/2014/main" id="{018900F4-1C16-D51E-5206-A8C48B02F69D}"/>
+            <a:endParaRPr lang="zh-TW" altLang="en-US"/>
+          </a:p>
+        </p:txBody>
+      </p:sp>
+      <p:sp>
+        <p:nvSpPr>
+          <p:cNvPr id="220" name="文字方塊 219">
+            <a:extLst>
+              <a:ext uri="{FF2B5EF4-FFF2-40B4-BE49-F238E27FC236}">
+                <a16:creationId xmlns:a16="http://schemas.microsoft.com/office/drawing/2014/main" id="{E0FD3482-56A2-4A0E-7EB9-C5DB9D533EDD}"/>
               </a:ext>
             </a:extLst>
           </p:cNvPr>
@@ -12613,8 +14008,8 @@
         </p:nvSpPr>
         <p:spPr>
           <a:xfrm>
-            <a:off x="4913473" y="2677869"/>
-            <a:ext cx="748322" cy="523220"/>
+            <a:off x="8707462" y="4416599"/>
+            <a:ext cx="768220" cy="369332"/>
           </a:xfrm>
           <a:prstGeom prst="rect">
             <a:avLst/>
@@ -12629,43 +14024,18 @@
           <a:p>
             <a:pPr algn="ctr"/>
             <a:r>
-              <a:rPr lang="en-US" altLang="zh-TW" sz="2800" dirty="0">
-                <a:solidFill>
-                  <a:srgbClr val="00B050"/>
-                </a:solidFill>
-              </a:rPr>
-              <a:t>w</a:t>
-            </a:r>
-            <a:r>
-              <a:rPr lang="en-US" altLang="zh-TW" sz="1600" dirty="0">
-                <a:solidFill>
-                  <a:srgbClr val="00B050"/>
-                </a:solidFill>
-              </a:rPr>
-              <a:t>12</a:t>
-            </a:r>
-            <a:r>
-              <a:rPr lang="en-US" altLang="zh-TW" dirty="0">
-                <a:solidFill>
-                  <a:srgbClr val="00B050"/>
-                </a:solidFill>
-              </a:rPr>
-              <a:t> </a:t>
-            </a:r>
-            <a:endParaRPr lang="zh-TW" altLang="en-US" sz="2400" dirty="0">
-              <a:solidFill>
-                <a:srgbClr val="00B050"/>
-              </a:solidFill>
-            </a:endParaRPr>
-          </a:p>
-        </p:txBody>
-      </p:sp>
-      <p:sp>
-        <p:nvSpPr>
-          <p:cNvPr id="116" name="文字方塊 115">
-            <a:extLst>
-              <a:ext uri="{FF2B5EF4-FFF2-40B4-BE49-F238E27FC236}">
-                <a16:creationId xmlns:a16="http://schemas.microsoft.com/office/drawing/2014/main" id="{F76ADDC7-C73B-7E42-D929-131FAF5ACE1E}"/>
+              <a:rPr lang="en-US" altLang="zh-TW" dirty="0"/>
+              <a:t>Attn</a:t>
+            </a:r>
+          </a:p>
+        </p:txBody>
+      </p:sp>
+      <p:sp>
+        <p:nvSpPr>
+          <p:cNvPr id="222" name="文字方塊 221">
+            <a:extLst>
+              <a:ext uri="{FF2B5EF4-FFF2-40B4-BE49-F238E27FC236}">
+                <a16:creationId xmlns:a16="http://schemas.microsoft.com/office/drawing/2014/main" id="{152E853A-4E57-B747-9234-EF6497090C7D}"/>
               </a:ext>
             </a:extLst>
           </p:cNvPr>
@@ -12674,181 +14044,38 @@
         </p:nvSpPr>
         <p:spPr>
           <a:xfrm>
-            <a:off x="5525056" y="2683862"/>
-            <a:ext cx="748322" cy="523220"/>
-          </a:xfrm>
-          <a:prstGeom prst="rect">
-            <a:avLst/>
-          </a:prstGeom>
-          <a:noFill/>
-        </p:spPr>
-        <p:txBody>
-          <a:bodyPr wrap="square" rtlCol="0">
+            <a:off x="482616" y="3836586"/>
+            <a:ext cx="3070040" cy="369332"/>
+          </a:xfrm>
+          <a:prstGeom prst="rect">
+            <a:avLst/>
+          </a:prstGeom>
+          <a:noFill/>
+        </p:spPr>
+        <p:txBody>
+          <a:bodyPr wrap="square">
             <a:spAutoFit/>
           </a:bodyPr>
           <a:lstStyle/>
           <a:p>
-            <a:pPr algn="ctr"/>
-            <a:r>
-              <a:rPr lang="en-US" altLang="zh-TW" sz="2800" dirty="0">
-                <a:solidFill>
-                  <a:srgbClr val="00B050"/>
-                </a:solidFill>
-              </a:rPr>
-              <a:t>w</a:t>
-            </a:r>
-            <a:r>
-              <a:rPr lang="en-US" altLang="zh-TW" sz="1600" dirty="0">
-                <a:solidFill>
-                  <a:srgbClr val="00B050"/>
-                </a:solidFill>
-              </a:rPr>
-              <a:t>13</a:t>
-            </a:r>
-            <a:r>
-              <a:rPr lang="en-US" altLang="zh-TW" dirty="0">
-                <a:solidFill>
-                  <a:srgbClr val="00B050"/>
-                </a:solidFill>
-              </a:rPr>
-              <a:t> </a:t>
-            </a:r>
-            <a:endParaRPr lang="zh-TW" altLang="en-US" sz="2400" dirty="0">
-              <a:solidFill>
-                <a:srgbClr val="00B050"/>
-              </a:solidFill>
-            </a:endParaRPr>
-          </a:p>
-        </p:txBody>
-      </p:sp>
-      <p:sp>
-        <p:nvSpPr>
-          <p:cNvPr id="120" name="文字方塊 119">
-            <a:extLst>
-              <a:ext uri="{FF2B5EF4-FFF2-40B4-BE49-F238E27FC236}">
-                <a16:creationId xmlns:a16="http://schemas.microsoft.com/office/drawing/2014/main" id="{B2F18C39-030E-44A3-B5B2-4002FF99B980}"/>
-              </a:ext>
-            </a:extLst>
-          </p:cNvPr>
-          <p:cNvSpPr txBox="1"/>
-          <p:nvPr/>
-        </p:nvSpPr>
-        <p:spPr>
-          <a:xfrm>
-            <a:off x="6157340" y="2684934"/>
-            <a:ext cx="748322" cy="523220"/>
-          </a:xfrm>
-          <a:prstGeom prst="rect">
-            <a:avLst/>
-          </a:prstGeom>
-          <a:noFill/>
-        </p:spPr>
-        <p:txBody>
-          <a:bodyPr wrap="square" rtlCol="0">
-            <a:spAutoFit/>
-          </a:bodyPr>
-          <a:lstStyle/>
-          <a:p>
-            <a:pPr algn="ctr"/>
-            <a:r>
-              <a:rPr lang="en-US" altLang="zh-TW" sz="2800" dirty="0">
-                <a:solidFill>
-                  <a:srgbClr val="00B050"/>
-                </a:solidFill>
-              </a:rPr>
-              <a:t>w</a:t>
-            </a:r>
-            <a:r>
-              <a:rPr lang="en-US" altLang="zh-TW" sz="1600" dirty="0">
-                <a:solidFill>
-                  <a:srgbClr val="00B050"/>
-                </a:solidFill>
-              </a:rPr>
-              <a:t>14</a:t>
-            </a:r>
-            <a:r>
-              <a:rPr lang="en-US" altLang="zh-TW" dirty="0">
-                <a:solidFill>
-                  <a:srgbClr val="00B050"/>
-                </a:solidFill>
-              </a:rPr>
-              <a:t> </a:t>
-            </a:r>
-            <a:endParaRPr lang="zh-TW" altLang="en-US" sz="2400" dirty="0">
-              <a:solidFill>
-                <a:srgbClr val="00B050"/>
-              </a:solidFill>
-            </a:endParaRPr>
-          </a:p>
-        </p:txBody>
-      </p:sp>
-      <p:sp>
-        <p:nvSpPr>
-          <p:cNvPr id="124" name="文字方塊 123">
-            <a:extLst>
-              <a:ext uri="{FF2B5EF4-FFF2-40B4-BE49-F238E27FC236}">
-                <a16:creationId xmlns:a16="http://schemas.microsoft.com/office/drawing/2014/main" id="{EAF00DC3-900E-8556-1F50-35EDDF4F2FD9}"/>
-              </a:ext>
-            </a:extLst>
-          </p:cNvPr>
-          <p:cNvSpPr txBox="1"/>
-          <p:nvPr/>
-        </p:nvSpPr>
-        <p:spPr>
-          <a:xfrm>
-            <a:off x="6753914" y="2677869"/>
-            <a:ext cx="748322" cy="523220"/>
-          </a:xfrm>
-          <a:prstGeom prst="rect">
-            <a:avLst/>
-          </a:prstGeom>
-          <a:noFill/>
-        </p:spPr>
-        <p:txBody>
-          <a:bodyPr wrap="square" rtlCol="0">
-            <a:spAutoFit/>
-          </a:bodyPr>
-          <a:lstStyle/>
-          <a:p>
-            <a:pPr algn="ctr"/>
-            <a:r>
-              <a:rPr lang="en-US" altLang="zh-TW" sz="2800" dirty="0">
-                <a:solidFill>
-                  <a:srgbClr val="00B050"/>
-                </a:solidFill>
-              </a:rPr>
-              <a:t>w</a:t>
-            </a:r>
-            <a:r>
-              <a:rPr lang="en-US" altLang="zh-TW" sz="1600" dirty="0">
-                <a:solidFill>
-                  <a:srgbClr val="00B050"/>
-                </a:solidFill>
-              </a:rPr>
-              <a:t>15</a:t>
-            </a:r>
-            <a:r>
-              <a:rPr lang="en-US" altLang="zh-TW" dirty="0">
-                <a:solidFill>
-                  <a:srgbClr val="00B050"/>
-                </a:solidFill>
-              </a:rPr>
-              <a:t> </a:t>
-            </a:r>
-            <a:endParaRPr lang="zh-TW" altLang="en-US" sz="2400" dirty="0">
-              <a:solidFill>
-                <a:srgbClr val="00B050"/>
-              </a:solidFill>
-            </a:endParaRPr>
+            <a:r>
+              <a:rPr lang="zh-TW" altLang="en-US" dirty="0"/>
+              <a:t>permutation-equivariant </a:t>
+            </a:r>
+            <a:r>
+              <a:rPr lang="en-US" altLang="zh-TW" dirty="0"/>
+              <a:t>:</a:t>
+            </a:r>
+            <a:endParaRPr lang="zh-TW" altLang="en-US" dirty="0"/>
           </a:p>
         </p:txBody>
       </p:sp>
       <p:pic>
         <p:nvPicPr>
-          <p:cNvPr id="128" name="圖片 127">
-            <a:extLst>
-              <a:ext uri="{FF2B5EF4-FFF2-40B4-BE49-F238E27FC236}">
-                <a16:creationId xmlns:a16="http://schemas.microsoft.com/office/drawing/2014/main" id="{187E3B1D-A7A5-55AC-41EE-7216AB2277BA}"/>
+          <p:cNvPr id="224" name="圖片 223">
+            <a:extLst>
+              <a:ext uri="{FF2B5EF4-FFF2-40B4-BE49-F238E27FC236}">
+                <a16:creationId xmlns:a16="http://schemas.microsoft.com/office/drawing/2014/main" id="{04C17AFE-4D97-EAEC-3DDC-6A862E3F5429}"/>
               </a:ext>
             </a:extLst>
           </p:cNvPr>
@@ -12858,7 +14085,7 @@
           <p:nvPr/>
         </p:nvPicPr>
         <p:blipFill>
-          <a:blip r:embed="rId2">
+          <a:blip r:embed="rId5">
             <a:extLst>
               <a:ext uri="{28A0092B-C50C-407E-A947-70E740481C1C}">
                 <a14:useLocalDpi xmlns:a14="http://schemas.microsoft.com/office/drawing/2010/main" val="0"/>
@@ -12871,92 +14098,20 @@
         </p:blipFill>
         <p:spPr>
           <a:xfrm>
-            <a:off x="11081987" y="3269465"/>
-            <a:ext cx="937508" cy="521912"/>
+            <a:off x="10577476" y="5609493"/>
+            <a:ext cx="1445951" cy="475488"/>
           </a:xfrm>
           <a:prstGeom prst="rect">
             <a:avLst/>
           </a:prstGeom>
         </p:spPr>
       </p:pic>
-      <p:pic>
-        <p:nvPicPr>
-          <p:cNvPr id="130" name="圖片 129">
-            <a:extLst>
-              <a:ext uri="{FF2B5EF4-FFF2-40B4-BE49-F238E27FC236}">
-                <a16:creationId xmlns:a16="http://schemas.microsoft.com/office/drawing/2014/main" id="{087DBC79-AB7F-05EE-E450-C645DF8CB6AE}"/>
-              </a:ext>
-            </a:extLst>
-          </p:cNvPr>
-          <p:cNvPicPr>
-            <a:picLocks noChangeAspect="1"/>
-          </p:cNvPicPr>
-          <p:nvPr/>
-        </p:nvPicPr>
-        <p:blipFill>
-          <a:blip r:embed="rId3">
-            <a:extLst>
-              <a:ext uri="{28A0092B-C50C-407E-A947-70E740481C1C}">
-                <a14:useLocalDpi xmlns:a14="http://schemas.microsoft.com/office/drawing/2010/main" val="0"/>
-              </a:ext>
-            </a:extLst>
-          </a:blip>
-          <a:stretch>
-            <a:fillRect/>
-          </a:stretch>
-        </p:blipFill>
-        <p:spPr>
-          <a:xfrm>
-            <a:off x="6657979" y="3251177"/>
-            <a:ext cx="1057275" cy="647700"/>
-          </a:xfrm>
-          <a:prstGeom prst="rect">
-            <a:avLst/>
-          </a:prstGeom>
-        </p:spPr>
-      </p:pic>
-      <p:pic>
-        <p:nvPicPr>
-          <p:cNvPr id="134" name="圖片 133">
-            <a:extLst>
-              <a:ext uri="{FF2B5EF4-FFF2-40B4-BE49-F238E27FC236}">
-                <a16:creationId xmlns:a16="http://schemas.microsoft.com/office/drawing/2014/main" id="{8DF146D4-3C78-50AF-7503-2BC008373BF3}"/>
-              </a:ext>
-            </a:extLst>
-          </p:cNvPr>
-          <p:cNvPicPr>
-            <a:picLocks noChangeAspect="1"/>
-          </p:cNvPicPr>
-          <p:nvPr/>
-        </p:nvPicPr>
-        <p:blipFill>
-          <a:blip r:embed="rId4">
-            <a:extLst>
-              <a:ext uri="{28A0092B-C50C-407E-A947-70E740481C1C}">
-                <a14:useLocalDpi xmlns:a14="http://schemas.microsoft.com/office/drawing/2010/main" val="0"/>
-              </a:ext>
-            </a:extLst>
-          </a:blip>
-          <a:stretch>
-            <a:fillRect/>
-          </a:stretch>
-        </p:blipFill>
-        <p:spPr>
-          <a:xfrm>
-            <a:off x="477632" y="4234811"/>
-            <a:ext cx="2579515" cy="364726"/>
-          </a:xfrm>
-          <a:prstGeom prst="rect">
-            <a:avLst/>
-          </a:prstGeom>
-        </p:spPr>
-      </p:pic>
-      <p:sp>
-        <p:nvSpPr>
-          <p:cNvPr id="154" name="文字方塊 153">
-            <a:extLst>
-              <a:ext uri="{FF2B5EF4-FFF2-40B4-BE49-F238E27FC236}">
-                <a16:creationId xmlns:a16="http://schemas.microsoft.com/office/drawing/2014/main" id="{ECC3F45A-93F0-00ED-ABE3-BCAD54AC0F7F}"/>
+      <p:sp>
+        <p:nvSpPr>
+          <p:cNvPr id="228" name="文字方塊 227">
+            <a:extLst>
+              <a:ext uri="{FF2B5EF4-FFF2-40B4-BE49-F238E27FC236}">
+                <a16:creationId xmlns:a16="http://schemas.microsoft.com/office/drawing/2014/main" id="{D339091C-2573-48C9-820C-CCE6691B4643}"/>
               </a:ext>
             </a:extLst>
           </p:cNvPr>
@@ -12965,8 +14120,8 @@
         </p:nvSpPr>
         <p:spPr>
           <a:xfrm>
-            <a:off x="5752236" y="3690506"/>
-            <a:ext cx="650512" cy="461665"/>
+            <a:off x="482616" y="4838196"/>
+            <a:ext cx="2377072" cy="338554"/>
           </a:xfrm>
           <a:prstGeom prst="rect">
             <a:avLst/>
@@ -12979,25 +14134,86 @@
           </a:bodyPr>
           <a:lstStyle/>
           <a:p>
-            <a:pPr algn="ctr"/>
-            <a:r>
-              <a:rPr lang="en-US" altLang="zh-TW" sz="2400" dirty="0"/>
-              <a:t>A</a:t>
-            </a:r>
-            <a:r>
-              <a:rPr lang="en-US" altLang="zh-TW" sz="1400" dirty="0"/>
-              <a:t>1</a:t>
-            </a:r>
-            <a:endParaRPr lang="zh-TW" altLang="en-US" sz="3200" dirty="0"/>
-          </a:p>
-        </p:txBody>
-      </p:sp>
-      <p:sp>
-        <p:nvSpPr>
-          <p:cNvPr id="156" name="左右大括弧 155">
-            <a:extLst>
-              <a:ext uri="{FF2B5EF4-FFF2-40B4-BE49-F238E27FC236}">
-                <a16:creationId xmlns:a16="http://schemas.microsoft.com/office/drawing/2014/main" id="{B2C5CAC1-1207-72D0-D422-9DB83847DC51}"/>
+            <a:r>
+              <a:rPr lang="en-US" altLang="zh-TW" sz="1600" i="1" dirty="0"/>
+              <a:t>P</a:t>
+            </a:r>
+            <a:r>
+              <a:rPr lang="en-US" altLang="zh-TW" sz="1600" dirty="0"/>
+              <a:t> : permutation matrix</a:t>
+            </a:r>
+            <a:endParaRPr lang="zh-TW" altLang="zh-TW" sz="1600" dirty="0"/>
+          </a:p>
+        </p:txBody>
+      </p:sp>
+      <p:sp>
+        <p:nvSpPr>
+          <p:cNvPr id="230" name="文字方塊 229">
+            <a:extLst>
+              <a:ext uri="{FF2B5EF4-FFF2-40B4-BE49-F238E27FC236}">
+                <a16:creationId xmlns:a16="http://schemas.microsoft.com/office/drawing/2014/main" id="{B2D69C5B-F61A-D791-8756-DC883D69F046}"/>
+              </a:ext>
+            </a:extLst>
+          </p:cNvPr>
+          <p:cNvSpPr txBox="1"/>
+          <p:nvPr/>
+        </p:nvSpPr>
+        <p:spPr>
+          <a:xfrm>
+            <a:off x="380874" y="6133902"/>
+            <a:ext cx="4452357" cy="276999"/>
+          </a:xfrm>
+          <a:prstGeom prst="rect">
+            <a:avLst/>
+          </a:prstGeom>
+          <a:noFill/>
+        </p:spPr>
+        <p:txBody>
+          <a:bodyPr wrap="square">
+            <a:spAutoFit/>
+          </a:bodyPr>
+          <a:lstStyle/>
+          <a:p>
+            <a:r>
+              <a:rPr lang="zh-TW" altLang="zh-TW" sz="1200" b="0" i="0" dirty="0">
+                <a:solidFill>
+                  <a:schemeClr val="tx1"/>
+                </a:solidFill>
+                <a:effectLst/>
+                <a:latin typeface="+mn-lt"/>
+              </a:rPr>
+              <a:t>Bui, H., &amp; Le, B. (2025). </a:t>
+            </a:r>
+            <a:r>
+              <a:rPr lang="zh-TW" altLang="zh-TW" sz="1200" b="0" i="1" dirty="0">
+                <a:solidFill>
+                  <a:schemeClr val="tx1"/>
+                </a:solidFill>
+                <a:effectLst/>
+                <a:latin typeface="+mn-lt"/>
+              </a:rPr>
+              <a:t>Expert Systems with Applications</a:t>
+            </a:r>
+            <a:r>
+              <a:rPr lang="zh-TW" altLang="zh-TW" sz="1200" b="0" i="0" dirty="0">
+                <a:solidFill>
+                  <a:schemeClr val="tx1"/>
+                </a:solidFill>
+                <a:effectLst/>
+                <a:latin typeface="+mn-lt"/>
+              </a:rPr>
+              <a:t>, 130220.</a:t>
+            </a:r>
+            <a:endParaRPr lang="zh-TW" altLang="en-US" sz="1200" dirty="0"/>
+          </a:p>
+        </p:txBody>
+      </p:sp>
+      <p:sp>
+        <p:nvSpPr>
+          <p:cNvPr id="5" name="乘號 4">
+            <a:extLst>
+              <a:ext uri="{FF2B5EF4-FFF2-40B4-BE49-F238E27FC236}">
+                <a16:creationId xmlns:a16="http://schemas.microsoft.com/office/drawing/2014/main" id="{F737CCC7-FC64-9523-48AF-BB39EE92A68D}"/>
               </a:ext>
             </a:extLst>
           </p:cNvPr>
@@ -13006,475 +14222,12 @@
         </p:nvSpPr>
         <p:spPr>
           <a:xfrm>
-            <a:off x="5576176" y="3939196"/>
-            <a:ext cx="977951" cy="2008566"/>
-          </a:xfrm>
-          <a:prstGeom prst="bracePair">
-            <a:avLst/>
-          </a:prstGeom>
-        </p:spPr>
-        <p:style>
-          <a:lnRef idx="2">
-            <a:schemeClr val="dk1"/>
-          </a:lnRef>
-          <a:fillRef idx="0">
-            <a:schemeClr val="dk1"/>
-          </a:fillRef>
-          <a:effectRef idx="1">
-            <a:schemeClr val="dk1"/>
-          </a:effectRef>
-          <a:fontRef idx="minor">
-            <a:schemeClr val="tx1"/>
-          </a:fontRef>
-        </p:style>
-        <p:txBody>
-          <a:bodyPr rtlCol="0" anchor="ctr"/>
-          <a:lstStyle/>
-          <a:p>
-            <a:pPr algn="ctr"/>
-            <a:endParaRPr lang="zh-TW" altLang="en-US"/>
-          </a:p>
-        </p:txBody>
-      </p:sp>
-      <p:sp>
-        <p:nvSpPr>
-          <p:cNvPr id="158" name="文字方塊 157">
-            <a:extLst>
-              <a:ext uri="{FF2B5EF4-FFF2-40B4-BE49-F238E27FC236}">
-                <a16:creationId xmlns:a16="http://schemas.microsoft.com/office/drawing/2014/main" id="{D3F28A56-90F5-A348-5049-E998492AD275}"/>
-              </a:ext>
-            </a:extLst>
-          </p:cNvPr>
-          <p:cNvSpPr txBox="1"/>
-          <p:nvPr/>
-        </p:nvSpPr>
-        <p:spPr>
-          <a:xfrm>
-            <a:off x="5739895" y="4152171"/>
-            <a:ext cx="650512" cy="461665"/>
-          </a:xfrm>
-          <a:prstGeom prst="rect">
-            <a:avLst/>
-          </a:prstGeom>
-          <a:noFill/>
-        </p:spPr>
-        <p:txBody>
-          <a:bodyPr wrap="square" rtlCol="0">
-            <a:spAutoFit/>
-          </a:bodyPr>
-          <a:lstStyle/>
-          <a:p>
-            <a:pPr algn="ctr"/>
-            <a:r>
-              <a:rPr lang="en-US" altLang="zh-TW" sz="2400" dirty="0"/>
-              <a:t>A</a:t>
-            </a:r>
-            <a:r>
-              <a:rPr lang="en-US" altLang="zh-TW" sz="1400" dirty="0"/>
-              <a:t>2</a:t>
-            </a:r>
-            <a:endParaRPr lang="zh-TW" altLang="en-US" sz="3200" dirty="0"/>
-          </a:p>
-        </p:txBody>
-      </p:sp>
-      <p:sp>
-        <p:nvSpPr>
-          <p:cNvPr id="160" name="文字方塊 159">
-            <a:extLst>
-              <a:ext uri="{FF2B5EF4-FFF2-40B4-BE49-F238E27FC236}">
-                <a16:creationId xmlns:a16="http://schemas.microsoft.com/office/drawing/2014/main" id="{12C890E4-D0D1-96E4-5208-005BD340E31F}"/>
-              </a:ext>
-            </a:extLst>
-          </p:cNvPr>
-          <p:cNvSpPr txBox="1"/>
-          <p:nvPr/>
-        </p:nvSpPr>
-        <p:spPr>
-          <a:xfrm>
-            <a:off x="5739895" y="4646533"/>
-            <a:ext cx="650512" cy="461665"/>
-          </a:xfrm>
-          <a:prstGeom prst="rect">
-            <a:avLst/>
-          </a:prstGeom>
-          <a:noFill/>
-        </p:spPr>
-        <p:txBody>
-          <a:bodyPr wrap="square" rtlCol="0">
-            <a:spAutoFit/>
-          </a:bodyPr>
-          <a:lstStyle/>
-          <a:p>
-            <a:pPr algn="ctr"/>
-            <a:r>
-              <a:rPr lang="en-US" altLang="zh-TW" sz="2400" dirty="0"/>
-              <a:t>A</a:t>
-            </a:r>
-            <a:r>
-              <a:rPr lang="en-US" altLang="zh-TW" sz="1400" dirty="0"/>
-              <a:t>3</a:t>
-            </a:r>
-            <a:endParaRPr lang="zh-TW" altLang="en-US" sz="3200" dirty="0"/>
-          </a:p>
-        </p:txBody>
-      </p:sp>
-      <p:sp>
-        <p:nvSpPr>
-          <p:cNvPr id="162" name="文字方塊 161">
-            <a:extLst>
-              <a:ext uri="{FF2B5EF4-FFF2-40B4-BE49-F238E27FC236}">
-                <a16:creationId xmlns:a16="http://schemas.microsoft.com/office/drawing/2014/main" id="{EA2B21AA-7919-C545-756E-A10B7D9F61CF}"/>
-              </a:ext>
-            </a:extLst>
-          </p:cNvPr>
-          <p:cNvSpPr txBox="1"/>
-          <p:nvPr/>
-        </p:nvSpPr>
-        <p:spPr>
-          <a:xfrm>
-            <a:off x="5739895" y="5137279"/>
-            <a:ext cx="650512" cy="461665"/>
-          </a:xfrm>
-          <a:prstGeom prst="rect">
-            <a:avLst/>
-          </a:prstGeom>
-          <a:noFill/>
-        </p:spPr>
-        <p:txBody>
-          <a:bodyPr wrap="square" rtlCol="0">
-            <a:spAutoFit/>
-          </a:bodyPr>
-          <a:lstStyle/>
-          <a:p>
-            <a:pPr algn="ctr"/>
-            <a:r>
-              <a:rPr lang="en-US" altLang="zh-TW" sz="2400" dirty="0"/>
-              <a:t>A</a:t>
-            </a:r>
-            <a:r>
-              <a:rPr lang="en-US" altLang="zh-TW" sz="1400" dirty="0"/>
-              <a:t>4</a:t>
-            </a:r>
-            <a:endParaRPr lang="zh-TW" altLang="en-US" sz="3200" dirty="0"/>
-          </a:p>
-        </p:txBody>
-      </p:sp>
-      <p:sp>
-        <p:nvSpPr>
-          <p:cNvPr id="164" name="文字方塊 163">
-            <a:extLst>
-              <a:ext uri="{FF2B5EF4-FFF2-40B4-BE49-F238E27FC236}">
-                <a16:creationId xmlns:a16="http://schemas.microsoft.com/office/drawing/2014/main" id="{C169B7C5-9248-70BA-B541-E4B8B005221C}"/>
-              </a:ext>
-            </a:extLst>
-          </p:cNvPr>
-          <p:cNvSpPr txBox="1"/>
-          <p:nvPr/>
-        </p:nvSpPr>
-        <p:spPr>
-          <a:xfrm>
-            <a:off x="5739895" y="5628025"/>
-            <a:ext cx="650512" cy="461665"/>
-          </a:xfrm>
-          <a:prstGeom prst="rect">
-            <a:avLst/>
-          </a:prstGeom>
-          <a:noFill/>
-        </p:spPr>
-        <p:txBody>
-          <a:bodyPr wrap="square" rtlCol="0">
-            <a:spAutoFit/>
-          </a:bodyPr>
-          <a:lstStyle/>
-          <a:p>
-            <a:pPr algn="ctr"/>
-            <a:r>
-              <a:rPr lang="en-US" altLang="zh-TW" sz="2400" dirty="0"/>
-              <a:t>A</a:t>
-            </a:r>
-            <a:r>
-              <a:rPr lang="en-US" altLang="zh-TW" sz="1400" dirty="0"/>
-              <a:t>5</a:t>
-            </a:r>
-            <a:endParaRPr lang="zh-TW" altLang="en-US" sz="3200" dirty="0"/>
-          </a:p>
-        </p:txBody>
-      </p:sp>
-      <p:sp>
-        <p:nvSpPr>
-          <p:cNvPr id="178" name="文字方塊 177">
-            <a:extLst>
-              <a:ext uri="{FF2B5EF4-FFF2-40B4-BE49-F238E27FC236}">
-                <a16:creationId xmlns:a16="http://schemas.microsoft.com/office/drawing/2014/main" id="{E36D0E57-5F09-8E34-CF94-39A575A049BE}"/>
-              </a:ext>
-            </a:extLst>
-          </p:cNvPr>
-          <p:cNvSpPr txBox="1"/>
-          <p:nvPr/>
-        </p:nvSpPr>
-        <p:spPr>
-          <a:xfrm>
-            <a:off x="3953665" y="3690506"/>
-            <a:ext cx="650512" cy="461665"/>
-          </a:xfrm>
-          <a:prstGeom prst="rect">
-            <a:avLst/>
-          </a:prstGeom>
-          <a:noFill/>
-        </p:spPr>
-        <p:txBody>
-          <a:bodyPr wrap="square" rtlCol="0">
-            <a:spAutoFit/>
-          </a:bodyPr>
-          <a:lstStyle/>
-          <a:p>
-            <a:pPr algn="ctr"/>
-            <a:r>
-              <a:rPr lang="en-US" altLang="zh-TW" sz="2400" dirty="0"/>
-              <a:t>X</a:t>
-            </a:r>
-            <a:r>
-              <a:rPr lang="en-US" altLang="zh-TW" sz="1400" dirty="0"/>
-              <a:t>1</a:t>
-            </a:r>
-            <a:endParaRPr lang="zh-TW" altLang="en-US" sz="3200" dirty="0"/>
-          </a:p>
-        </p:txBody>
-      </p:sp>
-      <p:sp>
-        <p:nvSpPr>
-          <p:cNvPr id="180" name="左右大括弧 179">
-            <a:extLst>
-              <a:ext uri="{FF2B5EF4-FFF2-40B4-BE49-F238E27FC236}">
-                <a16:creationId xmlns:a16="http://schemas.microsoft.com/office/drawing/2014/main" id="{26F0CA05-04A1-85AE-06C5-A38535877326}"/>
-              </a:ext>
-            </a:extLst>
-          </p:cNvPr>
-          <p:cNvSpPr/>
-          <p:nvPr/>
-        </p:nvSpPr>
-        <p:spPr>
-          <a:xfrm>
-            <a:off x="3777605" y="3939196"/>
-            <a:ext cx="977951" cy="2008566"/>
-          </a:xfrm>
-          <a:prstGeom prst="bracePair">
-            <a:avLst/>
-          </a:prstGeom>
-        </p:spPr>
-        <p:style>
-          <a:lnRef idx="2">
-            <a:schemeClr val="dk1"/>
-          </a:lnRef>
-          <a:fillRef idx="0">
-            <a:schemeClr val="dk1"/>
-          </a:fillRef>
-          <a:effectRef idx="1">
-            <a:schemeClr val="dk1"/>
-          </a:effectRef>
-          <a:fontRef idx="minor">
-            <a:schemeClr val="tx1"/>
-          </a:fontRef>
-        </p:style>
-        <p:txBody>
-          <a:bodyPr rtlCol="0" anchor="ctr"/>
-          <a:lstStyle/>
-          <a:p>
-            <a:pPr algn="ctr"/>
-            <a:endParaRPr lang="zh-TW" altLang="en-US"/>
-          </a:p>
-        </p:txBody>
-      </p:sp>
-      <p:sp>
-        <p:nvSpPr>
-          <p:cNvPr id="182" name="文字方塊 181">
-            <a:extLst>
-              <a:ext uri="{FF2B5EF4-FFF2-40B4-BE49-F238E27FC236}">
-                <a16:creationId xmlns:a16="http://schemas.microsoft.com/office/drawing/2014/main" id="{B63A29C4-BBD9-0F41-BFAC-ED8CAE2B840E}"/>
-              </a:ext>
-            </a:extLst>
-          </p:cNvPr>
-          <p:cNvSpPr txBox="1"/>
-          <p:nvPr/>
-        </p:nvSpPr>
-        <p:spPr>
-          <a:xfrm>
-            <a:off x="3941324" y="4152171"/>
-            <a:ext cx="650512" cy="461665"/>
-          </a:xfrm>
-          <a:prstGeom prst="rect">
-            <a:avLst/>
-          </a:prstGeom>
-          <a:noFill/>
-        </p:spPr>
-        <p:txBody>
-          <a:bodyPr wrap="square" rtlCol="0">
-            <a:spAutoFit/>
-          </a:bodyPr>
-          <a:lstStyle/>
-          <a:p>
-            <a:pPr algn="ctr"/>
-            <a:r>
-              <a:rPr lang="en-US" altLang="zh-TW" sz="2400" dirty="0"/>
-              <a:t>X</a:t>
-            </a:r>
-            <a:r>
-              <a:rPr lang="en-US" altLang="zh-TW" sz="1400" dirty="0"/>
-              <a:t>2</a:t>
-            </a:r>
-            <a:endParaRPr lang="zh-TW" altLang="en-US" sz="3200" dirty="0"/>
-          </a:p>
-        </p:txBody>
-      </p:sp>
-      <p:sp>
-        <p:nvSpPr>
-          <p:cNvPr id="184" name="文字方塊 183">
-            <a:extLst>
-              <a:ext uri="{FF2B5EF4-FFF2-40B4-BE49-F238E27FC236}">
-                <a16:creationId xmlns:a16="http://schemas.microsoft.com/office/drawing/2014/main" id="{2AF27BF6-A3DA-834F-8CF9-7DE3DFF55464}"/>
-              </a:ext>
-            </a:extLst>
-          </p:cNvPr>
-          <p:cNvSpPr txBox="1"/>
-          <p:nvPr/>
-        </p:nvSpPr>
-        <p:spPr>
-          <a:xfrm>
-            <a:off x="3941324" y="4646533"/>
-            <a:ext cx="650512" cy="461665"/>
-          </a:xfrm>
-          <a:prstGeom prst="rect">
-            <a:avLst/>
-          </a:prstGeom>
-          <a:noFill/>
-        </p:spPr>
-        <p:txBody>
-          <a:bodyPr wrap="square" rtlCol="0">
-            <a:spAutoFit/>
-          </a:bodyPr>
-          <a:lstStyle/>
-          <a:p>
-            <a:pPr algn="ctr"/>
-            <a:r>
-              <a:rPr lang="en-US" altLang="zh-TW" sz="2400" dirty="0"/>
-              <a:t>X</a:t>
-            </a:r>
-            <a:r>
-              <a:rPr lang="en-US" altLang="zh-TW" sz="1400" dirty="0"/>
-              <a:t>3</a:t>
-            </a:r>
-            <a:endParaRPr lang="zh-TW" altLang="en-US" sz="3200" dirty="0"/>
-          </a:p>
-        </p:txBody>
-      </p:sp>
-      <p:sp>
-        <p:nvSpPr>
-          <p:cNvPr id="186" name="文字方塊 185">
-            <a:extLst>
-              <a:ext uri="{FF2B5EF4-FFF2-40B4-BE49-F238E27FC236}">
-                <a16:creationId xmlns:a16="http://schemas.microsoft.com/office/drawing/2014/main" id="{59162BB3-0706-917F-C594-3B582AB9135B}"/>
-              </a:ext>
-            </a:extLst>
-          </p:cNvPr>
-          <p:cNvSpPr txBox="1"/>
-          <p:nvPr/>
-        </p:nvSpPr>
-        <p:spPr>
-          <a:xfrm>
-            <a:off x="3941324" y="5137279"/>
-            <a:ext cx="650512" cy="461665"/>
-          </a:xfrm>
-          <a:prstGeom prst="rect">
-            <a:avLst/>
-          </a:prstGeom>
-          <a:noFill/>
-        </p:spPr>
-        <p:txBody>
-          <a:bodyPr wrap="square" rtlCol="0">
-            <a:spAutoFit/>
-          </a:bodyPr>
-          <a:lstStyle/>
-          <a:p>
-            <a:pPr algn="ctr"/>
-            <a:r>
-              <a:rPr lang="en-US" altLang="zh-TW" sz="2400" dirty="0"/>
-              <a:t>X</a:t>
-            </a:r>
-            <a:r>
-              <a:rPr lang="en-US" altLang="zh-TW" sz="1400" dirty="0"/>
-              <a:t>4</a:t>
-            </a:r>
-            <a:endParaRPr lang="zh-TW" altLang="en-US" sz="3200" dirty="0"/>
-          </a:p>
-        </p:txBody>
-      </p:sp>
-      <p:sp>
-        <p:nvSpPr>
-          <p:cNvPr id="188" name="文字方塊 187">
-            <a:extLst>
-              <a:ext uri="{FF2B5EF4-FFF2-40B4-BE49-F238E27FC236}">
-                <a16:creationId xmlns:a16="http://schemas.microsoft.com/office/drawing/2014/main" id="{CE13851E-3B9A-54D4-7AB5-9B0CDE526695}"/>
-              </a:ext>
-            </a:extLst>
-          </p:cNvPr>
-          <p:cNvSpPr txBox="1"/>
-          <p:nvPr/>
-        </p:nvSpPr>
-        <p:spPr>
-          <a:xfrm>
-            <a:off x="3941324" y="5628025"/>
-            <a:ext cx="650512" cy="461665"/>
-          </a:xfrm>
-          <a:prstGeom prst="rect">
-            <a:avLst/>
-          </a:prstGeom>
-          <a:noFill/>
-        </p:spPr>
-        <p:txBody>
-          <a:bodyPr wrap="square" rtlCol="0">
-            <a:spAutoFit/>
-          </a:bodyPr>
-          <a:lstStyle/>
-          <a:p>
-            <a:pPr algn="ctr"/>
-            <a:r>
-              <a:rPr lang="en-US" altLang="zh-TW" sz="2400" dirty="0"/>
-              <a:t>X</a:t>
-            </a:r>
-            <a:r>
-              <a:rPr lang="en-US" altLang="zh-TW" sz="1400" dirty="0"/>
-              <a:t>5</a:t>
-            </a:r>
-            <a:endParaRPr lang="zh-TW" altLang="en-US" sz="3200" dirty="0"/>
-          </a:p>
-        </p:txBody>
-      </p:sp>
-      <p:sp>
-        <p:nvSpPr>
-          <p:cNvPr id="190" name="箭號: 向右 189">
-            <a:extLst>
-              <a:ext uri="{FF2B5EF4-FFF2-40B4-BE49-F238E27FC236}">
-                <a16:creationId xmlns:a16="http://schemas.microsoft.com/office/drawing/2014/main" id="{FE68C5A5-E981-2BE4-6873-B2A37AE18707}"/>
-              </a:ext>
-            </a:extLst>
-          </p:cNvPr>
-          <p:cNvSpPr/>
-          <p:nvPr/>
-        </p:nvSpPr>
-        <p:spPr>
-          <a:xfrm>
-            <a:off x="4996832" y="4829039"/>
-            <a:ext cx="354395" cy="228880"/>
-          </a:xfrm>
-          <a:prstGeom prst="rightArrow">
-            <a:avLst/>
-          </a:prstGeom>
-          <a:solidFill>
-            <a:schemeClr val="tx1"/>
-          </a:solidFill>
-          <a:ln>
-            <a:noFill/>
-          </a:ln>
+            <a:off x="3507562" y="2786004"/>
+            <a:ext cx="262096" cy="328810"/>
+          </a:xfrm>
+          <a:prstGeom prst="mathMultiply">
+            <a:avLst/>
+          </a:prstGeom>
         </p:spPr>
         <p:style>
           <a:lnRef idx="2">
@@ -13503,87 +14256,10 @@
       </p:sp>
       <p:sp>
         <p:nvSpPr>
-          <p:cNvPr id="192" name="文字方塊 191">
-            <a:extLst>
-              <a:ext uri="{FF2B5EF4-FFF2-40B4-BE49-F238E27FC236}">
-                <a16:creationId xmlns:a16="http://schemas.microsoft.com/office/drawing/2014/main" id="{58A5E885-0B4D-F119-3673-A7A67382FC7A}"/>
-              </a:ext>
-            </a:extLst>
-          </p:cNvPr>
-          <p:cNvSpPr txBox="1"/>
-          <p:nvPr/>
-        </p:nvSpPr>
-        <p:spPr>
-          <a:xfrm>
-            <a:off x="4781756" y="4416599"/>
-            <a:ext cx="768220" cy="369332"/>
-          </a:xfrm>
-          <a:prstGeom prst="rect">
-            <a:avLst/>
-          </a:prstGeom>
-          <a:noFill/>
-        </p:spPr>
-        <p:txBody>
-          <a:bodyPr wrap="square" rtlCol="0">
-            <a:spAutoFit/>
-          </a:bodyPr>
-          <a:lstStyle/>
-          <a:p>
-            <a:pPr algn="ctr"/>
-            <a:r>
-              <a:rPr lang="en-US" altLang="zh-TW" dirty="0"/>
-              <a:t>Attn</a:t>
-            </a:r>
-          </a:p>
-        </p:txBody>
-      </p:sp>
-      <p:sp>
-        <p:nvSpPr>
-          <p:cNvPr id="194" name="文字方塊 193">
-            <a:extLst>
-              <a:ext uri="{FF2B5EF4-FFF2-40B4-BE49-F238E27FC236}">
-                <a16:creationId xmlns:a16="http://schemas.microsoft.com/office/drawing/2014/main" id="{D3D61C74-136A-83E8-A08B-D0B7D7B52DC7}"/>
-              </a:ext>
-            </a:extLst>
-          </p:cNvPr>
-          <p:cNvSpPr txBox="1"/>
-          <p:nvPr/>
-        </p:nvSpPr>
-        <p:spPr>
-          <a:xfrm>
-            <a:off x="9677942" y="3690506"/>
-            <a:ext cx="650512" cy="461665"/>
-          </a:xfrm>
-          <a:prstGeom prst="rect">
-            <a:avLst/>
-          </a:prstGeom>
-          <a:noFill/>
-        </p:spPr>
-        <p:txBody>
-          <a:bodyPr wrap="square" rtlCol="0">
-            <a:spAutoFit/>
-          </a:bodyPr>
-          <a:lstStyle/>
-          <a:p>
-            <a:pPr algn="ctr"/>
-            <a:r>
-              <a:rPr lang="en-US" altLang="zh-TW" sz="2400" dirty="0"/>
-              <a:t>A</a:t>
-            </a:r>
-            <a:r>
-              <a:rPr lang="en-US" altLang="zh-TW" sz="1400" dirty="0"/>
-              <a:t>2</a:t>
-            </a:r>
-            <a:endParaRPr lang="zh-TW" altLang="en-US" sz="3200" dirty="0"/>
-          </a:p>
-        </p:txBody>
-      </p:sp>
-      <p:sp>
-        <p:nvSpPr>
-          <p:cNvPr id="196" name="左右大括弧 195">
-            <a:extLst>
-              <a:ext uri="{FF2B5EF4-FFF2-40B4-BE49-F238E27FC236}">
-                <a16:creationId xmlns:a16="http://schemas.microsoft.com/office/drawing/2014/main" id="{F0569F82-2BD5-C557-DE81-03E11789261B}"/>
+          <p:cNvPr id="9" name="等於 8">
+            <a:extLst>
+              <a:ext uri="{FF2B5EF4-FFF2-40B4-BE49-F238E27FC236}">
+                <a16:creationId xmlns:a16="http://schemas.microsoft.com/office/drawing/2014/main" id="{016F1D57-1CC7-2424-B540-5F5259508018}"/>
               </a:ext>
             </a:extLst>
           </p:cNvPr>
@@ -13592,475 +14268,12 @@
         </p:nvSpPr>
         <p:spPr>
           <a:xfrm>
-            <a:off x="9501882" y="3939196"/>
-            <a:ext cx="977951" cy="2008566"/>
-          </a:xfrm>
-          <a:prstGeom prst="bracePair">
-            <a:avLst/>
-          </a:prstGeom>
-        </p:spPr>
-        <p:style>
-          <a:lnRef idx="2">
-            <a:schemeClr val="dk1"/>
-          </a:lnRef>
-          <a:fillRef idx="0">
-            <a:schemeClr val="dk1"/>
-          </a:fillRef>
-          <a:effectRef idx="1">
-            <a:schemeClr val="dk1"/>
-          </a:effectRef>
-          <a:fontRef idx="minor">
-            <a:schemeClr val="tx1"/>
-          </a:fontRef>
-        </p:style>
-        <p:txBody>
-          <a:bodyPr rtlCol="0" anchor="ctr"/>
-          <a:lstStyle/>
-          <a:p>
-            <a:pPr algn="ctr"/>
-            <a:endParaRPr lang="zh-TW" altLang="en-US"/>
-          </a:p>
-        </p:txBody>
-      </p:sp>
-      <p:sp>
-        <p:nvSpPr>
-          <p:cNvPr id="198" name="文字方塊 197">
-            <a:extLst>
-              <a:ext uri="{FF2B5EF4-FFF2-40B4-BE49-F238E27FC236}">
-                <a16:creationId xmlns:a16="http://schemas.microsoft.com/office/drawing/2014/main" id="{46F573B4-ED37-1271-3BF5-7617A23C31E3}"/>
-              </a:ext>
-            </a:extLst>
-          </p:cNvPr>
-          <p:cNvSpPr txBox="1"/>
-          <p:nvPr/>
-        </p:nvSpPr>
-        <p:spPr>
-          <a:xfrm>
-            <a:off x="9665601" y="4152171"/>
-            <a:ext cx="650512" cy="461665"/>
-          </a:xfrm>
-          <a:prstGeom prst="rect">
-            <a:avLst/>
-          </a:prstGeom>
-          <a:noFill/>
-        </p:spPr>
-        <p:txBody>
-          <a:bodyPr wrap="square" rtlCol="0">
-            <a:spAutoFit/>
-          </a:bodyPr>
-          <a:lstStyle/>
-          <a:p>
-            <a:pPr algn="ctr"/>
-            <a:r>
-              <a:rPr lang="en-US" altLang="zh-TW" sz="2400" dirty="0"/>
-              <a:t>A</a:t>
-            </a:r>
-            <a:r>
-              <a:rPr lang="en-US" altLang="zh-TW" sz="1400" dirty="0"/>
-              <a:t>1</a:t>
-            </a:r>
-            <a:endParaRPr lang="zh-TW" altLang="en-US" sz="3200" dirty="0"/>
-          </a:p>
-        </p:txBody>
-      </p:sp>
-      <p:sp>
-        <p:nvSpPr>
-          <p:cNvPr id="200" name="文字方塊 199">
-            <a:extLst>
-              <a:ext uri="{FF2B5EF4-FFF2-40B4-BE49-F238E27FC236}">
-                <a16:creationId xmlns:a16="http://schemas.microsoft.com/office/drawing/2014/main" id="{EE4B2486-86F0-9CB5-0A52-9D68C6C0D3F2}"/>
-              </a:ext>
-            </a:extLst>
-          </p:cNvPr>
-          <p:cNvSpPr txBox="1"/>
-          <p:nvPr/>
-        </p:nvSpPr>
-        <p:spPr>
-          <a:xfrm>
-            <a:off x="9665601" y="4646533"/>
-            <a:ext cx="650512" cy="461665"/>
-          </a:xfrm>
-          <a:prstGeom prst="rect">
-            <a:avLst/>
-          </a:prstGeom>
-          <a:noFill/>
-        </p:spPr>
-        <p:txBody>
-          <a:bodyPr wrap="square" rtlCol="0">
-            <a:spAutoFit/>
-          </a:bodyPr>
-          <a:lstStyle/>
-          <a:p>
-            <a:pPr algn="ctr"/>
-            <a:r>
-              <a:rPr lang="en-US" altLang="zh-TW" sz="2400" dirty="0"/>
-              <a:t>A</a:t>
-            </a:r>
-            <a:r>
-              <a:rPr lang="en-US" altLang="zh-TW" sz="1400" dirty="0"/>
-              <a:t>5</a:t>
-            </a:r>
-            <a:endParaRPr lang="zh-TW" altLang="en-US" sz="3200" dirty="0"/>
-          </a:p>
-        </p:txBody>
-      </p:sp>
-      <p:sp>
-        <p:nvSpPr>
-          <p:cNvPr id="202" name="文字方塊 201">
-            <a:extLst>
-              <a:ext uri="{FF2B5EF4-FFF2-40B4-BE49-F238E27FC236}">
-                <a16:creationId xmlns:a16="http://schemas.microsoft.com/office/drawing/2014/main" id="{BDE86C63-756C-559B-15F3-F8C6EFA0AFCC}"/>
-              </a:ext>
-            </a:extLst>
-          </p:cNvPr>
-          <p:cNvSpPr txBox="1"/>
-          <p:nvPr/>
-        </p:nvSpPr>
-        <p:spPr>
-          <a:xfrm>
-            <a:off x="9665601" y="5137279"/>
-            <a:ext cx="650512" cy="461665"/>
-          </a:xfrm>
-          <a:prstGeom prst="rect">
-            <a:avLst/>
-          </a:prstGeom>
-          <a:noFill/>
-        </p:spPr>
-        <p:txBody>
-          <a:bodyPr wrap="square" rtlCol="0">
-            <a:spAutoFit/>
-          </a:bodyPr>
-          <a:lstStyle/>
-          <a:p>
-            <a:pPr algn="ctr"/>
-            <a:r>
-              <a:rPr lang="en-US" altLang="zh-TW" sz="2400" dirty="0"/>
-              <a:t>A</a:t>
-            </a:r>
-            <a:r>
-              <a:rPr lang="en-US" altLang="zh-TW" sz="1400" dirty="0"/>
-              <a:t>4</a:t>
-            </a:r>
-            <a:endParaRPr lang="zh-TW" altLang="en-US" sz="3200" dirty="0"/>
-          </a:p>
-        </p:txBody>
-      </p:sp>
-      <p:sp>
-        <p:nvSpPr>
-          <p:cNvPr id="204" name="文字方塊 203">
-            <a:extLst>
-              <a:ext uri="{FF2B5EF4-FFF2-40B4-BE49-F238E27FC236}">
-                <a16:creationId xmlns:a16="http://schemas.microsoft.com/office/drawing/2014/main" id="{938BF3B4-9360-538F-5730-F5FA71C97A29}"/>
-              </a:ext>
-            </a:extLst>
-          </p:cNvPr>
-          <p:cNvSpPr txBox="1"/>
-          <p:nvPr/>
-        </p:nvSpPr>
-        <p:spPr>
-          <a:xfrm>
-            <a:off x="9665601" y="5628025"/>
-            <a:ext cx="650512" cy="461665"/>
-          </a:xfrm>
-          <a:prstGeom prst="rect">
-            <a:avLst/>
-          </a:prstGeom>
-          <a:noFill/>
-        </p:spPr>
-        <p:txBody>
-          <a:bodyPr wrap="square" rtlCol="0">
-            <a:spAutoFit/>
-          </a:bodyPr>
-          <a:lstStyle/>
-          <a:p>
-            <a:pPr algn="ctr"/>
-            <a:r>
-              <a:rPr lang="en-US" altLang="zh-TW" sz="2400" dirty="0"/>
-              <a:t>A</a:t>
-            </a:r>
-            <a:r>
-              <a:rPr lang="en-US" altLang="zh-TW" sz="1400" dirty="0"/>
-              <a:t>3</a:t>
-            </a:r>
-            <a:endParaRPr lang="zh-TW" altLang="en-US" sz="3200" dirty="0"/>
-          </a:p>
-        </p:txBody>
-      </p:sp>
-      <p:sp>
-        <p:nvSpPr>
-          <p:cNvPr id="206" name="文字方塊 205">
-            <a:extLst>
-              <a:ext uri="{FF2B5EF4-FFF2-40B4-BE49-F238E27FC236}">
-                <a16:creationId xmlns:a16="http://schemas.microsoft.com/office/drawing/2014/main" id="{72C25847-1E84-5D10-982F-92CA09AC122E}"/>
-              </a:ext>
-            </a:extLst>
-          </p:cNvPr>
-          <p:cNvSpPr txBox="1"/>
-          <p:nvPr/>
-        </p:nvSpPr>
-        <p:spPr>
-          <a:xfrm>
-            <a:off x="7879371" y="3690506"/>
-            <a:ext cx="650512" cy="461665"/>
-          </a:xfrm>
-          <a:prstGeom prst="rect">
-            <a:avLst/>
-          </a:prstGeom>
-          <a:noFill/>
-        </p:spPr>
-        <p:txBody>
-          <a:bodyPr wrap="square" rtlCol="0">
-            <a:spAutoFit/>
-          </a:bodyPr>
-          <a:lstStyle/>
-          <a:p>
-            <a:pPr algn="ctr"/>
-            <a:r>
-              <a:rPr lang="en-US" altLang="zh-TW" sz="2400" dirty="0"/>
-              <a:t>X</a:t>
-            </a:r>
-            <a:r>
-              <a:rPr lang="en-US" altLang="zh-TW" sz="1400" dirty="0"/>
-              <a:t>2</a:t>
-            </a:r>
-            <a:endParaRPr lang="zh-TW" altLang="en-US" sz="3200" dirty="0"/>
-          </a:p>
-        </p:txBody>
-      </p:sp>
-      <p:sp>
-        <p:nvSpPr>
-          <p:cNvPr id="208" name="左右大括弧 207">
-            <a:extLst>
-              <a:ext uri="{FF2B5EF4-FFF2-40B4-BE49-F238E27FC236}">
-                <a16:creationId xmlns:a16="http://schemas.microsoft.com/office/drawing/2014/main" id="{276B5D7F-1815-9D66-69FD-A22379EE7049}"/>
-              </a:ext>
-            </a:extLst>
-          </p:cNvPr>
-          <p:cNvSpPr/>
-          <p:nvPr/>
-        </p:nvSpPr>
-        <p:spPr>
-          <a:xfrm>
-            <a:off x="7703311" y="3939196"/>
-            <a:ext cx="977951" cy="2008566"/>
-          </a:xfrm>
-          <a:prstGeom prst="bracePair">
-            <a:avLst/>
-          </a:prstGeom>
-        </p:spPr>
-        <p:style>
-          <a:lnRef idx="2">
-            <a:schemeClr val="dk1"/>
-          </a:lnRef>
-          <a:fillRef idx="0">
-            <a:schemeClr val="dk1"/>
-          </a:fillRef>
-          <a:effectRef idx="1">
-            <a:schemeClr val="dk1"/>
-          </a:effectRef>
-          <a:fontRef idx="minor">
-            <a:schemeClr val="tx1"/>
-          </a:fontRef>
-        </p:style>
-        <p:txBody>
-          <a:bodyPr rtlCol="0" anchor="ctr"/>
-          <a:lstStyle/>
-          <a:p>
-            <a:pPr algn="ctr"/>
-            <a:endParaRPr lang="zh-TW" altLang="en-US"/>
-          </a:p>
-        </p:txBody>
-      </p:sp>
-      <p:sp>
-        <p:nvSpPr>
-          <p:cNvPr id="210" name="文字方塊 209">
-            <a:extLst>
-              <a:ext uri="{FF2B5EF4-FFF2-40B4-BE49-F238E27FC236}">
-                <a16:creationId xmlns:a16="http://schemas.microsoft.com/office/drawing/2014/main" id="{2320DCDF-3F80-851F-5EC9-64199FA1A0F8}"/>
-              </a:ext>
-            </a:extLst>
-          </p:cNvPr>
-          <p:cNvSpPr txBox="1"/>
-          <p:nvPr/>
-        </p:nvSpPr>
-        <p:spPr>
-          <a:xfrm>
-            <a:off x="7867030" y="4152171"/>
-            <a:ext cx="650512" cy="461665"/>
-          </a:xfrm>
-          <a:prstGeom prst="rect">
-            <a:avLst/>
-          </a:prstGeom>
-          <a:noFill/>
-        </p:spPr>
-        <p:txBody>
-          <a:bodyPr wrap="square" rtlCol="0">
-            <a:spAutoFit/>
-          </a:bodyPr>
-          <a:lstStyle/>
-          <a:p>
-            <a:pPr algn="ctr"/>
-            <a:r>
-              <a:rPr lang="en-US" altLang="zh-TW" sz="2400" dirty="0"/>
-              <a:t>X</a:t>
-            </a:r>
-            <a:r>
-              <a:rPr lang="en-US" altLang="zh-TW" sz="1400" dirty="0"/>
-              <a:t>1</a:t>
-            </a:r>
-            <a:endParaRPr lang="zh-TW" altLang="en-US" sz="3200" dirty="0"/>
-          </a:p>
-        </p:txBody>
-      </p:sp>
-      <p:sp>
-        <p:nvSpPr>
-          <p:cNvPr id="212" name="文字方塊 211">
-            <a:extLst>
-              <a:ext uri="{FF2B5EF4-FFF2-40B4-BE49-F238E27FC236}">
-                <a16:creationId xmlns:a16="http://schemas.microsoft.com/office/drawing/2014/main" id="{CEE5BC4F-4A08-A044-A800-3D8A3625C9E3}"/>
-              </a:ext>
-            </a:extLst>
-          </p:cNvPr>
-          <p:cNvSpPr txBox="1"/>
-          <p:nvPr/>
-        </p:nvSpPr>
-        <p:spPr>
-          <a:xfrm>
-            <a:off x="7867030" y="4646533"/>
-            <a:ext cx="650512" cy="461665"/>
-          </a:xfrm>
-          <a:prstGeom prst="rect">
-            <a:avLst/>
-          </a:prstGeom>
-          <a:noFill/>
-        </p:spPr>
-        <p:txBody>
-          <a:bodyPr wrap="square" rtlCol="0">
-            <a:spAutoFit/>
-          </a:bodyPr>
-          <a:lstStyle/>
-          <a:p>
-            <a:pPr algn="ctr"/>
-            <a:r>
-              <a:rPr lang="en-US" altLang="zh-TW" sz="2400" dirty="0"/>
-              <a:t>X</a:t>
-            </a:r>
-            <a:r>
-              <a:rPr lang="en-US" altLang="zh-TW" sz="1400" dirty="0"/>
-              <a:t>5</a:t>
-            </a:r>
-            <a:endParaRPr lang="zh-TW" altLang="en-US" sz="3200" dirty="0"/>
-          </a:p>
-        </p:txBody>
-      </p:sp>
-      <p:sp>
-        <p:nvSpPr>
-          <p:cNvPr id="214" name="文字方塊 213">
-            <a:extLst>
-              <a:ext uri="{FF2B5EF4-FFF2-40B4-BE49-F238E27FC236}">
-                <a16:creationId xmlns:a16="http://schemas.microsoft.com/office/drawing/2014/main" id="{B5CFE5C2-9F86-F9FE-0391-1B1E306C6566}"/>
-              </a:ext>
-            </a:extLst>
-          </p:cNvPr>
-          <p:cNvSpPr txBox="1"/>
-          <p:nvPr/>
-        </p:nvSpPr>
-        <p:spPr>
-          <a:xfrm>
-            <a:off x="7867030" y="5137279"/>
-            <a:ext cx="650512" cy="461665"/>
-          </a:xfrm>
-          <a:prstGeom prst="rect">
-            <a:avLst/>
-          </a:prstGeom>
-          <a:noFill/>
-        </p:spPr>
-        <p:txBody>
-          <a:bodyPr wrap="square" rtlCol="0">
-            <a:spAutoFit/>
-          </a:bodyPr>
-          <a:lstStyle/>
-          <a:p>
-            <a:pPr algn="ctr"/>
-            <a:r>
-              <a:rPr lang="en-US" altLang="zh-TW" sz="2400" dirty="0"/>
-              <a:t>X</a:t>
-            </a:r>
-            <a:r>
-              <a:rPr lang="en-US" altLang="zh-TW" sz="1400" dirty="0"/>
-              <a:t>4</a:t>
-            </a:r>
-            <a:endParaRPr lang="zh-TW" altLang="en-US" sz="3200" dirty="0"/>
-          </a:p>
-        </p:txBody>
-      </p:sp>
-      <p:sp>
-        <p:nvSpPr>
-          <p:cNvPr id="216" name="文字方塊 215">
-            <a:extLst>
-              <a:ext uri="{FF2B5EF4-FFF2-40B4-BE49-F238E27FC236}">
-                <a16:creationId xmlns:a16="http://schemas.microsoft.com/office/drawing/2014/main" id="{7721B96D-AC55-5080-753C-946441505A61}"/>
-              </a:ext>
-            </a:extLst>
-          </p:cNvPr>
-          <p:cNvSpPr txBox="1"/>
-          <p:nvPr/>
-        </p:nvSpPr>
-        <p:spPr>
-          <a:xfrm>
-            <a:off x="7867030" y="5628025"/>
-            <a:ext cx="650512" cy="461665"/>
-          </a:xfrm>
-          <a:prstGeom prst="rect">
-            <a:avLst/>
-          </a:prstGeom>
-          <a:noFill/>
-        </p:spPr>
-        <p:txBody>
-          <a:bodyPr wrap="square" rtlCol="0">
-            <a:spAutoFit/>
-          </a:bodyPr>
-          <a:lstStyle/>
-          <a:p>
-            <a:pPr algn="ctr"/>
-            <a:r>
-              <a:rPr lang="en-US" altLang="zh-TW" sz="2400" dirty="0"/>
-              <a:t>X</a:t>
-            </a:r>
-            <a:r>
-              <a:rPr lang="en-US" altLang="zh-TW" sz="1400" dirty="0"/>
-              <a:t>3</a:t>
-            </a:r>
-            <a:endParaRPr lang="zh-TW" altLang="en-US" sz="3200" dirty="0"/>
-          </a:p>
-        </p:txBody>
-      </p:sp>
-      <p:sp>
-        <p:nvSpPr>
-          <p:cNvPr id="218" name="箭號: 向右 217">
-            <a:extLst>
-              <a:ext uri="{FF2B5EF4-FFF2-40B4-BE49-F238E27FC236}">
-                <a16:creationId xmlns:a16="http://schemas.microsoft.com/office/drawing/2014/main" id="{3FAE6BF3-B413-778E-4174-A3D24D9DC310}"/>
-              </a:ext>
-            </a:extLst>
-          </p:cNvPr>
-          <p:cNvSpPr/>
-          <p:nvPr/>
-        </p:nvSpPr>
-        <p:spPr>
-          <a:xfrm>
-            <a:off x="8922538" y="4829039"/>
-            <a:ext cx="354395" cy="228880"/>
-          </a:xfrm>
-          <a:prstGeom prst="rightArrow">
-            <a:avLst/>
-          </a:prstGeom>
-          <a:solidFill>
-            <a:schemeClr val="tx1"/>
-          </a:solidFill>
-          <a:ln>
-            <a:noFill/>
-          </a:ln>
+            <a:off x="7937269" y="2042099"/>
+            <a:ext cx="358751" cy="282285"/>
+          </a:xfrm>
+          <a:prstGeom prst="mathEqual">
+            <a:avLst/>
+          </a:prstGeom>
         </p:spPr>
         <p:style>
           <a:lnRef idx="2">
@@ -14083,221 +14296,11 @@
           <a:lstStyle/>
           <a:p>
             <a:pPr algn="ctr"/>
-            <a:endParaRPr lang="zh-TW" altLang="en-US"/>
-          </a:p>
-        </p:txBody>
-      </p:sp>
-      <p:sp>
-        <p:nvSpPr>
-          <p:cNvPr id="220" name="文字方塊 219">
-            <a:extLst>
-              <a:ext uri="{FF2B5EF4-FFF2-40B4-BE49-F238E27FC236}">
-                <a16:creationId xmlns:a16="http://schemas.microsoft.com/office/drawing/2014/main" id="{E0FD3482-56A2-4A0E-7EB9-C5DB9D533EDD}"/>
-              </a:ext>
-            </a:extLst>
-          </p:cNvPr>
-          <p:cNvSpPr txBox="1"/>
-          <p:nvPr/>
-        </p:nvSpPr>
-        <p:spPr>
-          <a:xfrm>
-            <a:off x="8707462" y="4416599"/>
-            <a:ext cx="768220" cy="369332"/>
-          </a:xfrm>
-          <a:prstGeom prst="rect">
-            <a:avLst/>
-          </a:prstGeom>
-          <a:noFill/>
-        </p:spPr>
-        <p:txBody>
-          <a:bodyPr wrap="square" rtlCol="0">
-            <a:spAutoFit/>
-          </a:bodyPr>
-          <a:lstStyle/>
-          <a:p>
-            <a:pPr algn="ctr"/>
-            <a:r>
-              <a:rPr lang="en-US" altLang="zh-TW" dirty="0"/>
-              <a:t>Attn</a:t>
-            </a:r>
-          </a:p>
-        </p:txBody>
-      </p:sp>
-      <p:sp>
-        <p:nvSpPr>
-          <p:cNvPr id="222" name="文字方塊 221">
-            <a:extLst>
-              <a:ext uri="{FF2B5EF4-FFF2-40B4-BE49-F238E27FC236}">
-                <a16:creationId xmlns:a16="http://schemas.microsoft.com/office/drawing/2014/main" id="{152E853A-4E57-B747-9234-EF6497090C7D}"/>
-              </a:ext>
-            </a:extLst>
-          </p:cNvPr>
-          <p:cNvSpPr txBox="1"/>
-          <p:nvPr/>
-        </p:nvSpPr>
-        <p:spPr>
-          <a:xfrm>
-            <a:off x="427291" y="3716314"/>
-            <a:ext cx="3070040" cy="400110"/>
-          </a:xfrm>
-          <a:prstGeom prst="rect">
-            <a:avLst/>
-          </a:prstGeom>
-          <a:noFill/>
-        </p:spPr>
-        <p:txBody>
-          <a:bodyPr wrap="square">
-            <a:spAutoFit/>
-          </a:bodyPr>
-          <a:lstStyle/>
-          <a:p>
-            <a:r>
-              <a:rPr lang="zh-TW" altLang="en-US" sz="2000" dirty="0"/>
-              <a:t>permutation-equivariant </a:t>
-            </a:r>
-            <a:r>
-              <a:rPr lang="en-US" altLang="zh-TW" sz="2000" dirty="0"/>
-              <a:t>:</a:t>
-            </a:r>
-            <a:endParaRPr lang="zh-TW" altLang="en-US" sz="2000" dirty="0"/>
-          </a:p>
-        </p:txBody>
-      </p:sp>
-      <p:pic>
-        <p:nvPicPr>
-          <p:cNvPr id="224" name="圖片 223">
-            <a:extLst>
-              <a:ext uri="{FF2B5EF4-FFF2-40B4-BE49-F238E27FC236}">
-                <a16:creationId xmlns:a16="http://schemas.microsoft.com/office/drawing/2014/main" id="{04C17AFE-4D97-EAEC-3DDC-6A862E3F5429}"/>
-              </a:ext>
-            </a:extLst>
-          </p:cNvPr>
-          <p:cNvPicPr>
-            <a:picLocks noChangeAspect="1"/>
-          </p:cNvPicPr>
-          <p:nvPr/>
-        </p:nvPicPr>
-        <p:blipFill>
-          <a:blip r:embed="rId5">
-            <a:extLst>
-              <a:ext uri="{28A0092B-C50C-407E-A947-70E740481C1C}">
-                <a14:useLocalDpi xmlns:a14="http://schemas.microsoft.com/office/drawing/2010/main" val="0"/>
-              </a:ext>
-            </a:extLst>
-          </a:blip>
-          <a:stretch>
-            <a:fillRect/>
-          </a:stretch>
-        </p:blipFill>
-        <p:spPr>
-          <a:xfrm>
-            <a:off x="10577476" y="5609493"/>
-            <a:ext cx="1445951" cy="475488"/>
-          </a:xfrm>
-          <a:prstGeom prst="rect">
-            <a:avLst/>
-          </a:prstGeom>
-        </p:spPr>
-      </p:pic>
-      <p:sp>
-        <p:nvSpPr>
-          <p:cNvPr id="228" name="文字方塊 227">
-            <a:extLst>
-              <a:ext uri="{FF2B5EF4-FFF2-40B4-BE49-F238E27FC236}">
-                <a16:creationId xmlns:a16="http://schemas.microsoft.com/office/drawing/2014/main" id="{D339091C-2573-48C9-820C-CCE6691B4643}"/>
-              </a:ext>
-            </a:extLst>
-          </p:cNvPr>
-          <p:cNvSpPr txBox="1"/>
-          <p:nvPr/>
-        </p:nvSpPr>
-        <p:spPr>
-          <a:xfrm>
-            <a:off x="427291" y="4717924"/>
-            <a:ext cx="2377072" cy="369332"/>
-          </a:xfrm>
-          <a:prstGeom prst="rect">
-            <a:avLst/>
-          </a:prstGeom>
-          <a:noFill/>
-        </p:spPr>
-        <p:txBody>
-          <a:bodyPr wrap="square" rtlCol="0">
-            <a:spAutoFit/>
-          </a:bodyPr>
-          <a:lstStyle/>
-          <a:p>
-            <a:r>
-              <a:rPr lang="en-US" altLang="zh-TW" i="1" dirty="0"/>
-              <a:t>P</a:t>
-            </a:r>
-            <a:r>
-              <a:rPr lang="en-US" altLang="zh-TW" dirty="0"/>
-              <a:t> : permutation matrix</a:t>
-            </a:r>
-            <a:endParaRPr lang="zh-TW" altLang="zh-TW" dirty="0"/>
-          </a:p>
-        </p:txBody>
-      </p:sp>
-      <p:sp>
-        <p:nvSpPr>
-          <p:cNvPr id="230" name="文字方塊 229">
-            <a:extLst>
-              <a:ext uri="{FF2B5EF4-FFF2-40B4-BE49-F238E27FC236}">
-                <a16:creationId xmlns:a16="http://schemas.microsoft.com/office/drawing/2014/main" id="{B2D69C5B-F61A-D791-8756-DC883D69F046}"/>
-              </a:ext>
-            </a:extLst>
-          </p:cNvPr>
-          <p:cNvSpPr txBox="1"/>
-          <p:nvPr/>
-        </p:nvSpPr>
-        <p:spPr>
-          <a:xfrm>
-            <a:off x="380874" y="6133902"/>
-            <a:ext cx="4452357" cy="276999"/>
-          </a:xfrm>
-          <a:prstGeom prst="rect">
-            <a:avLst/>
-          </a:prstGeom>
-          <a:noFill/>
-        </p:spPr>
-        <p:txBody>
-          <a:bodyPr wrap="square">
-            <a:spAutoFit/>
-          </a:bodyPr>
-          <a:lstStyle/>
-          <a:p>
-            <a:r>
-              <a:rPr lang="zh-TW" altLang="zh-TW" sz="1200" b="0" i="0" dirty="0">
-                <a:solidFill>
-                  <a:schemeClr val="tx1"/>
-                </a:solidFill>
-                <a:effectLst/>
-                <a:latin typeface="+mn-lt"/>
-              </a:rPr>
-              <a:t>Bui, H., &amp; Le, B. (2025). </a:t>
-            </a:r>
-            <a:r>
-              <a:rPr lang="zh-TW" altLang="zh-TW" sz="1200" b="0" i="1" dirty="0">
-                <a:solidFill>
-                  <a:schemeClr val="tx1"/>
-                </a:solidFill>
-                <a:effectLst/>
-                <a:latin typeface="+mn-lt"/>
-              </a:rPr>
-              <a:t>Expert Systems with Applications</a:t>
-            </a:r>
-            <a:r>
-              <a:rPr lang="zh-TW" altLang="zh-TW" sz="1200" b="0" i="0" dirty="0">
-                <a:solidFill>
-                  <a:schemeClr val="tx1"/>
-                </a:solidFill>
-                <a:effectLst/>
-                <a:latin typeface="+mn-lt"/>
-              </a:rPr>
-              <a:t>, 130220.</a:t>
-            </a:r>
-            <a:endParaRPr lang="zh-TW" altLang="en-US" sz="1200" dirty="0"/>
+            <a:endParaRPr lang="zh-TW" altLang="en-US">
+              <a:solidFill>
+                <a:schemeClr val="tx1"/>
+              </a:solidFill>
+            </a:endParaRPr>
           </a:p>
         </p:txBody>
       </p:sp>
@@ -14616,42 +14619,6 @@
       </p:sp>
       <p:sp>
         <p:nvSpPr>
-          <p:cNvPr id="26" name="文字方塊 25">
-            <a:extLst>
-              <a:ext uri="{FF2B5EF4-FFF2-40B4-BE49-F238E27FC236}">
-                <a16:creationId xmlns:a16="http://schemas.microsoft.com/office/drawing/2014/main" id="{89FAF952-79CE-2E61-D8D7-85599BE14D7B}"/>
-              </a:ext>
-            </a:extLst>
-          </p:cNvPr>
-          <p:cNvSpPr txBox="1"/>
-          <p:nvPr/>
-        </p:nvSpPr>
-        <p:spPr>
-          <a:xfrm>
-            <a:off x="6619209" y="4197973"/>
-            <a:ext cx="3070040" cy="400110"/>
-          </a:xfrm>
-          <a:prstGeom prst="rect">
-            <a:avLst/>
-          </a:prstGeom>
-          <a:noFill/>
-        </p:spPr>
-        <p:txBody>
-          <a:bodyPr wrap="square">
-            <a:spAutoFit/>
-          </a:bodyPr>
-          <a:lstStyle/>
-          <a:p>
-            <a:r>
-              <a:rPr lang="en-US" altLang="zh-TW" sz="2000" dirty="0"/>
-              <a:t>Step 3:</a:t>
-            </a:r>
-            <a:endParaRPr lang="zh-TW" altLang="en-US" sz="2000" dirty="0"/>
-          </a:p>
-        </p:txBody>
-      </p:sp>
-      <p:sp>
-        <p:nvSpPr>
           <p:cNvPr id="92" name="矩形 91">
             <a:extLst>
               <a:ext uri="{FF2B5EF4-FFF2-40B4-BE49-F238E27FC236}">
@@ -14847,7 +14814,7 @@
         <p:spPr>
           <a:xfrm>
             <a:off x="224109" y="4766530"/>
-            <a:ext cx="4694359" cy="861774"/>
+            <a:ext cx="4694359" cy="1107996"/>
           </a:xfrm>
           <a:prstGeom prst="rect">
             <a:avLst/>
@@ -14859,6 +14826,17 @@
             <a:spAutoFit/>
           </a:bodyPr>
           <a:lstStyle/>
+          <a:p>
+            <a:r>
+              <a:rPr lang="en-US" altLang="zh-TW" sz="1600" dirty="0"/>
+              <a:t>mm : </a:t>
+            </a:r>
+            <a:r>
+              <a:rPr lang="zh-TW" altLang="zh-TW" sz="1200" dirty="0"/>
+              <a:t>matrix multiplication</a:t>
+            </a:r>
+            <a:endParaRPr lang="en-US" altLang="zh-TW" sz="1200" dirty="0"/>
+          </a:p>
           <a:p>
             <a:r>
               <a:rPr lang="en-US" altLang="zh-TW" sz="1600" i="1" dirty="0"/>
@@ -14977,6 +14955,153 @@
               <a:t>, 130220.</a:t>
             </a:r>
             <a:endParaRPr lang="zh-TW" altLang="en-US" sz="1200" dirty="0"/>
+          </a:p>
+        </p:txBody>
+      </p:sp>
+      <p:sp>
+        <p:nvSpPr>
+          <p:cNvPr id="5" name="文字方塊 4">
+            <a:extLst>
+              <a:ext uri="{FF2B5EF4-FFF2-40B4-BE49-F238E27FC236}">
+                <a16:creationId xmlns:a16="http://schemas.microsoft.com/office/drawing/2014/main" id="{614CB538-E351-D6EC-3B83-C6D92B8609F8}"/>
+              </a:ext>
+            </a:extLst>
+          </p:cNvPr>
+          <p:cNvSpPr txBox="1"/>
+          <p:nvPr/>
+        </p:nvSpPr>
+        <p:spPr>
+          <a:xfrm>
+            <a:off x="6679085" y="4198194"/>
+            <a:ext cx="3070040" cy="400110"/>
+          </a:xfrm>
+          <a:prstGeom prst="rect">
+            <a:avLst/>
+          </a:prstGeom>
+          <a:noFill/>
+        </p:spPr>
+        <p:txBody>
+          <a:bodyPr wrap="square">
+            <a:spAutoFit/>
+          </a:bodyPr>
+          <a:lstStyle/>
+          <a:p>
+            <a:r>
+              <a:rPr lang="en-US" altLang="zh-TW" sz="2000" dirty="0"/>
+              <a:t>Step 2 &amp; 3:</a:t>
+            </a:r>
+            <a:endParaRPr lang="zh-TW" altLang="en-US" sz="2000" dirty="0"/>
+          </a:p>
+        </p:txBody>
+      </p:sp>
+      <p:pic>
+        <p:nvPicPr>
+          <p:cNvPr id="7" name="圖片 6">
+            <a:extLst>
+              <a:ext uri="{FF2B5EF4-FFF2-40B4-BE49-F238E27FC236}">
+                <a16:creationId xmlns:a16="http://schemas.microsoft.com/office/drawing/2014/main" id="{FA0181A9-BDC8-4E05-336A-FFAF8958F0A0}"/>
+              </a:ext>
+            </a:extLst>
+          </p:cNvPr>
+          <p:cNvPicPr>
+            <a:picLocks noChangeAspect="1"/>
+          </p:cNvPicPr>
+          <p:nvPr/>
+        </p:nvPicPr>
+        <p:blipFill>
+          <a:blip r:embed="rId8"/>
+          <a:stretch>
+            <a:fillRect/>
+          </a:stretch>
+        </p:blipFill>
+        <p:spPr>
+          <a:xfrm>
+            <a:off x="3333499" y="4907741"/>
+            <a:ext cx="2438740" cy="838317"/>
+          </a:xfrm>
+          <a:prstGeom prst="rect">
+            <a:avLst/>
+          </a:prstGeom>
+        </p:spPr>
+      </p:pic>
+      <p:sp>
+        <p:nvSpPr>
+          <p:cNvPr id="11" name="文字方塊 10">
+            <a:extLst>
+              <a:ext uri="{FF2B5EF4-FFF2-40B4-BE49-F238E27FC236}">
+                <a16:creationId xmlns:a16="http://schemas.microsoft.com/office/drawing/2014/main" id="{15F82409-E009-01C3-AAE2-7E4CEEC745FE}"/>
+              </a:ext>
+            </a:extLst>
+          </p:cNvPr>
+          <p:cNvSpPr txBox="1"/>
+          <p:nvPr/>
+        </p:nvSpPr>
+        <p:spPr>
+          <a:xfrm>
+            <a:off x="3738648" y="5625593"/>
+            <a:ext cx="2030191" cy="276999"/>
+          </a:xfrm>
+          <a:prstGeom prst="rect">
+            <a:avLst/>
+          </a:prstGeom>
+          <a:noFill/>
+        </p:spPr>
+        <p:txBody>
+          <a:bodyPr wrap="square" rtlCol="0">
+            <a:spAutoFit/>
+          </a:bodyPr>
+          <a:lstStyle/>
+          <a:p>
+            <a:pPr algn="ctr"/>
+            <a:r>
+              <a:rPr lang="en-US" altLang="zh-TW" sz="1200" dirty="0"/>
+              <a:t>(</a:t>
+            </a:r>
+            <a:r>
+              <a:rPr lang="en-US" altLang="zh-TW" sz="1200" dirty="0" err="1"/>
+              <a:t>pytorch</a:t>
+            </a:r>
+            <a:r>
+              <a:rPr lang="en-US" altLang="zh-TW" sz="1200" dirty="0"/>
+              <a:t> documentation)</a:t>
+            </a:r>
+            <a:endParaRPr lang="zh-TW" altLang="en-US" sz="1200" dirty="0"/>
+          </a:p>
+        </p:txBody>
+      </p:sp>
+      <p:sp>
+        <p:nvSpPr>
+          <p:cNvPr id="13" name="文字方塊 12">
+            <a:extLst>
+              <a:ext uri="{FF2B5EF4-FFF2-40B4-BE49-F238E27FC236}">
+                <a16:creationId xmlns:a16="http://schemas.microsoft.com/office/drawing/2014/main" id="{2B5AD2FF-A99F-7AAB-6343-06B161C725FB}"/>
+              </a:ext>
+            </a:extLst>
+          </p:cNvPr>
+          <p:cNvSpPr txBox="1"/>
+          <p:nvPr/>
+        </p:nvSpPr>
+        <p:spPr>
+          <a:xfrm>
+            <a:off x="3333499" y="4738464"/>
+            <a:ext cx="810298" cy="338554"/>
+          </a:xfrm>
+          <a:prstGeom prst="rect">
+            <a:avLst/>
+          </a:prstGeom>
+          <a:noFill/>
+        </p:spPr>
+        <p:txBody>
+          <a:bodyPr wrap="square" rtlCol="0">
+            <a:spAutoFit/>
+          </a:bodyPr>
+          <a:lstStyle/>
+          <a:p>
+            <a:r>
+              <a:rPr lang="en-US" altLang="zh-TW" sz="1600" dirty="0"/>
+              <a:t>Norm :</a:t>
+            </a:r>
+            <a:endParaRPr lang="zh-TW" altLang="zh-TW" sz="1600" dirty="0"/>
           </a:p>
         </p:txBody>
       </p:sp>
@@ -15243,7 +15368,7 @@
         </p:blipFill>
         <p:spPr>
           <a:xfrm>
-            <a:off x="838200" y="3054925"/>
+            <a:off x="838200" y="2936053"/>
             <a:ext cx="6315956" cy="1714739"/>
           </a:xfrm>
           <a:prstGeom prst="rect">
@@ -15273,7 +15398,7 @@
         </p:blipFill>
         <p:spPr>
           <a:xfrm>
-            <a:off x="7663055" y="1137979"/>
+            <a:off x="7635623" y="1224769"/>
             <a:ext cx="3225659" cy="4995923"/>
           </a:xfrm>
           <a:prstGeom prst="rect">
@@ -15302,7 +15427,7 @@
         <p:cNvPr id="1" name="">
           <a:extLst>
             <a:ext uri="{FF2B5EF4-FFF2-40B4-BE49-F238E27FC236}">
-              <a16:creationId xmlns:a16="http://schemas.microsoft.com/office/drawing/2014/main" id="{DC775256-6328-AD97-B7FF-2A380DC0E562}"/>
+              <a16:creationId xmlns:a16="http://schemas.microsoft.com/office/drawing/2014/main" id="{2D6C5EB3-69F4-7086-1CE3-D4123FD24910}"/>
             </a:ext>
           </a:extLst>
         </p:cNvPr>
@@ -15322,7 +15447,7 @@
           <p:cNvPr id="2" name="標題 1">
             <a:extLst>
               <a:ext uri="{FF2B5EF4-FFF2-40B4-BE49-F238E27FC236}">
-                <a16:creationId xmlns:a16="http://schemas.microsoft.com/office/drawing/2014/main" id="{6AFF4CAD-A6A7-17A8-EE70-A23536A6C7A0}"/>
+                <a16:creationId xmlns:a16="http://schemas.microsoft.com/office/drawing/2014/main" id="{A4198BA0-3899-AF56-BDD4-4074DC3783C0}"/>
               </a:ext>
             </a:extLst>
           </p:cNvPr>
@@ -15341,10 +15466,17 @@
           <a:lstStyle/>
           <a:p>
             <a:r>
+              <a:rPr lang="en-US" altLang="zh-TW" sz="4000" dirty="0"/>
+              <a:t>Local</a:t>
+            </a:r>
+            <a:r>
               <a:rPr lang="zh-TW" altLang="zh-TW" sz="4000" dirty="0"/>
-              <a:t>Cross-attention layer</a:t>
-            </a:r>
-            <a:endParaRPr lang="zh-TW" altLang="en-US" sz="4000" dirty="0"/>
+              <a:t> attention layer</a:t>
+            </a:r>
+            <a:r>
+              <a:rPr lang="zh-TW" altLang="en-US" sz="4000" dirty="0"/>
+              <a:t> </a:t>
+            </a:r>
           </a:p>
         </p:txBody>
       </p:sp>
@@ -15353,7 +15485,7 @@
           <p:cNvPr id="4" name="投影片編號版面配置區 3">
             <a:extLst>
               <a:ext uri="{FF2B5EF4-FFF2-40B4-BE49-F238E27FC236}">
-                <a16:creationId xmlns:a16="http://schemas.microsoft.com/office/drawing/2014/main" id="{C6BE5A0E-91AA-A25F-24DA-9B0143546935}"/>
+                <a16:creationId xmlns:a16="http://schemas.microsoft.com/office/drawing/2014/main" id="{88C6D5ED-C41F-9D3C-B498-7887EBDA50B6}"/>
               </a:ext>
             </a:extLst>
           </p:cNvPr>
@@ -15382,7 +15514,7 @@
           <p:cNvPr id="8" name="直線接點 7">
             <a:extLst>
               <a:ext uri="{FF2B5EF4-FFF2-40B4-BE49-F238E27FC236}">
-                <a16:creationId xmlns:a16="http://schemas.microsoft.com/office/drawing/2014/main" id="{1AA5E50D-2373-9749-7CF0-0AEA93C38DCE}"/>
+                <a16:creationId xmlns:a16="http://schemas.microsoft.com/office/drawing/2014/main" id="{5FB5BFBC-8D92-F5D4-AB20-BEB1AE0F5055}"/>
               </a:ext>
             </a:extLst>
           </p:cNvPr>
@@ -15420,7 +15552,7 @@
           <p:cNvPr id="10" name="文字方塊 9">
             <a:extLst>
               <a:ext uri="{FF2B5EF4-FFF2-40B4-BE49-F238E27FC236}">
-                <a16:creationId xmlns:a16="http://schemas.microsoft.com/office/drawing/2014/main" id="{850E4794-5FF6-FC38-7317-57E897C1428E}"/>
+                <a16:creationId xmlns:a16="http://schemas.microsoft.com/office/drawing/2014/main" id="{9ED60CAF-D79A-A88C-E421-AE48E6C1B314}"/>
               </a:ext>
             </a:extLst>
           </p:cNvPr>
@@ -15457,7 +15589,7 @@
           <p:cNvPr id="7" name="文字方塊 6">
             <a:extLst>
               <a:ext uri="{FF2B5EF4-FFF2-40B4-BE49-F238E27FC236}">
-                <a16:creationId xmlns:a16="http://schemas.microsoft.com/office/drawing/2014/main" id="{15109560-9503-0041-366E-E7F13F83390B}"/>
+                <a16:creationId xmlns:a16="http://schemas.microsoft.com/office/drawing/2014/main" id="{5AC9E154-C1BA-6494-45D8-F04228810655}"/>
               </a:ext>
             </a:extLst>
           </p:cNvPr>
@@ -15514,10 +15646,333 @@
           </a:p>
         </p:txBody>
       </p:sp>
+      <p:pic>
+        <p:nvPicPr>
+          <p:cNvPr id="5" name="圖片 4">
+            <a:extLst>
+              <a:ext uri="{FF2B5EF4-FFF2-40B4-BE49-F238E27FC236}">
+                <a16:creationId xmlns:a16="http://schemas.microsoft.com/office/drawing/2014/main" id="{753B0C07-B1F8-EEC7-3522-C9C176FDC9D3}"/>
+              </a:ext>
+            </a:extLst>
+          </p:cNvPr>
+          <p:cNvPicPr>
+            <a:picLocks noChangeAspect="1"/>
+          </p:cNvPicPr>
+          <p:nvPr/>
+        </p:nvPicPr>
+        <p:blipFill>
+          <a:blip r:embed="rId2"/>
+          <a:stretch>
+            <a:fillRect/>
+          </a:stretch>
+        </p:blipFill>
+        <p:spPr>
+          <a:xfrm>
+            <a:off x="7889516" y="1027906"/>
+            <a:ext cx="3221497" cy="5273038"/>
+          </a:xfrm>
+          <a:prstGeom prst="rect">
+            <a:avLst/>
+          </a:prstGeom>
+        </p:spPr>
+      </p:pic>
+      <p:pic>
+        <p:nvPicPr>
+          <p:cNvPr id="9" name="圖片 8">
+            <a:extLst>
+              <a:ext uri="{FF2B5EF4-FFF2-40B4-BE49-F238E27FC236}">
+                <a16:creationId xmlns:a16="http://schemas.microsoft.com/office/drawing/2014/main" id="{A3BE47EB-648C-5757-C257-C841E414A60F}"/>
+              </a:ext>
+            </a:extLst>
+          </p:cNvPr>
+          <p:cNvPicPr>
+            <a:picLocks noChangeAspect="1"/>
+          </p:cNvPicPr>
+          <p:nvPr/>
+        </p:nvPicPr>
+        <p:blipFill>
+          <a:blip r:embed="rId3"/>
+          <a:stretch>
+            <a:fillRect/>
+          </a:stretch>
+        </p:blipFill>
+        <p:spPr>
+          <a:xfrm>
+            <a:off x="838200" y="1566155"/>
+            <a:ext cx="4728121" cy="945625"/>
+          </a:xfrm>
+          <a:prstGeom prst="rect">
+            <a:avLst/>
+          </a:prstGeom>
+        </p:spPr>
+      </p:pic>
+      <p:pic>
+        <p:nvPicPr>
+          <p:cNvPr id="14" name="圖片 13">
+            <a:extLst>
+              <a:ext uri="{FF2B5EF4-FFF2-40B4-BE49-F238E27FC236}">
+                <a16:creationId xmlns:a16="http://schemas.microsoft.com/office/drawing/2014/main" id="{BA37B934-7E9F-38B8-F4F3-2DFD9F087937}"/>
+              </a:ext>
+            </a:extLst>
+          </p:cNvPr>
+          <p:cNvPicPr>
+            <a:picLocks noChangeAspect="1"/>
+          </p:cNvPicPr>
+          <p:nvPr/>
+        </p:nvPicPr>
+        <p:blipFill>
+          <a:blip r:embed="rId4"/>
+          <a:stretch>
+            <a:fillRect/>
+          </a:stretch>
+        </p:blipFill>
+        <p:spPr>
+          <a:xfrm>
+            <a:off x="574555" y="2286709"/>
+            <a:ext cx="2323195" cy="3027616"/>
+          </a:xfrm>
+          <a:prstGeom prst="rect">
+            <a:avLst/>
+          </a:prstGeom>
+        </p:spPr>
+      </p:pic>
+      <p:sp>
+        <p:nvSpPr>
+          <p:cNvPr id="16" name="文字方塊 15">
+            <a:extLst>
+              <a:ext uri="{FF2B5EF4-FFF2-40B4-BE49-F238E27FC236}">
+                <a16:creationId xmlns:a16="http://schemas.microsoft.com/office/drawing/2014/main" id="{4D0B9A9F-BD86-3985-AEC4-8E8B7C0612E6}"/>
+              </a:ext>
+            </a:extLst>
+          </p:cNvPr>
+          <p:cNvSpPr txBox="1"/>
+          <p:nvPr/>
+        </p:nvSpPr>
+        <p:spPr>
+          <a:xfrm>
+            <a:off x="2897750" y="2445907"/>
+            <a:ext cx="2668571" cy="338554"/>
+          </a:xfrm>
+          <a:prstGeom prst="rect">
+            <a:avLst/>
+          </a:prstGeom>
+          <a:noFill/>
+        </p:spPr>
+        <p:txBody>
+          <a:bodyPr wrap="square" rtlCol="0">
+            <a:spAutoFit/>
+          </a:bodyPr>
+          <a:lstStyle/>
+          <a:p>
+            <a:r>
+              <a:rPr lang="en-US" altLang="zh-TW" sz="1600" i="1" dirty="0"/>
+              <a:t>W </a:t>
+            </a:r>
+            <a:r>
+              <a:rPr lang="en-US" altLang="zh-TW" sz="1200" dirty="0"/>
+              <a:t>: </a:t>
+            </a:r>
+            <a:r>
+              <a:rPr lang="en-US" altLang="zh-TW" sz="1600" dirty="0"/>
+              <a:t> </a:t>
+            </a:r>
+            <a:r>
+              <a:rPr lang="zh-TW" altLang="zh-TW" sz="1200" dirty="0"/>
+              <a:t>Matrix of a linear transformation</a:t>
+            </a:r>
+          </a:p>
+        </p:txBody>
+      </p:sp>
+      <p:sp>
+        <p:nvSpPr>
+          <p:cNvPr id="18" name="文字方塊 17">
+            <a:extLst>
+              <a:ext uri="{FF2B5EF4-FFF2-40B4-BE49-F238E27FC236}">
+                <a16:creationId xmlns:a16="http://schemas.microsoft.com/office/drawing/2014/main" id="{85C7A2E6-044B-597E-9D70-0ACDD1635653}"/>
+              </a:ext>
+            </a:extLst>
+          </p:cNvPr>
+          <p:cNvSpPr txBox="1"/>
+          <p:nvPr/>
+        </p:nvSpPr>
+        <p:spPr>
+          <a:xfrm>
+            <a:off x="777356" y="5273101"/>
+            <a:ext cx="6070606" cy="461665"/>
+          </a:xfrm>
+          <a:prstGeom prst="rect">
+            <a:avLst/>
+          </a:prstGeom>
+          <a:noFill/>
+        </p:spPr>
+        <p:txBody>
+          <a:bodyPr wrap="square">
+            <a:spAutoFit/>
+          </a:bodyPr>
+          <a:lstStyle/>
+          <a:p>
+            <a:r>
+              <a:rPr lang="zh-TW" altLang="zh-TW" sz="1200" b="0" i="0" dirty="0">
+                <a:solidFill>
+                  <a:schemeClr val="tx1"/>
+                </a:solidFill>
+                <a:effectLst/>
+                <a:latin typeface="+mn-lt"/>
+              </a:rPr>
+              <a:t>Vaswani, A., Shazeer, N., Parmar, N., Uszkoreit, J., Jones, L., Gomez, A. N., ... &amp; Polosukhin, I. (2017). Attention is all you need. </a:t>
+            </a:r>
+            <a:r>
+              <a:rPr lang="zh-TW" altLang="zh-TW" sz="1200" b="0" i="1" dirty="0">
+                <a:solidFill>
+                  <a:schemeClr val="tx1"/>
+                </a:solidFill>
+                <a:effectLst/>
+                <a:latin typeface="+mn-lt"/>
+              </a:rPr>
+              <a:t>Advances in neural information processing systems</a:t>
+            </a:r>
+            <a:r>
+              <a:rPr lang="zh-TW" altLang="zh-TW" sz="1200" b="0" i="0" dirty="0">
+                <a:solidFill>
+                  <a:schemeClr val="tx1"/>
+                </a:solidFill>
+                <a:effectLst/>
+                <a:latin typeface="+mn-lt"/>
+              </a:rPr>
+              <a:t>, </a:t>
+            </a:r>
+            <a:r>
+              <a:rPr lang="zh-TW" altLang="zh-TW" sz="1200" b="0" i="1" dirty="0">
+                <a:solidFill>
+                  <a:schemeClr val="tx1"/>
+                </a:solidFill>
+                <a:effectLst/>
+                <a:latin typeface="+mn-lt"/>
+              </a:rPr>
+              <a:t>30</a:t>
+            </a:r>
+            <a:r>
+              <a:rPr lang="zh-TW" altLang="zh-TW" sz="1200" b="0" i="0" dirty="0">
+                <a:solidFill>
+                  <a:schemeClr val="tx1"/>
+                </a:solidFill>
+                <a:effectLst/>
+                <a:latin typeface="+mn-lt"/>
+              </a:rPr>
+              <a:t>.</a:t>
+            </a:r>
+            <a:endParaRPr lang="zh-TW" altLang="en-US" sz="1200" dirty="0"/>
+          </a:p>
+        </p:txBody>
+      </p:sp>
+      <p:sp>
+        <p:nvSpPr>
+          <p:cNvPr id="20" name="矩形 19">
+            <a:extLst>
+              <a:ext uri="{FF2B5EF4-FFF2-40B4-BE49-F238E27FC236}">
+                <a16:creationId xmlns:a16="http://schemas.microsoft.com/office/drawing/2014/main" id="{73E2338A-2FC8-6523-1680-359A6DBCCC2B}"/>
+              </a:ext>
+            </a:extLst>
+          </p:cNvPr>
+          <p:cNvSpPr/>
+          <p:nvPr/>
+        </p:nvSpPr>
+        <p:spPr>
+          <a:xfrm>
+            <a:off x="685005" y="1543674"/>
+            <a:ext cx="6255308" cy="4253621"/>
+          </a:xfrm>
+          <a:prstGeom prst="rect">
+            <a:avLst/>
+          </a:prstGeom>
+          <a:noFill/>
+          <a:ln w="38100">
+            <a:solidFill>
+              <a:schemeClr val="tx1"/>
+            </a:solidFill>
+          </a:ln>
+        </p:spPr>
+        <p:style>
+          <a:lnRef idx="2">
+            <a:schemeClr val="accent1">
+              <a:shade val="15000"/>
+            </a:schemeClr>
+          </a:lnRef>
+          <a:fillRef idx="1">
+            <a:schemeClr val="accent1"/>
+          </a:fillRef>
+          <a:effectRef idx="0">
+            <a:schemeClr val="accent1"/>
+          </a:effectRef>
+          <a:fontRef idx="minor">
+            <a:schemeClr val="lt1"/>
+          </a:fontRef>
+        </p:style>
+        <p:txBody>
+          <a:bodyPr rtlCol="0" anchor="ctr"/>
+          <a:lstStyle/>
+          <a:p>
+            <a:pPr algn="ctr"/>
+            <a:endParaRPr lang="zh-TW" altLang="en-US"/>
+          </a:p>
+        </p:txBody>
+      </p:sp>
+      <p:sp>
+        <p:nvSpPr>
+          <p:cNvPr id="22" name="箭號: 向右 21">
+            <a:extLst>
+              <a:ext uri="{FF2B5EF4-FFF2-40B4-BE49-F238E27FC236}">
+                <a16:creationId xmlns:a16="http://schemas.microsoft.com/office/drawing/2014/main" id="{D0B49A03-F2A3-C2A3-DB88-84FCF8654122}"/>
+              </a:ext>
+            </a:extLst>
+          </p:cNvPr>
+          <p:cNvSpPr/>
+          <p:nvPr/>
+        </p:nvSpPr>
+        <p:spPr>
+          <a:xfrm>
+            <a:off x="7132328" y="3374136"/>
+            <a:ext cx="565172" cy="201424"/>
+          </a:xfrm>
+          <a:prstGeom prst="rightArrow">
+            <a:avLst/>
+          </a:prstGeom>
+          <a:solidFill>
+            <a:schemeClr val="tx1"/>
+          </a:solidFill>
+          <a:ln>
+            <a:noFill/>
+          </a:ln>
+        </p:spPr>
+        <p:style>
+          <a:lnRef idx="2">
+            <a:schemeClr val="accent1">
+              <a:shade val="15000"/>
+            </a:schemeClr>
+          </a:lnRef>
+          <a:fillRef idx="1">
+            <a:schemeClr val="accent1"/>
+          </a:fillRef>
+          <a:effectRef idx="0">
+            <a:schemeClr val="accent1"/>
+          </a:effectRef>
+          <a:fontRef idx="minor">
+            <a:schemeClr val="lt1"/>
+          </a:fontRef>
+        </p:style>
+        <p:txBody>
+          <a:bodyPr rtlCol="0" anchor="ctr"/>
+          <a:lstStyle/>
+          <a:p>
+            <a:pPr algn="ctr"/>
+            <a:endParaRPr lang="zh-TW" altLang="en-US"/>
+          </a:p>
+        </p:txBody>
+      </p:sp>
     </p:spTree>
     <p:extLst>
       <p:ext uri="{BB962C8B-B14F-4D97-AF65-F5344CB8AC3E}">
-        <p14:creationId xmlns:p14="http://schemas.microsoft.com/office/powerpoint/2010/main" val="1623628548"/>
+        <p14:creationId xmlns:p14="http://schemas.microsoft.com/office/powerpoint/2010/main" val="41390795"/>
       </p:ext>
     </p:extLst>
   </p:cSld>
@@ -15663,6 +16118,1771 @@
     <p:extLst>
       <p:ext uri="{BB962C8B-B14F-4D97-AF65-F5344CB8AC3E}">
         <p14:creationId xmlns:p14="http://schemas.microsoft.com/office/powerpoint/2010/main" val="294564067"/>
+      </p:ext>
+    </p:extLst>
+  </p:cSld>
+  <p:clrMapOvr>
+    <a:masterClrMapping/>
+  </p:clrMapOvr>
+</p:sld>
+</file>
+
+<file path=ppt/slides/slide20.xml><?xml version="1.0" encoding="utf-8"?>
+<p:sld xmlns:a="http://schemas.openxmlformats.org/drawingml/2006/main" xmlns:r="http://schemas.openxmlformats.org/officeDocument/2006/relationships" xmlns:p="http://schemas.openxmlformats.org/presentationml/2006/main">
+  <p:cSld>
+    <p:spTree>
+      <p:nvGrpSpPr>
+        <p:cNvPr id="1" name="">
+          <a:extLst>
+            <a:ext uri="{FF2B5EF4-FFF2-40B4-BE49-F238E27FC236}">
+              <a16:creationId xmlns:a16="http://schemas.microsoft.com/office/drawing/2014/main" id="{DC775256-6328-AD97-B7FF-2A380DC0E562}"/>
+            </a:ext>
+          </a:extLst>
+        </p:cNvPr>
+        <p:cNvGrpSpPr/>
+        <p:nvPr/>
+      </p:nvGrpSpPr>
+      <p:grpSpPr>
+        <a:xfrm>
+          <a:off x="0" y="0"/>
+          <a:ext cx="0" cy="0"/>
+          <a:chOff x="0" y="0"/>
+          <a:chExt cx="0" cy="0"/>
+        </a:xfrm>
+      </p:grpSpPr>
+      <p:sp>
+        <p:nvSpPr>
+          <p:cNvPr id="2" name="標題 1">
+            <a:extLst>
+              <a:ext uri="{FF2B5EF4-FFF2-40B4-BE49-F238E27FC236}">
+                <a16:creationId xmlns:a16="http://schemas.microsoft.com/office/drawing/2014/main" id="{6AFF4CAD-A6A7-17A8-EE70-A23536A6C7A0}"/>
+              </a:ext>
+            </a:extLst>
+          </p:cNvPr>
+          <p:cNvSpPr>
+            <a:spLocks noGrp="1"/>
+          </p:cNvSpPr>
+          <p:nvPr>
+            <p:ph type="title"/>
+          </p:nvPr>
+        </p:nvSpPr>
+        <p:spPr/>
+        <p:txBody>
+          <a:bodyPr>
+            <a:normAutofit/>
+          </a:bodyPr>
+          <a:lstStyle/>
+          <a:p>
+            <a:r>
+              <a:rPr lang="zh-TW" altLang="zh-TW" sz="4000" dirty="0"/>
+              <a:t>Cross-attention layer</a:t>
+            </a:r>
+            <a:endParaRPr lang="zh-TW" altLang="en-US" sz="4000" dirty="0"/>
+          </a:p>
+        </p:txBody>
+      </p:sp>
+      <p:sp>
+        <p:nvSpPr>
+          <p:cNvPr id="4" name="投影片編號版面配置區 3">
+            <a:extLst>
+              <a:ext uri="{FF2B5EF4-FFF2-40B4-BE49-F238E27FC236}">
+                <a16:creationId xmlns:a16="http://schemas.microsoft.com/office/drawing/2014/main" id="{C6BE5A0E-91AA-A25F-24DA-9B0143546935}"/>
+              </a:ext>
+            </a:extLst>
+          </p:cNvPr>
+          <p:cNvSpPr>
+            <a:spLocks noGrp="1"/>
+          </p:cNvSpPr>
+          <p:nvPr>
+            <p:ph type="sldNum" sz="quarter" idx="12"/>
+          </p:nvPr>
+        </p:nvSpPr>
+        <p:spPr/>
+        <p:txBody>
+          <a:bodyPr/>
+          <a:lstStyle/>
+          <a:p>
+            <a:fld id="{9427B4A2-F224-402A-B571-E032C14CF34B}" type="slidenum">
+              <a:rPr lang="zh-TW" altLang="en-US" sz="1600" smtClean="0"/>
+              <a:t>20</a:t>
+            </a:fld>
+            <a:endParaRPr lang="zh-TW" altLang="en-US" sz="1600" dirty="0"/>
+          </a:p>
+        </p:txBody>
+      </p:sp>
+      <p:cxnSp>
+        <p:nvCxnSpPr>
+          <p:cNvPr id="8" name="直線接點 7">
+            <a:extLst>
+              <a:ext uri="{FF2B5EF4-FFF2-40B4-BE49-F238E27FC236}">
+                <a16:creationId xmlns:a16="http://schemas.microsoft.com/office/drawing/2014/main" id="{1AA5E50D-2373-9749-7CF0-0AEA93C38DCE}"/>
+              </a:ext>
+            </a:extLst>
+          </p:cNvPr>
+          <p:cNvCxnSpPr>
+            <a:cxnSpLocks/>
+          </p:cNvCxnSpPr>
+          <p:nvPr/>
+        </p:nvCxnSpPr>
+        <p:spPr>
+          <a:xfrm>
+            <a:off x="10520218" y="637308"/>
+            <a:ext cx="1376219" cy="0"/>
+          </a:xfrm>
+          <a:prstGeom prst="line">
+            <a:avLst/>
+          </a:prstGeom>
+        </p:spPr>
+        <p:style>
+          <a:lnRef idx="2">
+            <a:schemeClr val="accent1"/>
+          </a:lnRef>
+          <a:fillRef idx="0">
+            <a:schemeClr val="accent1"/>
+          </a:fillRef>
+          <a:effectRef idx="1">
+            <a:schemeClr val="accent1"/>
+          </a:effectRef>
+          <a:fontRef idx="minor">
+            <a:schemeClr val="tx1"/>
+          </a:fontRef>
+        </p:style>
+      </p:cxnSp>
+      <p:sp>
+        <p:nvSpPr>
+          <p:cNvPr id="10" name="文字方塊 9">
+            <a:extLst>
+              <a:ext uri="{FF2B5EF4-FFF2-40B4-BE49-F238E27FC236}">
+                <a16:creationId xmlns:a16="http://schemas.microsoft.com/office/drawing/2014/main" id="{850E4794-5FF6-FC38-7317-57E897C1428E}"/>
+              </a:ext>
+            </a:extLst>
+          </p:cNvPr>
+          <p:cNvSpPr txBox="1"/>
+          <p:nvPr/>
+        </p:nvSpPr>
+        <p:spPr>
+          <a:xfrm>
+            <a:off x="10520217" y="249937"/>
+            <a:ext cx="1376219" cy="369332"/>
+          </a:xfrm>
+          <a:prstGeom prst="rect">
+            <a:avLst/>
+          </a:prstGeom>
+          <a:noFill/>
+        </p:spPr>
+        <p:txBody>
+          <a:bodyPr wrap="square" rtlCol="0">
+            <a:spAutoFit/>
+          </a:bodyPr>
+          <a:lstStyle/>
+          <a:p>
+            <a:pPr algn="ctr"/>
+            <a:r>
+              <a:rPr lang="en-US" altLang="zh-TW" dirty="0"/>
+              <a:t>Methods</a:t>
+            </a:r>
+            <a:endParaRPr lang="zh-TW" altLang="en-US" dirty="0"/>
+          </a:p>
+        </p:txBody>
+      </p:sp>
+      <p:sp>
+        <p:nvSpPr>
+          <p:cNvPr id="7" name="文字方塊 6">
+            <a:extLst>
+              <a:ext uri="{FF2B5EF4-FFF2-40B4-BE49-F238E27FC236}">
+                <a16:creationId xmlns:a16="http://schemas.microsoft.com/office/drawing/2014/main" id="{15109560-9503-0041-366E-E7F13F83390B}"/>
+              </a:ext>
+            </a:extLst>
+          </p:cNvPr>
+          <p:cNvSpPr txBox="1"/>
+          <p:nvPr/>
+        </p:nvSpPr>
+        <p:spPr>
+          <a:xfrm>
+            <a:off x="380874" y="6133902"/>
+            <a:ext cx="4452357" cy="276999"/>
+          </a:xfrm>
+          <a:prstGeom prst="rect">
+            <a:avLst/>
+          </a:prstGeom>
+          <a:noFill/>
+        </p:spPr>
+        <p:txBody>
+          <a:bodyPr wrap="square">
+            <a:spAutoFit/>
+          </a:bodyPr>
+          <a:lstStyle/>
+          <a:p>
+            <a:r>
+              <a:rPr lang="zh-TW" altLang="zh-TW" sz="1200" b="0" i="0" dirty="0">
+                <a:solidFill>
+                  <a:schemeClr val="tx1"/>
+                </a:solidFill>
+                <a:effectLst/>
+                <a:latin typeface="+mn-lt"/>
+              </a:rPr>
+              <a:t>Bui, H., &amp; Le, B. (2025). </a:t>
+            </a:r>
+            <a:r>
+              <a:rPr lang="zh-TW" altLang="zh-TW" sz="1200" b="0" i="1" dirty="0">
+                <a:solidFill>
+                  <a:schemeClr val="tx1"/>
+                </a:solidFill>
+                <a:effectLst/>
+                <a:latin typeface="+mn-lt"/>
+              </a:rPr>
+              <a:t>Expert Systems with Applications</a:t>
+            </a:r>
+            <a:r>
+              <a:rPr lang="zh-TW" altLang="zh-TW" sz="1200" b="0" i="0" dirty="0">
+                <a:solidFill>
+                  <a:schemeClr val="tx1"/>
+                </a:solidFill>
+                <a:effectLst/>
+                <a:latin typeface="+mn-lt"/>
+              </a:rPr>
+              <a:t>, 130220.</a:t>
+            </a:r>
+            <a:endParaRPr lang="zh-TW" altLang="en-US" sz="1200" dirty="0"/>
+          </a:p>
+        </p:txBody>
+      </p:sp>
+      <p:pic>
+        <p:nvPicPr>
+          <p:cNvPr id="5" name="圖片 4">
+            <a:extLst>
+              <a:ext uri="{FF2B5EF4-FFF2-40B4-BE49-F238E27FC236}">
+                <a16:creationId xmlns:a16="http://schemas.microsoft.com/office/drawing/2014/main" id="{9CC5A149-692F-B726-DFB9-879F9E928F36}"/>
+              </a:ext>
+            </a:extLst>
+          </p:cNvPr>
+          <p:cNvPicPr>
+            <a:picLocks noChangeAspect="1"/>
+          </p:cNvPicPr>
+          <p:nvPr/>
+        </p:nvPicPr>
+        <p:blipFill>
+          <a:blip r:embed="rId2"/>
+          <a:stretch>
+            <a:fillRect/>
+          </a:stretch>
+        </p:blipFill>
+        <p:spPr>
+          <a:xfrm>
+            <a:off x="6632340" y="2206741"/>
+            <a:ext cx="2833549" cy="455892"/>
+          </a:xfrm>
+          <a:prstGeom prst="rect">
+            <a:avLst/>
+          </a:prstGeom>
+        </p:spPr>
+      </p:pic>
+      <p:pic>
+        <p:nvPicPr>
+          <p:cNvPr id="9" name="圖片 8">
+            <a:extLst>
+              <a:ext uri="{FF2B5EF4-FFF2-40B4-BE49-F238E27FC236}">
+                <a16:creationId xmlns:a16="http://schemas.microsoft.com/office/drawing/2014/main" id="{18253F37-B5A9-E0CA-0342-1C2D1D78F306}"/>
+              </a:ext>
+            </a:extLst>
+          </p:cNvPr>
+          <p:cNvPicPr>
+            <a:picLocks noChangeAspect="1"/>
+          </p:cNvPicPr>
+          <p:nvPr/>
+        </p:nvPicPr>
+        <p:blipFill>
+          <a:blip r:embed="rId3"/>
+          <a:stretch>
+            <a:fillRect/>
+          </a:stretch>
+        </p:blipFill>
+        <p:spPr>
+          <a:xfrm>
+            <a:off x="6714107" y="2668923"/>
+            <a:ext cx="2156954" cy="343152"/>
+          </a:xfrm>
+          <a:prstGeom prst="rect">
+            <a:avLst/>
+          </a:prstGeom>
+        </p:spPr>
+      </p:pic>
+      <p:pic>
+        <p:nvPicPr>
+          <p:cNvPr id="12" name="圖片 11">
+            <a:extLst>
+              <a:ext uri="{FF2B5EF4-FFF2-40B4-BE49-F238E27FC236}">
+                <a16:creationId xmlns:a16="http://schemas.microsoft.com/office/drawing/2014/main" id="{7D675DC8-5CB6-F1EB-F49D-87FA5BE4F82C}"/>
+              </a:ext>
+            </a:extLst>
+          </p:cNvPr>
+          <p:cNvPicPr>
+            <a:picLocks noChangeAspect="1"/>
+          </p:cNvPicPr>
+          <p:nvPr/>
+        </p:nvPicPr>
+        <p:blipFill>
+          <a:blip r:embed="rId4"/>
+          <a:stretch>
+            <a:fillRect/>
+          </a:stretch>
+        </p:blipFill>
+        <p:spPr>
+          <a:xfrm>
+            <a:off x="6551027" y="3155008"/>
+            <a:ext cx="5253969" cy="1173530"/>
+          </a:xfrm>
+          <a:prstGeom prst="rect">
+            <a:avLst/>
+          </a:prstGeom>
+        </p:spPr>
+      </p:pic>
+      <p:pic>
+        <p:nvPicPr>
+          <p:cNvPr id="14" name="圖片 13">
+            <a:extLst>
+              <a:ext uri="{FF2B5EF4-FFF2-40B4-BE49-F238E27FC236}">
+                <a16:creationId xmlns:a16="http://schemas.microsoft.com/office/drawing/2014/main" id="{93B08538-6C94-9F5B-AE64-8F0742937C8B}"/>
+              </a:ext>
+            </a:extLst>
+          </p:cNvPr>
+          <p:cNvPicPr>
+            <a:picLocks noChangeAspect="1"/>
+          </p:cNvPicPr>
+          <p:nvPr/>
+        </p:nvPicPr>
+        <p:blipFill>
+          <a:blip r:embed="rId5"/>
+          <a:stretch>
+            <a:fillRect/>
+          </a:stretch>
+        </p:blipFill>
+        <p:spPr>
+          <a:xfrm>
+            <a:off x="507558" y="1533374"/>
+            <a:ext cx="5859760" cy="4081042"/>
+          </a:xfrm>
+          <a:prstGeom prst="rect">
+            <a:avLst/>
+          </a:prstGeom>
+        </p:spPr>
+      </p:pic>
+      <p:sp>
+        <p:nvSpPr>
+          <p:cNvPr id="20" name="文字方塊 19">
+            <a:extLst>
+              <a:ext uri="{FF2B5EF4-FFF2-40B4-BE49-F238E27FC236}">
+                <a16:creationId xmlns:a16="http://schemas.microsoft.com/office/drawing/2014/main" id="{EE7A9158-4B54-9656-F022-4FFEB3178166}"/>
+              </a:ext>
+            </a:extLst>
+          </p:cNvPr>
+          <p:cNvSpPr txBox="1"/>
+          <p:nvPr/>
+        </p:nvSpPr>
+        <p:spPr>
+          <a:xfrm>
+            <a:off x="6632340" y="4361412"/>
+            <a:ext cx="3593685" cy="1077218"/>
+          </a:xfrm>
+          <a:prstGeom prst="rect">
+            <a:avLst/>
+          </a:prstGeom>
+          <a:noFill/>
+        </p:spPr>
+        <p:txBody>
+          <a:bodyPr wrap="square" rtlCol="0">
+            <a:spAutoFit/>
+          </a:bodyPr>
+          <a:lstStyle/>
+          <a:p>
+            <a:r>
+              <a:rPr lang="en-US" altLang="zh-TW" sz="1600" i="1" dirty="0"/>
+              <a:t>Q</a:t>
+            </a:r>
+            <a:r>
+              <a:rPr lang="en-US" altLang="zh-TW" sz="1100" i="1" dirty="0"/>
+              <a:t>l</a:t>
+            </a:r>
+            <a:r>
+              <a:rPr lang="en-US" altLang="zh-TW" sz="1600" i="1" dirty="0"/>
+              <a:t> </a:t>
+            </a:r>
+            <a:r>
+              <a:rPr lang="en-US" altLang="zh-TW" sz="1600" dirty="0"/>
+              <a:t>:</a:t>
+            </a:r>
+            <a:r>
+              <a:rPr lang="zh-TW" altLang="zh-TW" sz="1600" dirty="0"/>
+              <a:t> </a:t>
+            </a:r>
+            <a:r>
+              <a:rPr lang="zh-TW" altLang="zh-TW" sz="1200" dirty="0"/>
+              <a:t>Query obtained from the local attention layer</a:t>
+            </a:r>
+            <a:endParaRPr lang="en-US" altLang="zh-TW" sz="1600" dirty="0"/>
+          </a:p>
+          <a:p>
+            <a:r>
+              <a:rPr lang="en-US" altLang="zh-TW" sz="1600" i="1" dirty="0"/>
+              <a:t>K</a:t>
+            </a:r>
+            <a:r>
+              <a:rPr lang="en-US" altLang="zh-TW" sz="1100" i="1" dirty="0"/>
+              <a:t>g</a:t>
+            </a:r>
+            <a:r>
+              <a:rPr lang="en-US" altLang="zh-TW" sz="1600" i="1" dirty="0"/>
+              <a:t> : </a:t>
+            </a:r>
+            <a:r>
+              <a:rPr lang="en-US" altLang="zh-TW" sz="1200" dirty="0"/>
+              <a:t>Key</a:t>
+            </a:r>
+            <a:r>
+              <a:rPr lang="zh-TW" altLang="zh-TW" sz="1200" dirty="0"/>
+              <a:t> obtained from the </a:t>
+            </a:r>
+            <a:r>
+              <a:rPr lang="en-US" altLang="zh-TW" sz="1200" dirty="0"/>
+              <a:t>global</a:t>
+            </a:r>
+            <a:r>
+              <a:rPr lang="zh-TW" altLang="zh-TW" sz="1200" dirty="0"/>
+              <a:t> attention layer</a:t>
+            </a:r>
+            <a:endParaRPr lang="en-US" altLang="zh-TW" sz="1600" dirty="0"/>
+          </a:p>
+          <a:p>
+            <a:r>
+              <a:rPr lang="en-US" altLang="zh-TW" sz="1600" i="1" dirty="0"/>
+              <a:t>V</a:t>
+            </a:r>
+            <a:r>
+              <a:rPr lang="en-US" altLang="zh-TW" sz="1100" i="1" dirty="0"/>
+              <a:t>g</a:t>
+            </a:r>
+            <a:r>
+              <a:rPr lang="en-US" altLang="zh-TW" sz="1600" i="1" dirty="0"/>
+              <a:t> : </a:t>
+            </a:r>
+            <a:r>
+              <a:rPr lang="en-US" altLang="zh-TW" sz="1200" dirty="0"/>
+              <a:t>Value</a:t>
+            </a:r>
+            <a:r>
+              <a:rPr lang="zh-TW" altLang="zh-TW" sz="1200" dirty="0"/>
+              <a:t> obtained from the </a:t>
+            </a:r>
+            <a:r>
+              <a:rPr lang="en-US" altLang="zh-TW" sz="1200" dirty="0"/>
+              <a:t>global</a:t>
+            </a:r>
+            <a:r>
+              <a:rPr lang="zh-TW" altLang="zh-TW" sz="1200" dirty="0"/>
+              <a:t> attention layer</a:t>
+            </a:r>
+            <a:endParaRPr lang="en-US" altLang="zh-TW" sz="1600" dirty="0"/>
+          </a:p>
+          <a:p>
+            <a:r>
+              <a:rPr lang="en-US" altLang="zh-TW" sz="1600" i="1" dirty="0"/>
+              <a:t>W </a:t>
+            </a:r>
+            <a:r>
+              <a:rPr lang="en-US" altLang="zh-TW" sz="1200" dirty="0"/>
+              <a:t>: </a:t>
+            </a:r>
+            <a:r>
+              <a:rPr lang="en-US" altLang="zh-TW" sz="1600" dirty="0"/>
+              <a:t> </a:t>
+            </a:r>
+            <a:r>
+              <a:rPr lang="zh-TW" altLang="zh-TW" sz="1200" dirty="0"/>
+              <a:t>Matrix of a linear transformation</a:t>
+            </a:r>
+          </a:p>
+        </p:txBody>
+      </p:sp>
+      <p:sp>
+        <p:nvSpPr>
+          <p:cNvPr id="22" name="矩形 21">
+            <a:extLst>
+              <a:ext uri="{FF2B5EF4-FFF2-40B4-BE49-F238E27FC236}">
+                <a16:creationId xmlns:a16="http://schemas.microsoft.com/office/drawing/2014/main" id="{2A864B92-BE93-B13A-20AA-7CE744276D13}"/>
+              </a:ext>
+            </a:extLst>
+          </p:cNvPr>
+          <p:cNvSpPr/>
+          <p:nvPr/>
+        </p:nvSpPr>
+        <p:spPr>
+          <a:xfrm>
+            <a:off x="6551027" y="1690688"/>
+            <a:ext cx="5432331" cy="3855127"/>
+          </a:xfrm>
+          <a:prstGeom prst="rect">
+            <a:avLst/>
+          </a:prstGeom>
+          <a:noFill/>
+          <a:ln w="38100">
+            <a:solidFill>
+              <a:schemeClr val="tx1"/>
+            </a:solidFill>
+          </a:ln>
+        </p:spPr>
+        <p:style>
+          <a:lnRef idx="2">
+            <a:schemeClr val="accent1">
+              <a:shade val="15000"/>
+            </a:schemeClr>
+          </a:lnRef>
+          <a:fillRef idx="1">
+            <a:schemeClr val="accent1"/>
+          </a:fillRef>
+          <a:effectRef idx="0">
+            <a:schemeClr val="accent1"/>
+          </a:effectRef>
+          <a:fontRef idx="minor">
+            <a:schemeClr val="lt1"/>
+          </a:fontRef>
+        </p:style>
+        <p:txBody>
+          <a:bodyPr rtlCol="0" anchor="ctr"/>
+          <a:lstStyle/>
+          <a:p>
+            <a:pPr algn="ctr"/>
+            <a:endParaRPr lang="zh-TW" altLang="en-US"/>
+          </a:p>
+        </p:txBody>
+      </p:sp>
+      <p:sp>
+        <p:nvSpPr>
+          <p:cNvPr id="24" name="文字方塊 23">
+            <a:extLst>
+              <a:ext uri="{FF2B5EF4-FFF2-40B4-BE49-F238E27FC236}">
+                <a16:creationId xmlns:a16="http://schemas.microsoft.com/office/drawing/2014/main" id="{422EE917-6E99-2D1D-F1FE-9097B46EC798}"/>
+              </a:ext>
+            </a:extLst>
+          </p:cNvPr>
+          <p:cNvSpPr txBox="1"/>
+          <p:nvPr/>
+        </p:nvSpPr>
+        <p:spPr>
+          <a:xfrm>
+            <a:off x="6632340" y="1773757"/>
+            <a:ext cx="3070040" cy="400110"/>
+          </a:xfrm>
+          <a:prstGeom prst="rect">
+            <a:avLst/>
+          </a:prstGeom>
+          <a:noFill/>
+        </p:spPr>
+        <p:txBody>
+          <a:bodyPr wrap="square">
+            <a:spAutoFit/>
+          </a:bodyPr>
+          <a:lstStyle/>
+          <a:p>
+            <a:r>
+              <a:rPr lang="en-US" altLang="zh-TW" sz="2000" dirty="0"/>
+              <a:t>Step 2 &amp; 3:</a:t>
+            </a:r>
+            <a:endParaRPr lang="zh-TW" altLang="en-US" sz="2000" dirty="0"/>
+          </a:p>
+        </p:txBody>
+      </p:sp>
+      <p:cxnSp>
+        <p:nvCxnSpPr>
+          <p:cNvPr id="26" name="直線接點 25">
+            <a:extLst>
+              <a:ext uri="{FF2B5EF4-FFF2-40B4-BE49-F238E27FC236}">
+                <a16:creationId xmlns:a16="http://schemas.microsoft.com/office/drawing/2014/main" id="{095994B1-9FFE-7BE1-01D5-3116B1071FE8}"/>
+              </a:ext>
+            </a:extLst>
+          </p:cNvPr>
+          <p:cNvCxnSpPr>
+            <a:cxnSpLocks/>
+          </p:cNvCxnSpPr>
+          <p:nvPr/>
+        </p:nvCxnSpPr>
+        <p:spPr>
+          <a:xfrm>
+            <a:off x="9702380" y="3968007"/>
+            <a:ext cx="184423" cy="271258"/>
+          </a:xfrm>
+          <a:prstGeom prst="line">
+            <a:avLst/>
+          </a:prstGeom>
+          <a:ln>
+            <a:solidFill>
+              <a:srgbClr val="FF0000"/>
+            </a:solidFill>
+          </a:ln>
+        </p:spPr>
+        <p:style>
+          <a:lnRef idx="2">
+            <a:schemeClr val="accent1"/>
+          </a:lnRef>
+          <a:fillRef idx="0">
+            <a:schemeClr val="accent1"/>
+          </a:fillRef>
+          <a:effectRef idx="1">
+            <a:schemeClr val="accent1"/>
+          </a:effectRef>
+          <a:fontRef idx="minor">
+            <a:schemeClr val="tx1"/>
+          </a:fontRef>
+        </p:style>
+      </p:cxnSp>
+      <p:cxnSp>
+        <p:nvCxnSpPr>
+          <p:cNvPr id="29" name="直線接點 28">
+            <a:extLst>
+              <a:ext uri="{FF2B5EF4-FFF2-40B4-BE49-F238E27FC236}">
+                <a16:creationId xmlns:a16="http://schemas.microsoft.com/office/drawing/2014/main" id="{71CD7A1B-E4A6-1AF4-57F4-FDCB1A9600DB}"/>
+              </a:ext>
+            </a:extLst>
+          </p:cNvPr>
+          <p:cNvCxnSpPr>
+            <a:cxnSpLocks/>
+          </p:cNvCxnSpPr>
+          <p:nvPr/>
+        </p:nvCxnSpPr>
+        <p:spPr>
+          <a:xfrm flipH="1">
+            <a:off x="9692434" y="3968007"/>
+            <a:ext cx="194369" cy="278494"/>
+          </a:xfrm>
+          <a:prstGeom prst="line">
+            <a:avLst/>
+          </a:prstGeom>
+          <a:ln>
+            <a:solidFill>
+              <a:srgbClr val="FF0000"/>
+            </a:solidFill>
+          </a:ln>
+        </p:spPr>
+        <p:style>
+          <a:lnRef idx="2">
+            <a:schemeClr val="accent1"/>
+          </a:lnRef>
+          <a:fillRef idx="0">
+            <a:schemeClr val="accent1"/>
+          </a:fillRef>
+          <a:effectRef idx="1">
+            <a:schemeClr val="accent1"/>
+          </a:effectRef>
+          <a:fontRef idx="minor">
+            <a:schemeClr val="tx1"/>
+          </a:fontRef>
+        </p:style>
+      </p:cxnSp>
+      <p:sp>
+        <p:nvSpPr>
+          <p:cNvPr id="35" name="文字方塊 34">
+            <a:extLst>
+              <a:ext uri="{FF2B5EF4-FFF2-40B4-BE49-F238E27FC236}">
+                <a16:creationId xmlns:a16="http://schemas.microsoft.com/office/drawing/2014/main" id="{7E6A7584-D5B8-46DA-DB67-2515667B43FF}"/>
+              </a:ext>
+            </a:extLst>
+          </p:cNvPr>
+          <p:cNvSpPr txBox="1"/>
+          <p:nvPr/>
+        </p:nvSpPr>
+        <p:spPr>
+          <a:xfrm>
+            <a:off x="5095260" y="5669056"/>
+            <a:ext cx="2263512" cy="1107996"/>
+          </a:xfrm>
+          <a:prstGeom prst="rect">
+            <a:avLst/>
+          </a:prstGeom>
+          <a:noFill/>
+        </p:spPr>
+        <p:txBody>
+          <a:bodyPr wrap="square" rtlCol="0">
+            <a:spAutoFit/>
+          </a:bodyPr>
+          <a:lstStyle/>
+          <a:p>
+            <a:r>
+              <a:rPr lang="en-US" altLang="zh-TW" sz="1600" dirty="0"/>
+              <a:t>mm : </a:t>
+            </a:r>
+            <a:r>
+              <a:rPr lang="zh-TW" altLang="zh-TW" sz="1200" dirty="0"/>
+              <a:t>matrix multiplication</a:t>
+            </a:r>
+            <a:endParaRPr lang="en-US" altLang="zh-TW" sz="1200" dirty="0"/>
+          </a:p>
+          <a:p>
+            <a:r>
+              <a:rPr lang="en-US" altLang="zh-TW" sz="1600" i="1" dirty="0"/>
+              <a:t>b</a:t>
+            </a:r>
+            <a:r>
+              <a:rPr lang="en-US" altLang="zh-TW" sz="1600" dirty="0"/>
+              <a:t>:</a:t>
+            </a:r>
+            <a:r>
+              <a:rPr lang="zh-TW" altLang="zh-TW" sz="1600" dirty="0"/>
+              <a:t> </a:t>
+            </a:r>
+            <a:r>
+              <a:rPr lang="en-US" altLang="zh-TW" sz="1200" dirty="0"/>
+              <a:t>Batch size</a:t>
+            </a:r>
+            <a:endParaRPr lang="zh-TW" altLang="zh-TW" sz="1200" dirty="0"/>
+          </a:p>
+          <a:p>
+            <a:r>
+              <a:rPr lang="en-US" altLang="zh-TW" sz="1600" i="1" dirty="0"/>
+              <a:t>n : </a:t>
+            </a:r>
+            <a:r>
+              <a:rPr lang="zh-TW" altLang="zh-TW" sz="1200" dirty="0"/>
+              <a:t>Number of features</a:t>
+            </a:r>
+            <a:endParaRPr lang="en-US" altLang="zh-TW" sz="1600" dirty="0"/>
+          </a:p>
+          <a:p>
+            <a:r>
+              <a:rPr lang="en-US" altLang="zh-TW" sz="1600" i="1" dirty="0"/>
+              <a:t>d : </a:t>
+            </a:r>
+            <a:r>
+              <a:rPr lang="zh-TW" altLang="zh-TW" sz="1200" dirty="0"/>
+              <a:t>embedding dimension</a:t>
+            </a:r>
+            <a:endParaRPr lang="zh-TW" altLang="zh-TW" dirty="0"/>
+          </a:p>
+        </p:txBody>
+      </p:sp>
+    </p:spTree>
+    <p:extLst>
+      <p:ext uri="{BB962C8B-B14F-4D97-AF65-F5344CB8AC3E}">
+        <p14:creationId xmlns:p14="http://schemas.microsoft.com/office/powerpoint/2010/main" val="1623628548"/>
+      </p:ext>
+    </p:extLst>
+  </p:cSld>
+  <p:clrMapOvr>
+    <a:masterClrMapping/>
+  </p:clrMapOvr>
+</p:sld>
+</file>
+
+<file path=ppt/slides/slide21.xml><?xml version="1.0" encoding="utf-8"?>
+<p:sld xmlns:a="http://schemas.openxmlformats.org/drawingml/2006/main" xmlns:r="http://schemas.openxmlformats.org/officeDocument/2006/relationships" xmlns:p="http://schemas.openxmlformats.org/presentationml/2006/main">
+  <p:cSld>
+    <p:spTree>
+      <p:nvGrpSpPr>
+        <p:cNvPr id="1" name="">
+          <a:extLst>
+            <a:ext uri="{FF2B5EF4-FFF2-40B4-BE49-F238E27FC236}">
+              <a16:creationId xmlns:a16="http://schemas.microsoft.com/office/drawing/2014/main" id="{E4E88793-6CBF-2FA9-D0E6-44FBB1FA8C4A}"/>
+            </a:ext>
+          </a:extLst>
+        </p:cNvPr>
+        <p:cNvGrpSpPr/>
+        <p:nvPr/>
+      </p:nvGrpSpPr>
+      <p:grpSpPr>
+        <a:xfrm>
+          <a:off x="0" y="0"/>
+          <a:ext cx="0" cy="0"/>
+          <a:chOff x="0" y="0"/>
+          <a:chExt cx="0" cy="0"/>
+        </a:xfrm>
+      </p:grpSpPr>
+      <p:sp>
+        <p:nvSpPr>
+          <p:cNvPr id="2" name="標題 1">
+            <a:extLst>
+              <a:ext uri="{FF2B5EF4-FFF2-40B4-BE49-F238E27FC236}">
+                <a16:creationId xmlns:a16="http://schemas.microsoft.com/office/drawing/2014/main" id="{57EE9453-74F9-6056-4B53-CACB7FDD9A50}"/>
+              </a:ext>
+            </a:extLst>
+          </p:cNvPr>
+          <p:cNvSpPr>
+            <a:spLocks noGrp="1"/>
+          </p:cNvSpPr>
+          <p:nvPr>
+            <p:ph type="title"/>
+          </p:nvPr>
+        </p:nvSpPr>
+        <p:spPr/>
+        <p:txBody>
+          <a:bodyPr>
+            <a:normAutofit/>
+          </a:bodyPr>
+          <a:lstStyle/>
+          <a:p>
+            <a:r>
+              <a:rPr lang="zh-TW" altLang="zh-TW" sz="4000" dirty="0"/>
+              <a:t>Cross-attention layer</a:t>
+            </a:r>
+            <a:r>
+              <a:rPr lang="en-US" altLang="zh-TW" sz="4000" dirty="0"/>
+              <a:t> (2)</a:t>
+            </a:r>
+            <a:endParaRPr lang="zh-TW" altLang="en-US" sz="4000" dirty="0"/>
+          </a:p>
+        </p:txBody>
+      </p:sp>
+      <p:sp>
+        <p:nvSpPr>
+          <p:cNvPr id="4" name="投影片編號版面配置區 3">
+            <a:extLst>
+              <a:ext uri="{FF2B5EF4-FFF2-40B4-BE49-F238E27FC236}">
+                <a16:creationId xmlns:a16="http://schemas.microsoft.com/office/drawing/2014/main" id="{C973A711-7DFC-4E25-323F-3021EFFCF6E5}"/>
+              </a:ext>
+            </a:extLst>
+          </p:cNvPr>
+          <p:cNvSpPr>
+            <a:spLocks noGrp="1"/>
+          </p:cNvSpPr>
+          <p:nvPr>
+            <p:ph type="sldNum" sz="quarter" idx="12"/>
+          </p:nvPr>
+        </p:nvSpPr>
+        <p:spPr/>
+        <p:txBody>
+          <a:bodyPr/>
+          <a:lstStyle/>
+          <a:p>
+            <a:fld id="{9427B4A2-F224-402A-B571-E032C14CF34B}" type="slidenum">
+              <a:rPr lang="zh-TW" altLang="en-US" sz="1600" smtClean="0"/>
+              <a:t>21</a:t>
+            </a:fld>
+            <a:endParaRPr lang="zh-TW" altLang="en-US" sz="1600" dirty="0"/>
+          </a:p>
+        </p:txBody>
+      </p:sp>
+      <p:cxnSp>
+        <p:nvCxnSpPr>
+          <p:cNvPr id="8" name="直線接點 7">
+            <a:extLst>
+              <a:ext uri="{FF2B5EF4-FFF2-40B4-BE49-F238E27FC236}">
+                <a16:creationId xmlns:a16="http://schemas.microsoft.com/office/drawing/2014/main" id="{8F36055E-0DCB-C4B9-AC08-394F80E0E316}"/>
+              </a:ext>
+            </a:extLst>
+          </p:cNvPr>
+          <p:cNvCxnSpPr>
+            <a:cxnSpLocks/>
+          </p:cNvCxnSpPr>
+          <p:nvPr/>
+        </p:nvCxnSpPr>
+        <p:spPr>
+          <a:xfrm>
+            <a:off x="10520218" y="637308"/>
+            <a:ext cx="1376219" cy="0"/>
+          </a:xfrm>
+          <a:prstGeom prst="line">
+            <a:avLst/>
+          </a:prstGeom>
+        </p:spPr>
+        <p:style>
+          <a:lnRef idx="2">
+            <a:schemeClr val="accent1"/>
+          </a:lnRef>
+          <a:fillRef idx="0">
+            <a:schemeClr val="accent1"/>
+          </a:fillRef>
+          <a:effectRef idx="1">
+            <a:schemeClr val="accent1"/>
+          </a:effectRef>
+          <a:fontRef idx="minor">
+            <a:schemeClr val="tx1"/>
+          </a:fontRef>
+        </p:style>
+      </p:cxnSp>
+      <p:sp>
+        <p:nvSpPr>
+          <p:cNvPr id="10" name="文字方塊 9">
+            <a:extLst>
+              <a:ext uri="{FF2B5EF4-FFF2-40B4-BE49-F238E27FC236}">
+                <a16:creationId xmlns:a16="http://schemas.microsoft.com/office/drawing/2014/main" id="{8700C510-A948-EF1B-3875-DBD49BA8F9D3}"/>
+              </a:ext>
+            </a:extLst>
+          </p:cNvPr>
+          <p:cNvSpPr txBox="1"/>
+          <p:nvPr/>
+        </p:nvSpPr>
+        <p:spPr>
+          <a:xfrm>
+            <a:off x="10520217" y="249937"/>
+            <a:ext cx="1376219" cy="369332"/>
+          </a:xfrm>
+          <a:prstGeom prst="rect">
+            <a:avLst/>
+          </a:prstGeom>
+          <a:noFill/>
+        </p:spPr>
+        <p:txBody>
+          <a:bodyPr wrap="square" rtlCol="0">
+            <a:spAutoFit/>
+          </a:bodyPr>
+          <a:lstStyle/>
+          <a:p>
+            <a:pPr algn="ctr"/>
+            <a:r>
+              <a:rPr lang="en-US" altLang="zh-TW" dirty="0"/>
+              <a:t>Methods</a:t>
+            </a:r>
+            <a:endParaRPr lang="zh-TW" altLang="en-US" dirty="0"/>
+          </a:p>
+        </p:txBody>
+      </p:sp>
+      <p:sp>
+        <p:nvSpPr>
+          <p:cNvPr id="7" name="文字方塊 6">
+            <a:extLst>
+              <a:ext uri="{FF2B5EF4-FFF2-40B4-BE49-F238E27FC236}">
+                <a16:creationId xmlns:a16="http://schemas.microsoft.com/office/drawing/2014/main" id="{A64BC2AD-604A-E752-6CB8-2AAEC4C74FDA}"/>
+              </a:ext>
+            </a:extLst>
+          </p:cNvPr>
+          <p:cNvSpPr txBox="1"/>
+          <p:nvPr/>
+        </p:nvSpPr>
+        <p:spPr>
+          <a:xfrm>
+            <a:off x="380874" y="6133902"/>
+            <a:ext cx="4452357" cy="276999"/>
+          </a:xfrm>
+          <a:prstGeom prst="rect">
+            <a:avLst/>
+          </a:prstGeom>
+          <a:noFill/>
+        </p:spPr>
+        <p:txBody>
+          <a:bodyPr wrap="square">
+            <a:spAutoFit/>
+          </a:bodyPr>
+          <a:lstStyle/>
+          <a:p>
+            <a:r>
+              <a:rPr lang="zh-TW" altLang="zh-TW" sz="1200" b="0" i="0" dirty="0">
+                <a:solidFill>
+                  <a:schemeClr val="tx1"/>
+                </a:solidFill>
+                <a:effectLst/>
+                <a:latin typeface="+mn-lt"/>
+              </a:rPr>
+              <a:t>Bui, H., &amp; Le, B. (2025). </a:t>
+            </a:r>
+            <a:r>
+              <a:rPr lang="zh-TW" altLang="zh-TW" sz="1200" b="0" i="1" dirty="0">
+                <a:solidFill>
+                  <a:schemeClr val="tx1"/>
+                </a:solidFill>
+                <a:effectLst/>
+                <a:latin typeface="+mn-lt"/>
+              </a:rPr>
+              <a:t>Expert Systems with Applications</a:t>
+            </a:r>
+            <a:r>
+              <a:rPr lang="zh-TW" altLang="zh-TW" sz="1200" b="0" i="0" dirty="0">
+                <a:solidFill>
+                  <a:schemeClr val="tx1"/>
+                </a:solidFill>
+                <a:effectLst/>
+                <a:latin typeface="+mn-lt"/>
+              </a:rPr>
+              <a:t>, 130220.</a:t>
+            </a:r>
+            <a:endParaRPr lang="zh-TW" altLang="en-US" sz="1200" dirty="0"/>
+          </a:p>
+        </p:txBody>
+      </p:sp>
+      <p:pic>
+        <p:nvPicPr>
+          <p:cNvPr id="6" name="圖片 5">
+            <a:extLst>
+              <a:ext uri="{FF2B5EF4-FFF2-40B4-BE49-F238E27FC236}">
+                <a16:creationId xmlns:a16="http://schemas.microsoft.com/office/drawing/2014/main" id="{5FAB6E5B-6086-E1FA-16A0-B79C9C151FEF}"/>
+              </a:ext>
+            </a:extLst>
+          </p:cNvPr>
+          <p:cNvPicPr>
+            <a:picLocks noChangeAspect="1"/>
+          </p:cNvPicPr>
+          <p:nvPr/>
+        </p:nvPicPr>
+        <p:blipFill>
+          <a:blip r:embed="rId2"/>
+          <a:stretch>
+            <a:fillRect/>
+          </a:stretch>
+        </p:blipFill>
+        <p:spPr>
+          <a:xfrm>
+            <a:off x="838200" y="2562184"/>
+            <a:ext cx="5836714" cy="2253886"/>
+          </a:xfrm>
+          <a:prstGeom prst="rect">
+            <a:avLst/>
+          </a:prstGeom>
+        </p:spPr>
+      </p:pic>
+      <p:pic>
+        <p:nvPicPr>
+          <p:cNvPr id="13" name="圖片 12">
+            <a:extLst>
+              <a:ext uri="{FF2B5EF4-FFF2-40B4-BE49-F238E27FC236}">
+                <a16:creationId xmlns:a16="http://schemas.microsoft.com/office/drawing/2014/main" id="{01CF1F83-2D8C-F46D-31CC-60F332552B3A}"/>
+              </a:ext>
+            </a:extLst>
+          </p:cNvPr>
+          <p:cNvPicPr>
+            <a:picLocks noChangeAspect="1"/>
+          </p:cNvPicPr>
+          <p:nvPr/>
+        </p:nvPicPr>
+        <p:blipFill>
+          <a:blip r:embed="rId3"/>
+          <a:stretch>
+            <a:fillRect/>
+          </a:stretch>
+        </p:blipFill>
+        <p:spPr>
+          <a:xfrm>
+            <a:off x="7358771" y="1027906"/>
+            <a:ext cx="3475738" cy="5322443"/>
+          </a:xfrm>
+          <a:prstGeom prst="rect">
+            <a:avLst/>
+          </a:prstGeom>
+        </p:spPr>
+      </p:pic>
+    </p:spTree>
+    <p:extLst>
+      <p:ext uri="{BB962C8B-B14F-4D97-AF65-F5344CB8AC3E}">
+        <p14:creationId xmlns:p14="http://schemas.microsoft.com/office/powerpoint/2010/main" val="499955063"/>
+      </p:ext>
+    </p:extLst>
+  </p:cSld>
+  <p:clrMapOvr>
+    <a:masterClrMapping/>
+  </p:clrMapOvr>
+</p:sld>
+</file>
+
+<file path=ppt/slides/slide22.xml><?xml version="1.0" encoding="utf-8"?>
+<p:sld xmlns:a="http://schemas.openxmlformats.org/drawingml/2006/main" xmlns:r="http://schemas.openxmlformats.org/officeDocument/2006/relationships" xmlns:p="http://schemas.openxmlformats.org/presentationml/2006/main">
+  <p:cSld>
+    <p:spTree>
+      <p:nvGrpSpPr>
+        <p:cNvPr id="1" name="">
+          <a:extLst>
+            <a:ext uri="{FF2B5EF4-FFF2-40B4-BE49-F238E27FC236}">
+              <a16:creationId xmlns:a16="http://schemas.microsoft.com/office/drawing/2014/main" id="{79CC6344-298A-10E0-249D-88556FD29BF2}"/>
+            </a:ext>
+          </a:extLst>
+        </p:cNvPr>
+        <p:cNvGrpSpPr/>
+        <p:nvPr/>
+      </p:nvGrpSpPr>
+      <p:grpSpPr>
+        <a:xfrm>
+          <a:off x="0" y="0"/>
+          <a:ext cx="0" cy="0"/>
+          <a:chOff x="0" y="0"/>
+          <a:chExt cx="0" cy="0"/>
+        </a:xfrm>
+      </p:grpSpPr>
+      <p:sp>
+        <p:nvSpPr>
+          <p:cNvPr id="2" name="標題 1">
+            <a:extLst>
+              <a:ext uri="{FF2B5EF4-FFF2-40B4-BE49-F238E27FC236}">
+                <a16:creationId xmlns:a16="http://schemas.microsoft.com/office/drawing/2014/main" id="{92337320-F4B1-544B-7B7A-0589EE2671C2}"/>
+              </a:ext>
+            </a:extLst>
+          </p:cNvPr>
+          <p:cNvSpPr>
+            <a:spLocks noGrp="1"/>
+          </p:cNvSpPr>
+          <p:nvPr>
+            <p:ph type="title"/>
+          </p:nvPr>
+        </p:nvSpPr>
+        <p:spPr/>
+        <p:txBody>
+          <a:bodyPr>
+            <a:normAutofit/>
+          </a:bodyPr>
+          <a:lstStyle/>
+          <a:p>
+            <a:r>
+              <a:rPr lang="zh-TW" altLang="zh-TW" sz="4000" dirty="0"/>
+              <a:t>Architecture</a:t>
+            </a:r>
+            <a:endParaRPr lang="zh-TW" altLang="en-US" sz="4000" dirty="0"/>
+          </a:p>
+        </p:txBody>
+      </p:sp>
+      <p:sp>
+        <p:nvSpPr>
+          <p:cNvPr id="4" name="投影片編號版面配置區 3">
+            <a:extLst>
+              <a:ext uri="{FF2B5EF4-FFF2-40B4-BE49-F238E27FC236}">
+                <a16:creationId xmlns:a16="http://schemas.microsoft.com/office/drawing/2014/main" id="{D5D790F5-0005-2783-F270-3B5CB2743623}"/>
+              </a:ext>
+            </a:extLst>
+          </p:cNvPr>
+          <p:cNvSpPr>
+            <a:spLocks noGrp="1"/>
+          </p:cNvSpPr>
+          <p:nvPr>
+            <p:ph type="sldNum" sz="quarter" idx="12"/>
+          </p:nvPr>
+        </p:nvSpPr>
+        <p:spPr/>
+        <p:txBody>
+          <a:bodyPr/>
+          <a:lstStyle/>
+          <a:p>
+            <a:fld id="{9427B4A2-F224-402A-B571-E032C14CF34B}" type="slidenum">
+              <a:rPr lang="zh-TW" altLang="en-US" sz="1600" smtClean="0"/>
+              <a:t>22</a:t>
+            </a:fld>
+            <a:endParaRPr lang="zh-TW" altLang="en-US" sz="1600" dirty="0"/>
+          </a:p>
+        </p:txBody>
+      </p:sp>
+      <p:cxnSp>
+        <p:nvCxnSpPr>
+          <p:cNvPr id="8" name="直線接點 7">
+            <a:extLst>
+              <a:ext uri="{FF2B5EF4-FFF2-40B4-BE49-F238E27FC236}">
+                <a16:creationId xmlns:a16="http://schemas.microsoft.com/office/drawing/2014/main" id="{61A1B763-A9CA-E7CB-9FC3-CF565B5EBA0A}"/>
+              </a:ext>
+            </a:extLst>
+          </p:cNvPr>
+          <p:cNvCxnSpPr>
+            <a:cxnSpLocks/>
+          </p:cNvCxnSpPr>
+          <p:nvPr/>
+        </p:nvCxnSpPr>
+        <p:spPr>
+          <a:xfrm>
+            <a:off x="10520218" y="637308"/>
+            <a:ext cx="1376219" cy="0"/>
+          </a:xfrm>
+          <a:prstGeom prst="line">
+            <a:avLst/>
+          </a:prstGeom>
+        </p:spPr>
+        <p:style>
+          <a:lnRef idx="2">
+            <a:schemeClr val="accent1"/>
+          </a:lnRef>
+          <a:fillRef idx="0">
+            <a:schemeClr val="accent1"/>
+          </a:fillRef>
+          <a:effectRef idx="1">
+            <a:schemeClr val="accent1"/>
+          </a:effectRef>
+          <a:fontRef idx="minor">
+            <a:schemeClr val="tx1"/>
+          </a:fontRef>
+        </p:style>
+      </p:cxnSp>
+      <p:sp>
+        <p:nvSpPr>
+          <p:cNvPr id="10" name="文字方塊 9">
+            <a:extLst>
+              <a:ext uri="{FF2B5EF4-FFF2-40B4-BE49-F238E27FC236}">
+                <a16:creationId xmlns:a16="http://schemas.microsoft.com/office/drawing/2014/main" id="{EADEAB15-6FF5-BD13-5175-F00442317E6E}"/>
+              </a:ext>
+            </a:extLst>
+          </p:cNvPr>
+          <p:cNvSpPr txBox="1"/>
+          <p:nvPr/>
+        </p:nvSpPr>
+        <p:spPr>
+          <a:xfrm>
+            <a:off x="10520217" y="249937"/>
+            <a:ext cx="1376219" cy="369332"/>
+          </a:xfrm>
+          <a:prstGeom prst="rect">
+            <a:avLst/>
+          </a:prstGeom>
+          <a:noFill/>
+        </p:spPr>
+        <p:txBody>
+          <a:bodyPr wrap="square" rtlCol="0">
+            <a:spAutoFit/>
+          </a:bodyPr>
+          <a:lstStyle/>
+          <a:p>
+            <a:pPr algn="ctr"/>
+            <a:r>
+              <a:rPr lang="en-US" altLang="zh-TW" dirty="0"/>
+              <a:t>Methods</a:t>
+            </a:r>
+            <a:endParaRPr lang="zh-TW" altLang="en-US" dirty="0"/>
+          </a:p>
+        </p:txBody>
+      </p:sp>
+      <p:sp>
+        <p:nvSpPr>
+          <p:cNvPr id="7" name="文字方塊 6">
+            <a:extLst>
+              <a:ext uri="{FF2B5EF4-FFF2-40B4-BE49-F238E27FC236}">
+                <a16:creationId xmlns:a16="http://schemas.microsoft.com/office/drawing/2014/main" id="{F394C190-240A-CE10-D1CC-69D902C79B11}"/>
+              </a:ext>
+            </a:extLst>
+          </p:cNvPr>
+          <p:cNvSpPr txBox="1"/>
+          <p:nvPr/>
+        </p:nvSpPr>
+        <p:spPr>
+          <a:xfrm>
+            <a:off x="380874" y="6133902"/>
+            <a:ext cx="4452357" cy="276999"/>
+          </a:xfrm>
+          <a:prstGeom prst="rect">
+            <a:avLst/>
+          </a:prstGeom>
+          <a:noFill/>
+        </p:spPr>
+        <p:txBody>
+          <a:bodyPr wrap="square">
+            <a:spAutoFit/>
+          </a:bodyPr>
+          <a:lstStyle/>
+          <a:p>
+            <a:r>
+              <a:rPr lang="zh-TW" altLang="zh-TW" sz="1200" b="0" i="0" dirty="0">
+                <a:solidFill>
+                  <a:schemeClr val="tx1"/>
+                </a:solidFill>
+                <a:effectLst/>
+                <a:latin typeface="+mn-lt"/>
+              </a:rPr>
+              <a:t>Bui, H., &amp; Le, B. (2025). </a:t>
+            </a:r>
+            <a:r>
+              <a:rPr lang="zh-TW" altLang="zh-TW" sz="1200" b="0" i="1" dirty="0">
+                <a:solidFill>
+                  <a:schemeClr val="tx1"/>
+                </a:solidFill>
+                <a:effectLst/>
+                <a:latin typeface="+mn-lt"/>
+              </a:rPr>
+              <a:t>Expert Systems with Applications</a:t>
+            </a:r>
+            <a:r>
+              <a:rPr lang="zh-TW" altLang="zh-TW" sz="1200" b="0" i="0" dirty="0">
+                <a:solidFill>
+                  <a:schemeClr val="tx1"/>
+                </a:solidFill>
+                <a:effectLst/>
+                <a:latin typeface="+mn-lt"/>
+              </a:rPr>
+              <a:t>, 130220.</a:t>
+            </a:r>
+            <a:endParaRPr lang="zh-TW" altLang="en-US" sz="1200" dirty="0"/>
+          </a:p>
+        </p:txBody>
+      </p:sp>
+      <p:pic>
+        <p:nvPicPr>
+          <p:cNvPr id="5" name="圖片 4">
+            <a:extLst>
+              <a:ext uri="{FF2B5EF4-FFF2-40B4-BE49-F238E27FC236}">
+                <a16:creationId xmlns:a16="http://schemas.microsoft.com/office/drawing/2014/main" id="{E0E82A48-E287-0355-A09C-84D915177C53}"/>
+              </a:ext>
+            </a:extLst>
+          </p:cNvPr>
+          <p:cNvPicPr>
+            <a:picLocks noChangeAspect="1"/>
+          </p:cNvPicPr>
+          <p:nvPr/>
+        </p:nvPicPr>
+        <p:blipFill>
+          <a:blip r:embed="rId2"/>
+          <a:stretch>
+            <a:fillRect/>
+          </a:stretch>
+        </p:blipFill>
+        <p:spPr>
+          <a:xfrm>
+            <a:off x="6283247" y="770868"/>
+            <a:ext cx="4625545" cy="5501533"/>
+          </a:xfrm>
+          <a:prstGeom prst="rect">
+            <a:avLst/>
+          </a:prstGeom>
+        </p:spPr>
+      </p:pic>
+      <p:pic>
+        <p:nvPicPr>
+          <p:cNvPr id="11" name="圖片 10">
+            <a:extLst>
+              <a:ext uri="{FF2B5EF4-FFF2-40B4-BE49-F238E27FC236}">
+                <a16:creationId xmlns:a16="http://schemas.microsoft.com/office/drawing/2014/main" id="{4F9E4FD7-4F21-3A1C-4BDA-57577610DE75}"/>
+              </a:ext>
+            </a:extLst>
+          </p:cNvPr>
+          <p:cNvPicPr>
+            <a:picLocks noChangeAspect="1"/>
+          </p:cNvPicPr>
+          <p:nvPr/>
+        </p:nvPicPr>
+        <p:blipFill>
+          <a:blip r:embed="rId3"/>
+          <a:stretch>
+            <a:fillRect/>
+          </a:stretch>
+        </p:blipFill>
+        <p:spPr>
+          <a:xfrm>
+            <a:off x="668303" y="2116606"/>
+            <a:ext cx="4831240" cy="1502398"/>
+          </a:xfrm>
+          <a:prstGeom prst="rect">
+            <a:avLst/>
+          </a:prstGeom>
+        </p:spPr>
+      </p:pic>
+      <p:sp>
+        <p:nvSpPr>
+          <p:cNvPr id="14" name="矩形 13">
+            <a:extLst>
+              <a:ext uri="{FF2B5EF4-FFF2-40B4-BE49-F238E27FC236}">
+                <a16:creationId xmlns:a16="http://schemas.microsoft.com/office/drawing/2014/main" id="{0AD3AACA-2630-3440-A068-76CC7C44F23D}"/>
+              </a:ext>
+            </a:extLst>
+          </p:cNvPr>
+          <p:cNvSpPr/>
+          <p:nvPr/>
+        </p:nvSpPr>
+        <p:spPr>
+          <a:xfrm>
+            <a:off x="560824" y="1501436"/>
+            <a:ext cx="5638024" cy="4387300"/>
+          </a:xfrm>
+          <a:prstGeom prst="rect">
+            <a:avLst/>
+          </a:prstGeom>
+          <a:noFill/>
+          <a:ln w="38100">
+            <a:solidFill>
+              <a:schemeClr val="tx1"/>
+            </a:solidFill>
+          </a:ln>
+        </p:spPr>
+        <p:style>
+          <a:lnRef idx="2">
+            <a:schemeClr val="accent1">
+              <a:shade val="15000"/>
+            </a:schemeClr>
+          </a:lnRef>
+          <a:fillRef idx="1">
+            <a:schemeClr val="accent1"/>
+          </a:fillRef>
+          <a:effectRef idx="0">
+            <a:schemeClr val="accent1"/>
+          </a:effectRef>
+          <a:fontRef idx="minor">
+            <a:schemeClr val="lt1"/>
+          </a:fontRef>
+        </p:style>
+        <p:txBody>
+          <a:bodyPr rtlCol="0" anchor="ctr"/>
+          <a:lstStyle/>
+          <a:p>
+            <a:pPr algn="ctr"/>
+            <a:endParaRPr lang="zh-TW" altLang="en-US"/>
+          </a:p>
+        </p:txBody>
+      </p:sp>
+      <p:sp>
+        <p:nvSpPr>
+          <p:cNvPr id="16" name="文字方塊 15">
+            <a:extLst>
+              <a:ext uri="{FF2B5EF4-FFF2-40B4-BE49-F238E27FC236}">
+                <a16:creationId xmlns:a16="http://schemas.microsoft.com/office/drawing/2014/main" id="{F95C45BB-B69C-D52F-D3A2-AC2DD97F620A}"/>
+              </a:ext>
+            </a:extLst>
+          </p:cNvPr>
+          <p:cNvSpPr txBox="1"/>
+          <p:nvPr/>
+        </p:nvSpPr>
+        <p:spPr>
+          <a:xfrm>
+            <a:off x="668303" y="1640415"/>
+            <a:ext cx="3070040" cy="400110"/>
+          </a:xfrm>
+          <a:prstGeom prst="rect">
+            <a:avLst/>
+          </a:prstGeom>
+          <a:noFill/>
+        </p:spPr>
+        <p:txBody>
+          <a:bodyPr wrap="square">
+            <a:spAutoFit/>
+          </a:bodyPr>
+          <a:lstStyle/>
+          <a:p>
+            <a:r>
+              <a:rPr lang="en-US" altLang="zh-TW" sz="2000" dirty="0"/>
+              <a:t>Block :</a:t>
+            </a:r>
+            <a:endParaRPr lang="zh-TW" altLang="en-US" sz="2000" dirty="0"/>
+          </a:p>
+        </p:txBody>
+      </p:sp>
+      <p:sp>
+        <p:nvSpPr>
+          <p:cNvPr id="20" name="文字方塊 19">
+            <a:extLst>
+              <a:ext uri="{FF2B5EF4-FFF2-40B4-BE49-F238E27FC236}">
+                <a16:creationId xmlns:a16="http://schemas.microsoft.com/office/drawing/2014/main" id="{174B5454-50BF-056B-06D5-8D184D7673AA}"/>
+              </a:ext>
+            </a:extLst>
+          </p:cNvPr>
+          <p:cNvSpPr txBox="1"/>
+          <p:nvPr/>
+        </p:nvSpPr>
+        <p:spPr>
+          <a:xfrm>
+            <a:off x="675700" y="3942541"/>
+            <a:ext cx="4157531" cy="338554"/>
+          </a:xfrm>
+          <a:prstGeom prst="rect">
+            <a:avLst/>
+          </a:prstGeom>
+          <a:noFill/>
+        </p:spPr>
+        <p:txBody>
+          <a:bodyPr wrap="square" rtlCol="0">
+            <a:spAutoFit/>
+          </a:bodyPr>
+          <a:lstStyle/>
+          <a:p>
+            <a:r>
+              <a:rPr lang="en-US" altLang="zh-TW" sz="1600" dirty="0"/>
+              <a:t>X + Dropout(</a:t>
+            </a:r>
+            <a:r>
+              <a:rPr lang="en-US" altLang="zh-TW" sz="1600" dirty="0" err="1"/>
+              <a:t>Multihead</a:t>
+            </a:r>
+            <a:r>
+              <a:rPr lang="en-US" altLang="zh-TW" sz="1600" dirty="0"/>
+              <a:t>(Norm(X))) = X*</a:t>
+            </a:r>
+            <a:endParaRPr lang="zh-TW" altLang="zh-TW" sz="1600" dirty="0"/>
+          </a:p>
+        </p:txBody>
+      </p:sp>
+      <p:sp>
+        <p:nvSpPr>
+          <p:cNvPr id="22" name="文字方塊 21">
+            <a:extLst>
+              <a:ext uri="{FF2B5EF4-FFF2-40B4-BE49-F238E27FC236}">
+                <a16:creationId xmlns:a16="http://schemas.microsoft.com/office/drawing/2014/main" id="{13C5FC36-3025-989D-45F6-EE41744D1E1A}"/>
+              </a:ext>
+            </a:extLst>
+          </p:cNvPr>
+          <p:cNvSpPr txBox="1"/>
+          <p:nvPr/>
+        </p:nvSpPr>
+        <p:spPr>
+          <a:xfrm>
+            <a:off x="668303" y="4991488"/>
+            <a:ext cx="2408410" cy="338554"/>
+          </a:xfrm>
+          <a:prstGeom prst="rect">
+            <a:avLst/>
+          </a:prstGeom>
+          <a:noFill/>
+        </p:spPr>
+        <p:txBody>
+          <a:bodyPr wrap="square" rtlCol="0">
+            <a:spAutoFit/>
+          </a:bodyPr>
+          <a:lstStyle/>
+          <a:p>
+            <a:pPr algn="ctr"/>
+            <a:r>
+              <a:rPr lang="en-US" altLang="zh-TW" sz="1600" dirty="0"/>
+              <a:t>X* + Dropout(X**) = X***</a:t>
+            </a:r>
+            <a:endParaRPr lang="zh-TW" altLang="zh-TW" sz="1600" dirty="0"/>
+          </a:p>
+        </p:txBody>
+      </p:sp>
+      <p:sp>
+        <p:nvSpPr>
+          <p:cNvPr id="24" name="文字方塊 23">
+            <a:extLst>
+              <a:ext uri="{FF2B5EF4-FFF2-40B4-BE49-F238E27FC236}">
+                <a16:creationId xmlns:a16="http://schemas.microsoft.com/office/drawing/2014/main" id="{1FED6FF0-6DD8-FD8E-6AAE-CF12C8458FB8}"/>
+              </a:ext>
+            </a:extLst>
+          </p:cNvPr>
+          <p:cNvSpPr txBox="1"/>
+          <p:nvPr/>
+        </p:nvSpPr>
+        <p:spPr>
+          <a:xfrm>
+            <a:off x="675513" y="4459561"/>
+            <a:ext cx="5005915" cy="338554"/>
+          </a:xfrm>
+          <a:prstGeom prst="rect">
+            <a:avLst/>
+          </a:prstGeom>
+          <a:noFill/>
+        </p:spPr>
+        <p:txBody>
+          <a:bodyPr wrap="square" rtlCol="0">
+            <a:spAutoFit/>
+          </a:bodyPr>
+          <a:lstStyle/>
+          <a:p>
+            <a:r>
+              <a:rPr lang="en-US" altLang="zh-TW" sz="1600" dirty="0"/>
+              <a:t>FNN(X*) = Linear(Dropout(Activation(Linear(X*)))) = X**</a:t>
+            </a:r>
+            <a:endParaRPr lang="zh-TW" altLang="zh-TW" sz="1600" dirty="0"/>
+          </a:p>
+        </p:txBody>
+      </p:sp>
+      <p:cxnSp>
+        <p:nvCxnSpPr>
+          <p:cNvPr id="26" name="直線接點 25">
+            <a:extLst>
+              <a:ext uri="{FF2B5EF4-FFF2-40B4-BE49-F238E27FC236}">
+                <a16:creationId xmlns:a16="http://schemas.microsoft.com/office/drawing/2014/main" id="{184238BC-D5FA-CF52-4BA6-C9CACD6095F2}"/>
+              </a:ext>
+            </a:extLst>
+          </p:cNvPr>
+          <p:cNvCxnSpPr/>
+          <p:nvPr/>
+        </p:nvCxnSpPr>
+        <p:spPr>
+          <a:xfrm>
+            <a:off x="719328" y="4281095"/>
+            <a:ext cx="237744" cy="0"/>
+          </a:xfrm>
+          <a:prstGeom prst="line">
+            <a:avLst/>
+          </a:prstGeom>
+          <a:ln w="38100">
+            <a:solidFill>
+              <a:srgbClr val="00B050"/>
+            </a:solidFill>
+          </a:ln>
+        </p:spPr>
+        <p:style>
+          <a:lnRef idx="2">
+            <a:schemeClr val="accent1"/>
+          </a:lnRef>
+          <a:fillRef idx="0">
+            <a:schemeClr val="accent1"/>
+          </a:fillRef>
+          <a:effectRef idx="1">
+            <a:schemeClr val="accent1"/>
+          </a:effectRef>
+          <a:fontRef idx="minor">
+            <a:schemeClr val="tx1"/>
+          </a:fontRef>
+        </p:style>
+      </p:cxnSp>
+      <p:cxnSp>
+        <p:nvCxnSpPr>
+          <p:cNvPr id="27" name="直線接點 26">
+            <a:extLst>
+              <a:ext uri="{FF2B5EF4-FFF2-40B4-BE49-F238E27FC236}">
+                <a16:creationId xmlns:a16="http://schemas.microsoft.com/office/drawing/2014/main" id="{1F79A24E-D2DC-C18C-765C-C5EF28A369F0}"/>
+              </a:ext>
+            </a:extLst>
+          </p:cNvPr>
+          <p:cNvCxnSpPr>
+            <a:cxnSpLocks/>
+          </p:cNvCxnSpPr>
+          <p:nvPr/>
+        </p:nvCxnSpPr>
+        <p:spPr>
+          <a:xfrm>
+            <a:off x="2518660" y="5421047"/>
+            <a:ext cx="480572" cy="0"/>
+          </a:xfrm>
+          <a:prstGeom prst="line">
+            <a:avLst/>
+          </a:prstGeom>
+          <a:ln w="38100">
+            <a:solidFill>
+              <a:srgbClr val="FF0000"/>
+            </a:solidFill>
+          </a:ln>
+        </p:spPr>
+        <p:style>
+          <a:lnRef idx="2">
+            <a:schemeClr val="accent1"/>
+          </a:lnRef>
+          <a:fillRef idx="0">
+            <a:schemeClr val="accent1"/>
+          </a:fillRef>
+          <a:effectRef idx="1">
+            <a:schemeClr val="accent1"/>
+          </a:effectRef>
+          <a:fontRef idx="minor">
+            <a:schemeClr val="tx1"/>
+          </a:fontRef>
+        </p:style>
+      </p:cxnSp>
+      <p:sp>
+        <p:nvSpPr>
+          <p:cNvPr id="29" name="文字方塊 28">
+            <a:extLst>
+              <a:ext uri="{FF2B5EF4-FFF2-40B4-BE49-F238E27FC236}">
+                <a16:creationId xmlns:a16="http://schemas.microsoft.com/office/drawing/2014/main" id="{9E0A6E04-BCF1-0B14-730E-5D9C2BC94138}"/>
+              </a:ext>
+            </a:extLst>
+          </p:cNvPr>
+          <p:cNvSpPr txBox="1"/>
+          <p:nvPr/>
+        </p:nvSpPr>
+        <p:spPr>
+          <a:xfrm>
+            <a:off x="838200" y="3634765"/>
+            <a:ext cx="579120" cy="276999"/>
+          </a:xfrm>
+          <a:prstGeom prst="rect">
+            <a:avLst/>
+          </a:prstGeom>
+          <a:noFill/>
+        </p:spPr>
+        <p:txBody>
+          <a:bodyPr wrap="square" rtlCol="0">
+            <a:spAutoFit/>
+          </a:bodyPr>
+          <a:lstStyle/>
+          <a:p>
+            <a:r>
+              <a:rPr lang="en-US" altLang="zh-TW" sz="1200" dirty="0">
+                <a:solidFill>
+                  <a:srgbClr val="00B050"/>
+                </a:solidFill>
+              </a:rPr>
+              <a:t>Input</a:t>
+            </a:r>
+          </a:p>
+        </p:txBody>
+      </p:sp>
+      <p:sp>
+        <p:nvSpPr>
+          <p:cNvPr id="31" name="文字方塊 30">
+            <a:extLst>
+              <a:ext uri="{FF2B5EF4-FFF2-40B4-BE49-F238E27FC236}">
+                <a16:creationId xmlns:a16="http://schemas.microsoft.com/office/drawing/2014/main" id="{DE24C8A6-5F1F-2E8F-48E3-D8A6067F4578}"/>
+              </a:ext>
+            </a:extLst>
+          </p:cNvPr>
+          <p:cNvSpPr txBox="1"/>
+          <p:nvPr/>
+        </p:nvSpPr>
+        <p:spPr>
+          <a:xfrm>
+            <a:off x="2999232" y="4882966"/>
+            <a:ext cx="670774" cy="276999"/>
+          </a:xfrm>
+          <a:prstGeom prst="rect">
+            <a:avLst/>
+          </a:prstGeom>
+          <a:noFill/>
+        </p:spPr>
+        <p:txBody>
+          <a:bodyPr wrap="square" rtlCol="0">
+            <a:spAutoFit/>
+          </a:bodyPr>
+          <a:lstStyle/>
+          <a:p>
+            <a:r>
+              <a:rPr lang="en-US" altLang="zh-TW" sz="1200" dirty="0">
+                <a:solidFill>
+                  <a:srgbClr val="FF0000"/>
+                </a:solidFill>
+              </a:rPr>
+              <a:t>Output</a:t>
+            </a:r>
+          </a:p>
+        </p:txBody>
+      </p:sp>
+      <p:sp>
+        <p:nvSpPr>
+          <p:cNvPr id="33" name="文字方塊 32">
+            <a:extLst>
+              <a:ext uri="{FF2B5EF4-FFF2-40B4-BE49-F238E27FC236}">
+                <a16:creationId xmlns:a16="http://schemas.microsoft.com/office/drawing/2014/main" id="{CDEE2C9C-3BE5-893B-1A0B-60347973061B}"/>
+              </a:ext>
+            </a:extLst>
+          </p:cNvPr>
+          <p:cNvSpPr txBox="1"/>
+          <p:nvPr/>
+        </p:nvSpPr>
+        <p:spPr>
+          <a:xfrm>
+            <a:off x="5360738" y="6331064"/>
+            <a:ext cx="5548054" cy="276999"/>
+          </a:xfrm>
+          <a:prstGeom prst="rect">
+            <a:avLst/>
+          </a:prstGeom>
+          <a:noFill/>
+        </p:spPr>
+        <p:txBody>
+          <a:bodyPr wrap="square">
+            <a:spAutoFit/>
+          </a:bodyPr>
+          <a:lstStyle/>
+          <a:p>
+            <a:pPr marL="0" marR="0" indent="0" algn="l" rtl="0">
+              <a:lnSpc>
+                <a:spcPct val="100000"/>
+              </a:lnSpc>
+              <a:buNone/>
+            </a:pPr>
+            <a:r>
+              <a:rPr lang="zh-TW" altLang="zh-TW" sz="1200" b="0" i="0" dirty="0">
+                <a:solidFill>
+                  <a:schemeClr val="tx1"/>
+                </a:solidFill>
+                <a:effectLst/>
+                <a:latin typeface="+mn-lt"/>
+              </a:rPr>
+              <a:t>CLS is a learnable vector; it is not part of the embeddings of the original variables</a:t>
+            </a:r>
+            <a:r>
+              <a:rPr lang="en-US" altLang="zh-TW" sz="1200" b="0" i="0" dirty="0">
+                <a:solidFill>
+                  <a:schemeClr val="tx1"/>
+                </a:solidFill>
+                <a:effectLst/>
+                <a:latin typeface="+mn-lt"/>
+              </a:rPr>
+              <a:t>.</a:t>
+            </a:r>
+            <a:endParaRPr lang="zh-TW" altLang="zh-TW" sz="1600" b="0" i="0" dirty="0">
+              <a:solidFill>
+                <a:srgbClr val="1F1F1F"/>
+              </a:solidFill>
+              <a:effectLst/>
+              <a:latin typeface="inherit"/>
+            </a:endParaRPr>
+          </a:p>
+        </p:txBody>
+      </p:sp>
+    </p:spTree>
+    <p:extLst>
+      <p:ext uri="{BB962C8B-B14F-4D97-AF65-F5344CB8AC3E}">
+        <p14:creationId xmlns:p14="http://schemas.microsoft.com/office/powerpoint/2010/main" val="1855871278"/>
       </p:ext>
     </p:extLst>
   </p:cSld>
@@ -26777,6 +28997,53 @@
               <a:t>.</a:t>
             </a:r>
             <a:endParaRPr lang="zh-TW" altLang="en-US" sz="1200" dirty="0"/>
+          </a:p>
+        </p:txBody>
+      </p:sp>
+      <p:sp>
+        <p:nvSpPr>
+          <p:cNvPr id="6" name="文字方塊 5">
+            <a:extLst>
+              <a:ext uri="{FF2B5EF4-FFF2-40B4-BE49-F238E27FC236}">
+                <a16:creationId xmlns:a16="http://schemas.microsoft.com/office/drawing/2014/main" id="{AA187FE1-6516-CB6F-6A5B-9B2D439DD4AB}"/>
+              </a:ext>
+            </a:extLst>
+          </p:cNvPr>
+          <p:cNvSpPr txBox="1"/>
+          <p:nvPr/>
+        </p:nvSpPr>
+        <p:spPr>
+          <a:xfrm>
+            <a:off x="4299157" y="3233524"/>
+            <a:ext cx="2668571" cy="338554"/>
+          </a:xfrm>
+          <a:prstGeom prst="rect">
+            <a:avLst/>
+          </a:prstGeom>
+          <a:noFill/>
+        </p:spPr>
+        <p:txBody>
+          <a:bodyPr wrap="square" rtlCol="0">
+            <a:spAutoFit/>
+          </a:bodyPr>
+          <a:lstStyle/>
+          <a:p>
+            <a:r>
+              <a:rPr lang="en-US" altLang="zh-TW" sz="1600" i="1" dirty="0"/>
+              <a:t>W </a:t>
+            </a:r>
+            <a:r>
+              <a:rPr lang="en-US" altLang="zh-TW" sz="1200" dirty="0"/>
+              <a:t>: </a:t>
+            </a:r>
+            <a:r>
+              <a:rPr lang="en-US" altLang="zh-TW" sz="1600" dirty="0"/>
+              <a:t> </a:t>
+            </a:r>
+            <a:r>
+              <a:rPr lang="zh-TW" altLang="zh-TW" sz="1200" dirty="0"/>
+              <a:t>Matrix of a linear transformation</a:t>
+            </a:r>
           </a:p>
         </p:txBody>
       </p:sp>
